--- a/slides/Defence.pptx
+++ b/slides/Defence.pptx
@@ -5,10 +5,10 @@
     <p:sldMasterId id="2147483648" r:id="rId1"/>
   </p:sldMasterIdLst>
   <p:notesMasterIdLst>
-    <p:notesMasterId r:id="rId44"/>
+    <p:notesMasterId r:id="rId45"/>
   </p:notesMasterIdLst>
   <p:handoutMasterIdLst>
-    <p:handoutMasterId r:id="rId45"/>
+    <p:handoutMasterId r:id="rId46"/>
   </p:handoutMasterIdLst>
   <p:sldIdLst>
     <p:sldId id="325" r:id="rId2"/>
@@ -31,28 +31,29 @@
     <p:sldId id="419" r:id="rId19"/>
     <p:sldId id="420" r:id="rId20"/>
     <p:sldId id="409" r:id="rId21"/>
-    <p:sldId id="421" r:id="rId22"/>
-    <p:sldId id="424" r:id="rId23"/>
-    <p:sldId id="422" r:id="rId24"/>
-    <p:sldId id="444" r:id="rId25"/>
-    <p:sldId id="447" r:id="rId26"/>
-    <p:sldId id="430" r:id="rId27"/>
-    <p:sldId id="432" r:id="rId28"/>
-    <p:sldId id="449" r:id="rId29"/>
-    <p:sldId id="452" r:id="rId30"/>
-    <p:sldId id="450" r:id="rId31"/>
-    <p:sldId id="448" r:id="rId32"/>
-    <p:sldId id="455" r:id="rId33"/>
-    <p:sldId id="451" r:id="rId34"/>
-    <p:sldId id="453" r:id="rId35"/>
-    <p:sldId id="454" r:id="rId36"/>
-    <p:sldId id="445" r:id="rId37"/>
-    <p:sldId id="397" r:id="rId38"/>
-    <p:sldId id="411" r:id="rId39"/>
-    <p:sldId id="404" r:id="rId40"/>
-    <p:sldId id="443" r:id="rId41"/>
-    <p:sldId id="394" r:id="rId42"/>
-    <p:sldId id="370" r:id="rId43"/>
+    <p:sldId id="456" r:id="rId22"/>
+    <p:sldId id="421" r:id="rId23"/>
+    <p:sldId id="424" r:id="rId24"/>
+    <p:sldId id="422" r:id="rId25"/>
+    <p:sldId id="444" r:id="rId26"/>
+    <p:sldId id="447" r:id="rId27"/>
+    <p:sldId id="430" r:id="rId28"/>
+    <p:sldId id="432" r:id="rId29"/>
+    <p:sldId id="449" r:id="rId30"/>
+    <p:sldId id="452" r:id="rId31"/>
+    <p:sldId id="450" r:id="rId32"/>
+    <p:sldId id="448" r:id="rId33"/>
+    <p:sldId id="455" r:id="rId34"/>
+    <p:sldId id="451" r:id="rId35"/>
+    <p:sldId id="453" r:id="rId36"/>
+    <p:sldId id="454" r:id="rId37"/>
+    <p:sldId id="445" r:id="rId38"/>
+    <p:sldId id="397" r:id="rId39"/>
+    <p:sldId id="411" r:id="rId40"/>
+    <p:sldId id="404" r:id="rId41"/>
+    <p:sldId id="443" r:id="rId42"/>
+    <p:sldId id="394" r:id="rId43"/>
+    <p:sldId id="370" r:id="rId44"/>
   </p:sldIdLst>
   <p:sldSz cx="9144000" cy="5143500" type="screen16x9"/>
   <p:notesSz cx="6858000" cy="9144000"/>
@@ -244,7 +245,7 @@
           <a:p>
             <a:fld id="{97F00993-3FDD-4E80-810D-AC24CF6A32B3}" type="datetimeFigureOut">
               <a:rPr lang="de-DE" smtClean="0"/>
-              <a:t>13.10.2026</a:t>
+              <a:t>14.10.2026</a:t>
             </a:fld>
             <a:endParaRPr lang="de-DE"/>
           </a:p>
@@ -409,7 +410,7 @@
           <a:p>
             <a:fld id="{0F2728AD-B8FF-467B-AF5F-4891412E46D0}" type="datetimeFigureOut">
               <a:rPr lang="de-DE" smtClean="0"/>
-              <a:t>13.10.2026</a:t>
+              <a:t>14.10.2026</a:t>
             </a:fld>
             <a:endParaRPr lang="de-DE"/>
           </a:p>
@@ -1045,7 +1046,7 @@
           <a:p>
             <a:fld id="{B9A045E6-D734-4DB2-BEE5-DF972DD20CA2}" type="slidenum">
               <a:rPr lang="de-DE" smtClean="0"/>
-              <a:t>30</a:t>
+              <a:t>31</a:t>
             </a:fld>
             <a:endParaRPr lang="de-DE"/>
           </a:p>
@@ -1160,7 +1161,7 @@
           <a:p>
             <a:fld id="{B9A045E6-D734-4DB2-BEE5-DF972DD20CA2}" type="slidenum">
               <a:rPr lang="de-DE" smtClean="0"/>
-              <a:t>39</a:t>
+              <a:t>40</a:t>
             </a:fld>
             <a:endParaRPr lang="de-DE"/>
           </a:p>
@@ -1275,7 +1276,7 @@
           <a:p>
             <a:fld id="{B9A045E6-D734-4DB2-BEE5-DF972DD20CA2}" type="slidenum">
               <a:rPr lang="de-DE" smtClean="0"/>
-              <a:t>40</a:t>
+              <a:t>41</a:t>
             </a:fld>
             <a:endParaRPr lang="de-DE"/>
           </a:p>
@@ -1390,7 +1391,7 @@
           <a:p>
             <a:fld id="{B9A045E6-D734-4DB2-BEE5-DF972DD20CA2}" type="slidenum">
               <a:rPr lang="de-DE" smtClean="0"/>
-              <a:t>41</a:t>
+              <a:t>42</a:t>
             </a:fld>
             <a:endParaRPr lang="de-DE"/>
           </a:p>
@@ -1481,7 +1482,7 @@
           <a:p>
             <a:fld id="{B9A045E6-D734-4DB2-BEE5-DF972DD20CA2}" type="slidenum">
               <a:rPr lang="de-DE" smtClean="0"/>
-              <a:t>42</a:t>
+              <a:t>43</a:t>
             </a:fld>
             <a:endParaRPr lang="de-DE"/>
           </a:p>
@@ -13076,7 +13077,7 @@
 </file>
 
 <file path=ppt/slides/slide15.xml><?xml version="1.0" encoding="utf-8"?>
-<p:sld xmlns:a="http://schemas.openxmlformats.org/drawingml/2006/main" xmlns:r="http://schemas.openxmlformats.org/officeDocument/2006/relationships" xmlns:p="http://schemas.openxmlformats.org/presentationml/2006/main">
+<p:sld xmlns:a="http://schemas.openxmlformats.org/drawingml/2006/main" xmlns:r="http://schemas.openxmlformats.org/officeDocument/2006/relationships" xmlns:p="http://schemas.openxmlformats.org/presentationml/2006/main" show="0">
   <p:cSld>
     <p:spTree>
       <p:nvGrpSpPr>
@@ -14710,7 +14711,7 @@
 </file>
 
 <file path=ppt/slides/slide17.xml><?xml version="1.0" encoding="utf-8"?>
-<p:sld xmlns:a="http://schemas.openxmlformats.org/drawingml/2006/main" xmlns:r="http://schemas.openxmlformats.org/officeDocument/2006/relationships" xmlns:p="http://schemas.openxmlformats.org/presentationml/2006/main">
+<p:sld xmlns:a="http://schemas.openxmlformats.org/drawingml/2006/main" xmlns:r="http://schemas.openxmlformats.org/officeDocument/2006/relationships" xmlns:p="http://schemas.openxmlformats.org/presentationml/2006/main" show="0">
   <p:cSld>
     <p:spTree>
       <p:nvGrpSpPr>
@@ -17078,7 +17079,7 @@
 </file>
 
 <file path=ppt/slides/slide19.xml><?xml version="1.0" encoding="utf-8"?>
-<p:sld xmlns:a="http://schemas.openxmlformats.org/drawingml/2006/main" xmlns:r="http://schemas.openxmlformats.org/officeDocument/2006/relationships" xmlns:p="http://schemas.openxmlformats.org/presentationml/2006/main">
+<p:sld xmlns:a="http://schemas.openxmlformats.org/drawingml/2006/main" xmlns:r="http://schemas.openxmlformats.org/officeDocument/2006/relationships" xmlns:p="http://schemas.openxmlformats.org/presentationml/2006/main" show="0">
   <p:cSld>
     <p:spTree>
       <p:nvGrpSpPr>
@@ -18447,7 +18448,7 @@
                 </a:solidFill>
                 <a:cs typeface="Arial" panose="020B0604020202020204" pitchFamily="34" charset="0"/>
               </a:rPr>
-              <a:t>Results: Logging Guidelines in Academic Literature (RQ2)</a:t>
+              <a:t>Results: Developer Practices &amp; Challenges (RQ1)</a:t>
             </a:r>
           </a:p>
         </p:txBody>
@@ -18522,7 +18523,7 @@
         <p:spPr>
           <a:xfrm>
             <a:off x="468000" y="1383618"/>
-            <a:ext cx="7560000" cy="2339102"/>
+            <a:ext cx="7560000" cy="2800767"/>
           </a:xfrm>
           <a:prstGeom prst="rect">
             <a:avLst/>
@@ -18545,7 +18546,7 @@
                   <a:schemeClr val="tx2"/>
                 </a:solidFill>
               </a:rPr>
-              <a:t>Literature Collection:</a:t>
+              <a:t>Logging Implementation:</a:t>
             </a:r>
           </a:p>
           <a:p>
@@ -18559,7 +18560,15 @@
                   <a:schemeClr val="tx2"/>
                 </a:solidFill>
               </a:rPr>
-              <a:t>Google Scholar search &amp; backward snowballing</a:t>
+              <a:t>Practices</a:t>
+            </a:r>
+            <a:r>
+              <a:rPr lang="en-GB" sz="1400" dirty="0">
+                <a:solidFill>
+                  <a:schemeClr val="tx2"/>
+                </a:solidFill>
+              </a:rPr>
+              <a:t>: Event reporting, state dumps &amp; execution tracing</a:t>
             </a:r>
           </a:p>
           <a:p>
@@ -18573,7 +18582,44 @@
                   <a:schemeClr val="tx2"/>
                 </a:solidFill>
               </a:rPr>
-              <a:t>31 relevant academic publication</a:t>
+              <a:t>Challenges: </a:t>
+            </a:r>
+            <a:r>
+              <a:rPr lang="en-US" sz="1400" dirty="0">
+                <a:solidFill>
+                  <a:schemeClr val="tx2"/>
+                </a:solidFill>
+              </a:rPr>
+              <a:t>Log content selection, logging performance overhead</a:t>
+            </a:r>
+            <a:br>
+              <a:rPr lang="en-GB" sz="1600" noProof="0" dirty="0">
+                <a:solidFill>
+                  <a:schemeClr val="tx2"/>
+                </a:solidFill>
+              </a:rPr>
+            </a:br>
+            <a:r>
+              <a:rPr lang="en-GB" sz="1600" noProof="0" dirty="0">
+                <a:solidFill>
+                  <a:schemeClr val="tx2"/>
+                </a:solidFill>
+              </a:rPr>
+              <a:t>	</a:t>
+            </a:r>
+          </a:p>
+          <a:p>
+            <a:pPr marL="285750" indent="-285750">
+              <a:buFont typeface="Arial" panose="020B0604020202020204" pitchFamily="34" charset="0"/>
+              <a:buChar char="•"/>
+            </a:pPr>
+            <a:r>
+              <a:rPr lang="en-GB" sz="1600" b="1" noProof="0" dirty="0">
+                <a:solidFill>
+                  <a:schemeClr val="tx2"/>
+                </a:solidFill>
+              </a:rPr>
+              <a:t>Log Analysis:</a:t>
             </a:r>
           </a:p>
           <a:p>
@@ -18582,28 +18628,51 @@
               <a:buChar char="•"/>
             </a:pPr>
             <a:r>
-              <a:rPr lang="en-GB" sz="1400" noProof="0" dirty="0">
+              <a:rPr lang="en-GB" sz="1400" dirty="0">
                 <a:solidFill>
                   <a:schemeClr val="tx2"/>
                 </a:solidFill>
               </a:rPr>
-              <a:t>7 supporting logging tools</a:t>
-            </a:r>
-            <a:br>
-              <a:rPr lang="en-GB" sz="1600" noProof="0" dirty="0">
+              <a:t>Practices: </a:t>
+            </a:r>
+            <a:r>
+              <a:rPr lang="en-US" sz="1400" dirty="0">
                 <a:solidFill>
                   <a:schemeClr val="tx2"/>
                 </a:solidFill>
               </a:rPr>
-            </a:br>
-            <a:r>
-              <a:rPr lang="en-GB" sz="1600" noProof="0" dirty="0">
+              <a:t>Debugging, error searches &amp; execution tracing</a:t>
+            </a:r>
+          </a:p>
+          <a:p>
+            <a:pPr marL="628650" lvl="1" indent="-285750">
+              <a:buFont typeface="Arial" panose="020B0604020202020204" pitchFamily="34" charset="0"/>
+              <a:buChar char="•"/>
+            </a:pPr>
+            <a:r>
+              <a:rPr lang="en-US" sz="1400" dirty="0">
                 <a:solidFill>
                   <a:schemeClr val="tx2"/>
                 </a:solidFill>
               </a:rPr>
-              <a:t>	</a:t>
-            </a:r>
+              <a:t>Challenges: Information overload, unfamiliar log interpretation</a:t>
+            </a:r>
+            <a:endParaRPr lang="en-GB" sz="1400" dirty="0">
+              <a:solidFill>
+                <a:schemeClr val="tx2"/>
+              </a:solidFill>
+            </a:endParaRPr>
+          </a:p>
+          <a:p>
+            <a:pPr marL="628650" lvl="1" indent="-285750">
+              <a:buFont typeface="Arial" panose="020B0604020202020204" pitchFamily="34" charset="0"/>
+              <a:buChar char="•"/>
+            </a:pPr>
+            <a:endParaRPr lang="en-GB" sz="1400" dirty="0">
+              <a:solidFill>
+                <a:schemeClr val="tx2"/>
+              </a:solidFill>
+            </a:endParaRPr>
           </a:p>
           <a:p>
             <a:pPr marL="285750" indent="-285750">
@@ -18611,12 +18680,12 @@
               <a:buChar char="•"/>
             </a:pPr>
             <a:r>
-              <a:rPr lang="en-GB" sz="1600" b="1" noProof="0" dirty="0">
+              <a:rPr lang="en-GB" sz="1600" b="1" dirty="0">
                 <a:solidFill>
                   <a:schemeClr val="tx2"/>
                 </a:solidFill>
               </a:rPr>
-              <a:t>Main Findings:</a:t>
+              <a:t>Fault Localisation:</a:t>
             </a:r>
           </a:p>
           <a:p>
@@ -18625,12 +18694,36 @@
               <a:buChar char="•"/>
             </a:pPr>
             <a:r>
-              <a:rPr lang="en-GB" sz="1400" noProof="0" dirty="0">
+              <a:rPr lang="en-GB" sz="1400" dirty="0">
                 <a:solidFill>
                   <a:schemeClr val="tx2"/>
                 </a:solidFill>
               </a:rPr>
-              <a:t>Actionable recommendation across four logging dimensions</a:t>
+              <a:t>Practices: </a:t>
+            </a:r>
+            <a:r>
+              <a:rPr lang="fr-FR" sz="1400" dirty="0">
+                <a:solidFill>
+                  <a:schemeClr val="tx2"/>
+                </a:solidFill>
+              </a:rPr>
+              <a:t>Tracing </a:t>
+            </a:r>
+            <a:r>
+              <a:rPr lang="fr-FR" sz="1400" dirty="0" err="1">
+                <a:solidFill>
+                  <a:schemeClr val="tx2"/>
+                </a:solidFill>
+              </a:rPr>
+              <a:t>failures</a:t>
+            </a:r>
+            <a:r>
+              <a:rPr lang="fr-FR" sz="1400" dirty="0">
+                <a:solidFill>
+                  <a:schemeClr val="tx2"/>
+                </a:solidFill>
+              </a:rPr>
+              <a:t>, source-code inspection &amp; collaboration</a:t>
             </a:r>
           </a:p>
           <a:p>
@@ -18639,41 +18732,61 @@
               <a:buChar char="•"/>
             </a:pPr>
             <a:r>
-              <a:rPr lang="en-GB" sz="1400" noProof="0" dirty="0">
+              <a:rPr lang="fr-FR" sz="1400" dirty="0">
                 <a:solidFill>
                   <a:schemeClr val="tx2"/>
                 </a:solidFill>
               </a:rPr>
-              <a:t>Literature-derived classification with 17 deductive themes</a:t>
-            </a:r>
+              <a:t>Challenges: Cross-component interactions, </a:t>
+            </a:r>
+            <a:r>
+              <a:rPr lang="fr-FR" sz="1400" dirty="0" err="1">
+                <a:solidFill>
+                  <a:schemeClr val="tx2"/>
+                </a:solidFill>
+              </a:rPr>
+              <a:t>missing</a:t>
+            </a:r>
+            <a:r>
+              <a:rPr lang="fr-FR" sz="1400" dirty="0">
+                <a:solidFill>
+                  <a:schemeClr val="tx2"/>
+                </a:solidFill>
+              </a:rPr>
+              <a:t> </a:t>
+            </a:r>
+            <a:r>
+              <a:rPr lang="fr-FR" sz="1400" dirty="0" err="1">
+                <a:solidFill>
+                  <a:schemeClr val="tx2"/>
+                </a:solidFill>
+              </a:rPr>
+              <a:t>contextual</a:t>
+            </a:r>
+            <a:r>
+              <a:rPr lang="fr-FR" sz="1400" dirty="0">
+                <a:solidFill>
+                  <a:schemeClr val="tx2"/>
+                </a:solidFill>
+              </a:rPr>
+              <a:t> information</a:t>
+            </a:r>
+            <a:endParaRPr lang="en-GB" sz="1400" dirty="0">
+              <a:solidFill>
+                <a:schemeClr val="tx2"/>
+              </a:solidFill>
+            </a:endParaRPr>
           </a:p>
           <a:p>
             <a:pPr marL="628650" lvl="1" indent="-285750">
               <a:buFont typeface="Arial" panose="020B0604020202020204" pitchFamily="34" charset="0"/>
               <a:buChar char="•"/>
             </a:pPr>
-            <a:r>
-              <a:rPr lang="en-GB" sz="1400" noProof="0" dirty="0">
-                <a:solidFill>
-                  <a:schemeClr val="tx2"/>
-                </a:solidFill>
-              </a:rPr>
-              <a:t>Substantial overlap with collected open-source guidance</a:t>
-            </a:r>
-          </a:p>
-          <a:p>
-            <a:pPr marL="628650" lvl="1" indent="-285750">
-              <a:buFont typeface="Arial" panose="020B0604020202020204" pitchFamily="34" charset="0"/>
-              <a:buChar char="•"/>
-            </a:pPr>
-            <a:r>
-              <a:rPr lang="en-GB" sz="1400" noProof="0" dirty="0">
-                <a:solidFill>
-                  <a:schemeClr val="tx2"/>
-                </a:solidFill>
-              </a:rPr>
-              <a:t>Partial coverage of some academic recommendations</a:t>
-            </a:r>
+            <a:endParaRPr lang="en-GB" sz="1400" noProof="0" dirty="0">
+              <a:solidFill>
+                <a:schemeClr val="tx2"/>
+              </a:solidFill>
+            </a:endParaRPr>
           </a:p>
         </p:txBody>
       </p:sp>
@@ -19089,7 +19202,7 @@
                                         <p:tgtEl>
                                           <p:spTgt spid="3">
                                             <p:txEl>
-                                              <p:pRg st="6" end="6"/>
+                                              <p:pRg st="7" end="7"/>
                                             </p:txEl>
                                           </p:spTgt>
                                         </p:tgtEl>
@@ -19107,7 +19220,7 @@
                                         <p:tgtEl>
                                           <p:spTgt spid="3">
                                             <p:txEl>
-                                              <p:pRg st="6" end="6"/>
+                                              <p:pRg st="7" end="7"/>
                                             </p:txEl>
                                           </p:spTgt>
                                         </p:tgtEl>
@@ -19150,7 +19263,7 @@
                                         <p:tgtEl>
                                           <p:spTgt spid="3">
                                             <p:txEl>
-                                              <p:pRg st="7" end="7"/>
+                                              <p:pRg st="8" end="8"/>
                                             </p:txEl>
                                           </p:spTgt>
                                         </p:tgtEl>
@@ -19168,7 +19281,7 @@
                                         <p:tgtEl>
                                           <p:spTgt spid="3">
                                             <p:txEl>
-                                              <p:pRg st="7" end="7"/>
+                                              <p:pRg st="8" end="8"/>
                                             </p:txEl>
                                           </p:spTgt>
                                         </p:tgtEl>
@@ -19211,7 +19324,7 @@
                                         <p:tgtEl>
                                           <p:spTgt spid="3">
                                             <p:txEl>
-                                              <p:pRg st="8" end="8"/>
+                                              <p:pRg st="9" end="9"/>
                                             </p:txEl>
                                           </p:spTgt>
                                         </p:tgtEl>
@@ -19229,7 +19342,7 @@
                                         <p:tgtEl>
                                           <p:spTgt spid="3">
                                             <p:txEl>
-                                              <p:pRg st="8" end="8"/>
+                                              <p:pRg st="9" end="9"/>
                                             </p:txEl>
                                           </p:spTgt>
                                         </p:tgtEl>
@@ -19270,6 +19383,743 @@
 </file>
 
 <file path=ppt/slides/slide21.xml><?xml version="1.0" encoding="utf-8"?>
+<p:sld xmlns:a="http://schemas.openxmlformats.org/drawingml/2006/main" xmlns:r="http://schemas.openxmlformats.org/officeDocument/2006/relationships" xmlns:p="http://schemas.openxmlformats.org/presentationml/2006/main">
+  <p:cSld>
+    <p:spTree>
+      <p:nvGrpSpPr>
+        <p:cNvPr id="1" name="">
+          <a:extLst>
+            <a:ext uri="{FF2B5EF4-FFF2-40B4-BE49-F238E27FC236}">
+              <a16:creationId xmlns:a16="http://schemas.microsoft.com/office/drawing/2014/main" id="{3D904019-372F-AE95-C9B7-74BEE3A9883E}"/>
+            </a:ext>
+          </a:extLst>
+        </p:cNvPr>
+        <p:cNvGrpSpPr/>
+        <p:nvPr/>
+      </p:nvGrpSpPr>
+      <p:grpSpPr>
+        <a:xfrm>
+          <a:off x="0" y="0"/>
+          <a:ext cx="0" cy="0"/>
+          <a:chOff x="0" y="0"/>
+          <a:chExt cx="0" cy="0"/>
+        </a:xfrm>
+      </p:grpSpPr>
+      <p:sp>
+        <p:nvSpPr>
+          <p:cNvPr id="7" name="Title 1">
+            <a:extLst>
+              <a:ext uri="{FF2B5EF4-FFF2-40B4-BE49-F238E27FC236}">
+                <a16:creationId xmlns:a16="http://schemas.microsoft.com/office/drawing/2014/main" id="{42C9C62C-8F28-7106-761C-A9D68DD42D8E}"/>
+              </a:ext>
+            </a:extLst>
+          </p:cNvPr>
+          <p:cNvSpPr>
+            <a:spLocks noGrp="1"/>
+          </p:cNvSpPr>
+          <p:nvPr>
+            <p:ph type="title"/>
+          </p:nvPr>
+        </p:nvSpPr>
+        <p:spPr>
+          <a:xfrm>
+            <a:off x="468000" y="396000"/>
+            <a:ext cx="7848416" cy="468000"/>
+          </a:xfrm>
+        </p:spPr>
+        <p:txBody>
+          <a:bodyPr/>
+          <a:lstStyle/>
+          <a:p>
+            <a:pPr lvl="2">
+              <a:lnSpc>
+                <a:spcPct val="100000"/>
+              </a:lnSpc>
+              <a:buClr>
+                <a:schemeClr val="tx2"/>
+              </a:buClr>
+              <a:buSzPct val="130000"/>
+            </a:pPr>
+            <a:r>
+              <a:rPr lang="en-GB" sz="2400" noProof="0" dirty="0">
+                <a:solidFill>
+                  <a:srgbClr val="17365C"/>
+                </a:solidFill>
+                <a:cs typeface="Arial" panose="020B0604020202020204" pitchFamily="34" charset="0"/>
+              </a:rPr>
+              <a:t>Results: Logging Guidelines in Academic Literature (RQ2)</a:t>
+            </a:r>
+          </a:p>
+        </p:txBody>
+      </p:sp>
+      <p:sp>
+        <p:nvSpPr>
+          <p:cNvPr id="2" name="Slide Number Placeholder 1">
+            <a:extLst>
+              <a:ext uri="{FF2B5EF4-FFF2-40B4-BE49-F238E27FC236}">
+                <a16:creationId xmlns:a16="http://schemas.microsoft.com/office/drawing/2014/main" id="{E69C1AA2-27FA-7A39-F15A-792341453E8C}"/>
+              </a:ext>
+            </a:extLst>
+          </p:cNvPr>
+          <p:cNvSpPr>
+            <a:spLocks noGrp="1"/>
+          </p:cNvSpPr>
+          <p:nvPr>
+            <p:ph type="sldNum" sz="quarter" idx="12"/>
+          </p:nvPr>
+        </p:nvSpPr>
+        <p:spPr>
+          <a:xfrm>
+            <a:off x="324000" y="4840014"/>
+            <a:ext cx="252000" cy="108000"/>
+          </a:xfrm>
+        </p:spPr>
+        <p:txBody>
+          <a:bodyPr anchor="ctr">
+            <a:normAutofit/>
+          </a:bodyPr>
+          <a:lstStyle/>
+          <a:p>
+            <a:pPr>
+              <a:lnSpc>
+                <a:spcPct val="90000"/>
+              </a:lnSpc>
+              <a:spcAft>
+                <a:spcPts val="600"/>
+              </a:spcAft>
+            </a:pPr>
+            <a:fld id="{6C8FC03C-C266-4645-ABC5-645062898383}" type="slidenum">
+              <a:rPr lang="en-GB" sz="700" noProof="0" smtClean="0"/>
+              <a:pPr>
+                <a:lnSpc>
+                  <a:spcPct val="90000"/>
+                </a:lnSpc>
+                <a:spcAft>
+                  <a:spcPts val="600"/>
+                </a:spcAft>
+              </a:pPr>
+              <a:t>21</a:t>
+            </a:fld>
+            <a:r>
+              <a:rPr lang="en-GB" sz="700" noProof="0" dirty="0"/>
+              <a:t> </a:t>
+            </a:r>
+          </a:p>
+        </p:txBody>
+      </p:sp>
+      <p:sp>
+        <p:nvSpPr>
+          <p:cNvPr id="3" name="TextBox 2">
+            <a:extLst>
+              <a:ext uri="{FF2B5EF4-FFF2-40B4-BE49-F238E27FC236}">
+                <a16:creationId xmlns:a16="http://schemas.microsoft.com/office/drawing/2014/main" id="{C3C01424-86B2-9BC4-C271-E647678FD76C}"/>
+              </a:ext>
+            </a:extLst>
+          </p:cNvPr>
+          <p:cNvSpPr txBox="1"/>
+          <p:nvPr/>
+        </p:nvSpPr>
+        <p:spPr>
+          <a:xfrm>
+            <a:off x="468000" y="1383618"/>
+            <a:ext cx="7560000" cy="1908215"/>
+          </a:xfrm>
+          <a:prstGeom prst="rect">
+            <a:avLst/>
+          </a:prstGeom>
+          <a:noFill/>
+        </p:spPr>
+        <p:txBody>
+          <a:bodyPr wrap="square" rtlCol="0">
+            <a:spAutoFit/>
+          </a:bodyPr>
+          <a:lstStyle/>
+          <a:p>
+            <a:pPr marL="285750" indent="-285750">
+              <a:buFont typeface="Arial" panose="020B0604020202020204" pitchFamily="34" charset="0"/>
+              <a:buChar char="•"/>
+            </a:pPr>
+            <a:r>
+              <a:rPr lang="en-GB" sz="1600" b="1" noProof="0" dirty="0">
+                <a:solidFill>
+                  <a:schemeClr val="tx2"/>
+                </a:solidFill>
+              </a:rPr>
+              <a:t>Literature Collection:</a:t>
+            </a:r>
+          </a:p>
+          <a:p>
+            <a:pPr marL="628650" lvl="1" indent="-285750">
+              <a:buFont typeface="Arial" panose="020B0604020202020204" pitchFamily="34" charset="0"/>
+              <a:buChar char="•"/>
+            </a:pPr>
+            <a:r>
+              <a:rPr lang="en-GB" sz="1400" noProof="0" dirty="0">
+                <a:solidFill>
+                  <a:schemeClr val="tx2"/>
+                </a:solidFill>
+              </a:rPr>
+              <a:t>Google Scholar search &amp; backward snowballing</a:t>
+            </a:r>
+          </a:p>
+          <a:p>
+            <a:pPr marL="628650" lvl="1" indent="-285750">
+              <a:buFont typeface="Arial" panose="020B0604020202020204" pitchFamily="34" charset="0"/>
+              <a:buChar char="•"/>
+            </a:pPr>
+            <a:r>
+              <a:rPr lang="en-GB" sz="1400" noProof="0" dirty="0">
+                <a:solidFill>
+                  <a:schemeClr val="tx2"/>
+                </a:solidFill>
+              </a:rPr>
+              <a:t>31 relevant academic publications</a:t>
+            </a:r>
+          </a:p>
+          <a:p>
+            <a:pPr marL="628650" lvl="1" indent="-285750">
+              <a:buFont typeface="Arial" panose="020B0604020202020204" pitchFamily="34" charset="0"/>
+              <a:buChar char="•"/>
+            </a:pPr>
+            <a:r>
+              <a:rPr lang="en-GB" sz="1400" noProof="0" dirty="0">
+                <a:solidFill>
+                  <a:schemeClr val="tx2"/>
+                </a:solidFill>
+              </a:rPr>
+              <a:t>7 supporting logging tools</a:t>
+            </a:r>
+            <a:br>
+              <a:rPr lang="en-GB" sz="1600" noProof="0" dirty="0">
+                <a:solidFill>
+                  <a:schemeClr val="tx2"/>
+                </a:solidFill>
+              </a:rPr>
+            </a:br>
+            <a:r>
+              <a:rPr lang="en-GB" sz="1600" noProof="0" dirty="0">
+                <a:solidFill>
+                  <a:schemeClr val="tx2"/>
+                </a:solidFill>
+              </a:rPr>
+              <a:t>	</a:t>
+            </a:r>
+          </a:p>
+          <a:p>
+            <a:pPr marL="285750" indent="-285750">
+              <a:buFont typeface="Arial" panose="020B0604020202020204" pitchFamily="34" charset="0"/>
+              <a:buChar char="•"/>
+            </a:pPr>
+            <a:r>
+              <a:rPr lang="en-GB" sz="1600" b="1" noProof="0" dirty="0">
+                <a:solidFill>
+                  <a:schemeClr val="tx2"/>
+                </a:solidFill>
+              </a:rPr>
+              <a:t>Main Findings:</a:t>
+            </a:r>
+          </a:p>
+          <a:p>
+            <a:pPr marL="628650" lvl="1" indent="-285750">
+              <a:buFont typeface="Arial" panose="020B0604020202020204" pitchFamily="34" charset="0"/>
+              <a:buChar char="•"/>
+            </a:pPr>
+            <a:r>
+              <a:rPr lang="en-GB" sz="1400" noProof="0" dirty="0">
+                <a:solidFill>
+                  <a:schemeClr val="tx2"/>
+                </a:solidFill>
+              </a:rPr>
+              <a:t>Actionable recommendations across four logging dimensions</a:t>
+            </a:r>
+          </a:p>
+          <a:p>
+            <a:pPr marL="628650" lvl="1" indent="-285750">
+              <a:buFont typeface="Arial" panose="020B0604020202020204" pitchFamily="34" charset="0"/>
+              <a:buChar char="•"/>
+            </a:pPr>
+            <a:r>
+              <a:rPr lang="en-GB" sz="1400" noProof="0" dirty="0">
+                <a:solidFill>
+                  <a:schemeClr val="tx2"/>
+                </a:solidFill>
+              </a:rPr>
+              <a:t>Literature-derived classification with 17 deductive themes</a:t>
+            </a:r>
+          </a:p>
+        </p:txBody>
+      </p:sp>
+    </p:spTree>
+    <p:extLst>
+      <p:ext uri="{BB962C8B-B14F-4D97-AF65-F5344CB8AC3E}">
+        <p14:creationId xmlns:p14="http://schemas.microsoft.com/office/powerpoint/2010/main" val="3999244456"/>
+      </p:ext>
+    </p:extLst>
+  </p:cSld>
+  <p:clrMapOvr>
+    <a:masterClrMapping/>
+  </p:clrMapOvr>
+  <p:timing>
+    <p:tnLst>
+      <p:par>
+        <p:cTn id="1" dur="indefinite" restart="never" nodeType="tmRoot">
+          <p:childTnLst>
+            <p:seq concurrent="1" nextAc="seek">
+              <p:cTn id="2" dur="indefinite" nodeType="mainSeq">
+                <p:childTnLst>
+                  <p:par>
+                    <p:cTn id="3" fill="hold">
+                      <p:stCondLst>
+                        <p:cond delay="indefinite"/>
+                      </p:stCondLst>
+                      <p:childTnLst>
+                        <p:par>
+                          <p:cTn id="4" fill="hold">
+                            <p:stCondLst>
+                              <p:cond delay="0"/>
+                            </p:stCondLst>
+                            <p:childTnLst>
+                              <p:par>
+                                <p:cTn id="5" presetID="10" presetClass="entr" presetSubtype="0" fill="hold" nodeType="clickEffect">
+                                  <p:stCondLst>
+                                    <p:cond delay="0"/>
+                                  </p:stCondLst>
+                                  <p:childTnLst>
+                                    <p:set>
+                                      <p:cBhvr>
+                                        <p:cTn id="6" dur="1" fill="hold">
+                                          <p:stCondLst>
+                                            <p:cond delay="0"/>
+                                          </p:stCondLst>
+                                        </p:cTn>
+                                        <p:tgtEl>
+                                          <p:spTgt spid="3">
+                                            <p:txEl>
+                                              <p:pRg st="0" end="0"/>
+                                            </p:txEl>
+                                          </p:spTgt>
+                                        </p:tgtEl>
+                                        <p:attrNameLst>
+                                          <p:attrName>style.visibility</p:attrName>
+                                        </p:attrNameLst>
+                                      </p:cBhvr>
+                                      <p:to>
+                                        <p:strVal val="visible"/>
+                                      </p:to>
+                                    </p:set>
+                                    <p:animEffect transition="in" filter="fade">
+                                      <p:cBhvr>
+                                        <p:cTn id="7" dur="500"/>
+                                        <p:tgtEl>
+                                          <p:spTgt spid="3">
+                                            <p:txEl>
+                                              <p:pRg st="0" end="0"/>
+                                            </p:txEl>
+                                          </p:spTgt>
+                                        </p:tgtEl>
+                                      </p:cBhvr>
+                                    </p:animEffect>
+                                  </p:childTnLst>
+                                </p:cTn>
+                              </p:par>
+                            </p:childTnLst>
+                          </p:cTn>
+                        </p:par>
+                      </p:childTnLst>
+                    </p:cTn>
+                  </p:par>
+                  <p:par>
+                    <p:cTn id="8" fill="hold">
+                      <p:stCondLst>
+                        <p:cond delay="indefinite"/>
+                      </p:stCondLst>
+                      <p:childTnLst>
+                        <p:par>
+                          <p:cTn id="9" fill="hold">
+                            <p:stCondLst>
+                              <p:cond delay="0"/>
+                            </p:stCondLst>
+                            <p:childTnLst>
+                              <p:par>
+                                <p:cTn id="10" presetID="10" presetClass="entr" presetSubtype="0" fill="hold" nodeType="clickEffect">
+                                  <p:stCondLst>
+                                    <p:cond delay="0"/>
+                                  </p:stCondLst>
+                                  <p:childTnLst>
+                                    <p:set>
+                                      <p:cBhvr>
+                                        <p:cTn id="11" dur="1" fill="hold">
+                                          <p:stCondLst>
+                                            <p:cond delay="0"/>
+                                          </p:stCondLst>
+                                        </p:cTn>
+                                        <p:tgtEl>
+                                          <p:spTgt spid="3">
+                                            <p:txEl>
+                                              <p:pRg st="1" end="1"/>
+                                            </p:txEl>
+                                          </p:spTgt>
+                                        </p:tgtEl>
+                                        <p:attrNameLst>
+                                          <p:attrName>style.visibility</p:attrName>
+                                        </p:attrNameLst>
+                                      </p:cBhvr>
+                                      <p:to>
+                                        <p:strVal val="visible"/>
+                                      </p:to>
+                                    </p:set>
+                                    <p:animEffect transition="in" filter="fade">
+                                      <p:cBhvr>
+                                        <p:cTn id="12" dur="500"/>
+                                        <p:tgtEl>
+                                          <p:spTgt spid="3">
+                                            <p:txEl>
+                                              <p:pRg st="1" end="1"/>
+                                            </p:txEl>
+                                          </p:spTgt>
+                                        </p:tgtEl>
+                                      </p:cBhvr>
+                                    </p:animEffect>
+                                  </p:childTnLst>
+                                </p:cTn>
+                              </p:par>
+                            </p:childTnLst>
+                          </p:cTn>
+                        </p:par>
+                      </p:childTnLst>
+                    </p:cTn>
+                  </p:par>
+                  <p:par>
+                    <p:cTn id="13" fill="hold">
+                      <p:stCondLst>
+                        <p:cond delay="indefinite"/>
+                      </p:stCondLst>
+                      <p:childTnLst>
+                        <p:par>
+                          <p:cTn id="14" fill="hold">
+                            <p:stCondLst>
+                              <p:cond delay="0"/>
+                            </p:stCondLst>
+                            <p:childTnLst>
+                              <p:par>
+                                <p:cTn id="15" presetID="10" presetClass="entr" presetSubtype="0" fill="hold" nodeType="clickEffect">
+                                  <p:stCondLst>
+                                    <p:cond delay="0"/>
+                                  </p:stCondLst>
+                                  <p:childTnLst>
+                                    <p:set>
+                                      <p:cBhvr>
+                                        <p:cTn id="16" dur="1" fill="hold">
+                                          <p:stCondLst>
+                                            <p:cond delay="0"/>
+                                          </p:stCondLst>
+                                        </p:cTn>
+                                        <p:tgtEl>
+                                          <p:spTgt spid="3">
+                                            <p:txEl>
+                                              <p:pRg st="2" end="2"/>
+                                            </p:txEl>
+                                          </p:spTgt>
+                                        </p:tgtEl>
+                                        <p:attrNameLst>
+                                          <p:attrName>style.visibility</p:attrName>
+                                        </p:attrNameLst>
+                                      </p:cBhvr>
+                                      <p:to>
+                                        <p:strVal val="visible"/>
+                                      </p:to>
+                                    </p:set>
+                                    <p:animEffect transition="in" filter="fade">
+                                      <p:cBhvr>
+                                        <p:cTn id="17" dur="500"/>
+                                        <p:tgtEl>
+                                          <p:spTgt spid="3">
+                                            <p:txEl>
+                                              <p:pRg st="2" end="2"/>
+                                            </p:txEl>
+                                          </p:spTgt>
+                                        </p:tgtEl>
+                                      </p:cBhvr>
+                                    </p:animEffect>
+                                  </p:childTnLst>
+                                </p:cTn>
+                              </p:par>
+                            </p:childTnLst>
+                          </p:cTn>
+                        </p:par>
+                      </p:childTnLst>
+                    </p:cTn>
+                  </p:par>
+                  <p:par>
+                    <p:cTn id="18" fill="hold">
+                      <p:stCondLst>
+                        <p:cond delay="indefinite"/>
+                      </p:stCondLst>
+                      <p:childTnLst>
+                        <p:par>
+                          <p:cTn id="19" fill="hold">
+                            <p:stCondLst>
+                              <p:cond delay="0"/>
+                            </p:stCondLst>
+                            <p:childTnLst>
+                              <p:par>
+                                <p:cTn id="20" presetID="10" presetClass="entr" presetSubtype="0" fill="hold" nodeType="clickEffect">
+                                  <p:stCondLst>
+                                    <p:cond delay="0"/>
+                                  </p:stCondLst>
+                                  <p:childTnLst>
+                                    <p:set>
+                                      <p:cBhvr>
+                                        <p:cTn id="21" dur="1" fill="hold">
+                                          <p:stCondLst>
+                                            <p:cond delay="0"/>
+                                          </p:stCondLst>
+                                        </p:cTn>
+                                        <p:tgtEl>
+                                          <p:spTgt spid="3">
+                                            <p:txEl>
+                                              <p:pRg st="3" end="3"/>
+                                            </p:txEl>
+                                          </p:spTgt>
+                                        </p:tgtEl>
+                                        <p:attrNameLst>
+                                          <p:attrName>style.visibility</p:attrName>
+                                        </p:attrNameLst>
+                                      </p:cBhvr>
+                                      <p:to>
+                                        <p:strVal val="visible"/>
+                                      </p:to>
+                                    </p:set>
+                                    <p:animEffect transition="in" filter="fade">
+                                      <p:cBhvr>
+                                        <p:cTn id="22" dur="500"/>
+                                        <p:tgtEl>
+                                          <p:spTgt spid="3">
+                                            <p:txEl>
+                                              <p:pRg st="3" end="3"/>
+                                            </p:txEl>
+                                          </p:spTgt>
+                                        </p:tgtEl>
+                                      </p:cBhvr>
+                                    </p:animEffect>
+                                  </p:childTnLst>
+                                </p:cTn>
+                              </p:par>
+                            </p:childTnLst>
+                          </p:cTn>
+                        </p:par>
+                      </p:childTnLst>
+                    </p:cTn>
+                  </p:par>
+                  <p:par>
+                    <p:cTn id="23" fill="hold">
+                      <p:stCondLst>
+                        <p:cond delay="indefinite"/>
+                      </p:stCondLst>
+                      <p:childTnLst>
+                        <p:par>
+                          <p:cTn id="24" fill="hold">
+                            <p:stCondLst>
+                              <p:cond delay="0"/>
+                            </p:stCondLst>
+                            <p:childTnLst>
+                              <p:par>
+                                <p:cTn id="25" presetID="10" presetClass="entr" presetSubtype="0" fill="hold" nodeType="clickEffect">
+                                  <p:stCondLst>
+                                    <p:cond delay="0"/>
+                                  </p:stCondLst>
+                                  <p:childTnLst>
+                                    <p:set>
+                                      <p:cBhvr>
+                                        <p:cTn id="26" dur="1" fill="hold">
+                                          <p:stCondLst>
+                                            <p:cond delay="0"/>
+                                          </p:stCondLst>
+                                        </p:cTn>
+                                        <p:tgtEl>
+                                          <p:spTgt spid="3">
+                                            <p:txEl>
+                                              <p:pRg st="4" end="4"/>
+                                            </p:txEl>
+                                          </p:spTgt>
+                                        </p:tgtEl>
+                                        <p:attrNameLst>
+                                          <p:attrName>style.visibility</p:attrName>
+                                        </p:attrNameLst>
+                                      </p:cBhvr>
+                                      <p:to>
+                                        <p:strVal val="visible"/>
+                                      </p:to>
+                                    </p:set>
+                                    <p:animEffect transition="in" filter="fade">
+                                      <p:cBhvr>
+                                        <p:cTn id="27" dur="500"/>
+                                        <p:tgtEl>
+                                          <p:spTgt spid="3">
+                                            <p:txEl>
+                                              <p:pRg st="4" end="4"/>
+                                            </p:txEl>
+                                          </p:spTgt>
+                                        </p:tgtEl>
+                                      </p:cBhvr>
+                                    </p:animEffect>
+                                  </p:childTnLst>
+                                </p:cTn>
+                              </p:par>
+                            </p:childTnLst>
+                          </p:cTn>
+                        </p:par>
+                      </p:childTnLst>
+                    </p:cTn>
+                  </p:par>
+                  <p:par>
+                    <p:cTn id="28" fill="hold">
+                      <p:stCondLst>
+                        <p:cond delay="indefinite"/>
+                      </p:stCondLst>
+                      <p:childTnLst>
+                        <p:par>
+                          <p:cTn id="29" fill="hold">
+                            <p:stCondLst>
+                              <p:cond delay="0"/>
+                            </p:stCondLst>
+                            <p:childTnLst>
+                              <p:par>
+                                <p:cTn id="30" presetID="10" presetClass="entr" presetSubtype="0" fill="hold" nodeType="clickEffect">
+                                  <p:stCondLst>
+                                    <p:cond delay="0"/>
+                                  </p:stCondLst>
+                                  <p:childTnLst>
+                                    <p:set>
+                                      <p:cBhvr>
+                                        <p:cTn id="31" dur="1" fill="hold">
+                                          <p:stCondLst>
+                                            <p:cond delay="0"/>
+                                          </p:stCondLst>
+                                        </p:cTn>
+                                        <p:tgtEl>
+                                          <p:spTgt spid="3">
+                                            <p:txEl>
+                                              <p:pRg st="5" end="5"/>
+                                            </p:txEl>
+                                          </p:spTgt>
+                                        </p:tgtEl>
+                                        <p:attrNameLst>
+                                          <p:attrName>style.visibility</p:attrName>
+                                        </p:attrNameLst>
+                                      </p:cBhvr>
+                                      <p:to>
+                                        <p:strVal val="visible"/>
+                                      </p:to>
+                                    </p:set>
+                                    <p:animEffect transition="in" filter="fade">
+                                      <p:cBhvr>
+                                        <p:cTn id="32" dur="500"/>
+                                        <p:tgtEl>
+                                          <p:spTgt spid="3">
+                                            <p:txEl>
+                                              <p:pRg st="5" end="5"/>
+                                            </p:txEl>
+                                          </p:spTgt>
+                                        </p:tgtEl>
+                                      </p:cBhvr>
+                                    </p:animEffect>
+                                  </p:childTnLst>
+                                </p:cTn>
+                              </p:par>
+                            </p:childTnLst>
+                          </p:cTn>
+                        </p:par>
+                      </p:childTnLst>
+                    </p:cTn>
+                  </p:par>
+                  <p:par>
+                    <p:cTn id="33" fill="hold">
+                      <p:stCondLst>
+                        <p:cond delay="indefinite"/>
+                      </p:stCondLst>
+                      <p:childTnLst>
+                        <p:par>
+                          <p:cTn id="34" fill="hold">
+                            <p:stCondLst>
+                              <p:cond delay="0"/>
+                            </p:stCondLst>
+                            <p:childTnLst>
+                              <p:par>
+                                <p:cTn id="35" presetID="10" presetClass="entr" presetSubtype="0" fill="hold" nodeType="clickEffect">
+                                  <p:stCondLst>
+                                    <p:cond delay="0"/>
+                                  </p:stCondLst>
+                                  <p:childTnLst>
+                                    <p:set>
+                                      <p:cBhvr>
+                                        <p:cTn id="36" dur="1" fill="hold">
+                                          <p:stCondLst>
+                                            <p:cond delay="0"/>
+                                          </p:stCondLst>
+                                        </p:cTn>
+                                        <p:tgtEl>
+                                          <p:spTgt spid="3">
+                                            <p:txEl>
+                                              <p:pRg st="6" end="6"/>
+                                            </p:txEl>
+                                          </p:spTgt>
+                                        </p:tgtEl>
+                                        <p:attrNameLst>
+                                          <p:attrName>style.visibility</p:attrName>
+                                        </p:attrNameLst>
+                                      </p:cBhvr>
+                                      <p:to>
+                                        <p:strVal val="visible"/>
+                                      </p:to>
+                                    </p:set>
+                                    <p:animEffect transition="in" filter="fade">
+                                      <p:cBhvr>
+                                        <p:cTn id="37" dur="500"/>
+                                        <p:tgtEl>
+                                          <p:spTgt spid="3">
+                                            <p:txEl>
+                                              <p:pRg st="6" end="6"/>
+                                            </p:txEl>
+                                          </p:spTgt>
+                                        </p:tgtEl>
+                                      </p:cBhvr>
+                                    </p:animEffect>
+                                  </p:childTnLst>
+                                </p:cTn>
+                              </p:par>
+                            </p:childTnLst>
+                          </p:cTn>
+                        </p:par>
+                      </p:childTnLst>
+                    </p:cTn>
+                  </p:par>
+                </p:childTnLst>
+              </p:cTn>
+              <p:prevCondLst>
+                <p:cond evt="onPrev" delay="0">
+                  <p:tgtEl>
+                    <p:sldTgt/>
+                  </p:tgtEl>
+                </p:cond>
+              </p:prevCondLst>
+              <p:nextCondLst>
+                <p:cond evt="onNext" delay="0">
+                  <p:tgtEl>
+                    <p:sldTgt/>
+                  </p:tgtEl>
+                </p:cond>
+              </p:nextCondLst>
+            </p:seq>
+          </p:childTnLst>
+        </p:cTn>
+      </p:par>
+    </p:tnLst>
+  </p:timing>
+</p:sld>
+</file>
+
+<file path=ppt/slides/slide22.xml><?xml version="1.0" encoding="utf-8"?>
 <p:sld xmlns:a="http://schemas.openxmlformats.org/drawingml/2006/main" xmlns:r="http://schemas.openxmlformats.org/officeDocument/2006/relationships" xmlns:p="http://schemas.openxmlformats.org/presentationml/2006/main" show="0">
   <p:cSld>
     <p:spTree>
@@ -19385,7 +20235,7 @@
                   <a:spcPts val="600"/>
                 </a:spcAft>
               </a:pPr>
-              <a:t>21</a:t>
+              <a:t>22</a:t>
             </a:fld>
             <a:r>
               <a:rPr lang="en-GB" sz="700" noProof="0" dirty="0"/>
@@ -19437,7 +20287,7 @@
 </p:sld>
 </file>
 
-<file path=ppt/slides/slide22.xml><?xml version="1.0" encoding="utf-8"?>
+<file path=ppt/slides/slide23.xml><?xml version="1.0" encoding="utf-8"?>
 <p:sld xmlns:a="http://schemas.openxmlformats.org/drawingml/2006/main" xmlns:r="http://schemas.openxmlformats.org/officeDocument/2006/relationships" xmlns:p="http://schemas.openxmlformats.org/presentationml/2006/main" show="0">
   <p:cSld>
     <p:spTree>
@@ -19553,7 +20403,7 @@
                   <a:spcPts val="600"/>
                 </a:spcAft>
               </a:pPr>
-              <a:t>22</a:t>
+              <a:t>23</a:t>
             </a:fld>
             <a:r>
               <a:rPr lang="en-GB" sz="700" noProof="0" dirty="0"/>
@@ -20596,7 +21446,7 @@
 </p:sld>
 </file>
 
-<file path=ppt/slides/slide23.xml><?xml version="1.0" encoding="utf-8"?>
+<file path=ppt/slides/slide24.xml><?xml version="1.0" encoding="utf-8"?>
 <p:sld xmlns:a="http://schemas.openxmlformats.org/drawingml/2006/main" xmlns:r="http://schemas.openxmlformats.org/officeDocument/2006/relationships" xmlns:p="http://schemas.openxmlformats.org/presentationml/2006/main">
   <p:cSld>
     <p:spTree>
@@ -20712,7 +21562,7 @@
                   <a:spcPts val="600"/>
                 </a:spcAft>
               </a:pPr>
-              <a:t>23</a:t>
+              <a:t>24</a:t>
             </a:fld>
             <a:r>
               <a:rPr lang="en-GB" sz="700" noProof="0" dirty="0"/>
@@ -21455,7 +22305,7 @@
 </p:sld>
 </file>
 
-<file path=ppt/slides/slide24.xml><?xml version="1.0" encoding="utf-8"?>
+<file path=ppt/slides/slide25.xml><?xml version="1.0" encoding="utf-8"?>
 <p:sld xmlns:a="http://schemas.openxmlformats.org/drawingml/2006/main" xmlns:r="http://schemas.openxmlformats.org/officeDocument/2006/relationships" xmlns:p="http://schemas.openxmlformats.org/presentationml/2006/main" show="0">
   <p:cSld>
     <p:spTree>
@@ -21554,7 +22404,7 @@
 </p:sld>
 </file>
 
-<file path=ppt/slides/slide25.xml><?xml version="1.0" encoding="utf-8"?>
+<file path=ppt/slides/slide26.xml><?xml version="1.0" encoding="utf-8"?>
 <p:sld xmlns:a="http://schemas.openxmlformats.org/drawingml/2006/main" xmlns:r="http://schemas.openxmlformats.org/officeDocument/2006/relationships" xmlns:p="http://schemas.openxmlformats.org/presentationml/2006/main">
   <p:cSld>
     <p:spTree>
@@ -21653,7 +22503,7 @@
 </p:sld>
 </file>
 
-<file path=ppt/slides/slide26.xml><?xml version="1.0" encoding="utf-8"?>
+<file path=ppt/slides/slide27.xml><?xml version="1.0" encoding="utf-8"?>
 <p:sld xmlns:a="http://schemas.openxmlformats.org/drawingml/2006/main" xmlns:r="http://schemas.openxmlformats.org/officeDocument/2006/relationships" xmlns:p="http://schemas.openxmlformats.org/presentationml/2006/main">
   <p:cSld>
     <p:spTree>
@@ -22521,7 +23371,7 @@
 </p:sld>
 </file>
 
-<file path=ppt/slides/slide27.xml><?xml version="1.0" encoding="utf-8"?>
+<file path=ppt/slides/slide28.xml><?xml version="1.0" encoding="utf-8"?>
 <p:sld xmlns:a="http://schemas.openxmlformats.org/drawingml/2006/main" xmlns:r="http://schemas.openxmlformats.org/officeDocument/2006/relationships" xmlns:p="http://schemas.openxmlformats.org/presentationml/2006/main">
   <p:cSld>
     <p:spTree>
@@ -22587,8 +23437,98 @@
         </p:blipFill>
         <p:spPr>
           <a:xfrm>
-            <a:off x="1252491" y="1731150"/>
+            <a:off x="1252491" y="890551"/>
             <a:ext cx="6639018" cy="1681199"/>
+          </a:xfrm>
+          <a:prstGeom prst="rect">
+            <a:avLst/>
+          </a:prstGeom>
+        </p:spPr>
+      </p:pic>
+      <p:pic>
+        <p:nvPicPr>
+          <p:cNvPr id="4" name="Picture 3">
+            <a:extLst>
+              <a:ext uri="{FF2B5EF4-FFF2-40B4-BE49-F238E27FC236}">
+                <a16:creationId xmlns:a16="http://schemas.microsoft.com/office/drawing/2014/main" id="{B0051902-DF1D-3CDF-A54F-464B0446BE6F}"/>
+              </a:ext>
+            </a:extLst>
+          </p:cNvPr>
+          <p:cNvPicPr>
+            <a:picLocks noChangeAspect="1"/>
+          </p:cNvPicPr>
+          <p:nvPr/>
+        </p:nvPicPr>
+        <p:blipFill>
+          <a:blip r:embed="rId3"/>
+          <a:stretch>
+            <a:fillRect/>
+          </a:stretch>
+        </p:blipFill>
+        <p:spPr>
+          <a:xfrm>
+            <a:off x="323529" y="2427734"/>
+            <a:ext cx="3410954" cy="936104"/>
+          </a:xfrm>
+          <a:prstGeom prst="rect">
+            <a:avLst/>
+          </a:prstGeom>
+        </p:spPr>
+      </p:pic>
+      <p:pic>
+        <p:nvPicPr>
+          <p:cNvPr id="6" name="Picture 5">
+            <a:extLst>
+              <a:ext uri="{FF2B5EF4-FFF2-40B4-BE49-F238E27FC236}">
+                <a16:creationId xmlns:a16="http://schemas.microsoft.com/office/drawing/2014/main" id="{124F9B22-3597-0F96-C1C8-0692F1BECB54}"/>
+              </a:ext>
+            </a:extLst>
+          </p:cNvPr>
+          <p:cNvPicPr>
+            <a:picLocks noChangeAspect="1"/>
+          </p:cNvPicPr>
+          <p:nvPr/>
+        </p:nvPicPr>
+        <p:blipFill>
+          <a:blip r:embed="rId4"/>
+          <a:stretch>
+            <a:fillRect/>
+          </a:stretch>
+        </p:blipFill>
+        <p:spPr>
+          <a:xfrm>
+            <a:off x="4566301" y="2461074"/>
+            <a:ext cx="3228192" cy="1638695"/>
+          </a:xfrm>
+          <a:prstGeom prst="rect">
+            <a:avLst/>
+          </a:prstGeom>
+        </p:spPr>
+      </p:pic>
+      <p:pic>
+        <p:nvPicPr>
+          <p:cNvPr id="8" name="Picture 7">
+            <a:extLst>
+              <a:ext uri="{FF2B5EF4-FFF2-40B4-BE49-F238E27FC236}">
+                <a16:creationId xmlns:a16="http://schemas.microsoft.com/office/drawing/2014/main" id="{5824B786-F5B0-DAA8-D961-3781D9AD4B1D}"/>
+              </a:ext>
+            </a:extLst>
+          </p:cNvPr>
+          <p:cNvPicPr>
+            <a:picLocks noChangeAspect="1"/>
+          </p:cNvPicPr>
+          <p:nvPr/>
+        </p:nvPicPr>
+        <p:blipFill>
+          <a:blip r:embed="rId5"/>
+          <a:stretch>
+            <a:fillRect/>
+          </a:stretch>
+        </p:blipFill>
+        <p:spPr>
+          <a:xfrm>
+            <a:off x="323529" y="3374886"/>
+            <a:ext cx="3645464" cy="1255564"/>
           </a:xfrm>
           <a:prstGeom prst="rect">
             <a:avLst/>
@@ -22600,10 +23540,252 @@
   <p:clrMapOvr>
     <a:masterClrMapping/>
   </p:clrMapOvr>
+  <p:timing>
+    <p:tnLst>
+      <p:par>
+        <p:cTn id="1" dur="indefinite" restart="never" nodeType="tmRoot">
+          <p:childTnLst>
+            <p:seq concurrent="1" nextAc="seek">
+              <p:cTn id="2" dur="indefinite" nodeType="mainSeq">
+                <p:childTnLst>
+                  <p:par>
+                    <p:cTn id="3" fill="hold">
+                      <p:stCondLst>
+                        <p:cond delay="indefinite"/>
+                      </p:stCondLst>
+                      <p:childTnLst>
+                        <p:par>
+                          <p:cTn id="4" fill="hold">
+                            <p:stCondLst>
+                              <p:cond delay="0"/>
+                            </p:stCondLst>
+                            <p:childTnLst>
+                              <p:par>
+                                <p:cTn id="5" presetID="10" presetClass="entr" presetSubtype="0" fill="hold" nodeType="clickEffect">
+                                  <p:stCondLst>
+                                    <p:cond delay="0"/>
+                                  </p:stCondLst>
+                                  <p:childTnLst>
+                                    <p:set>
+                                      <p:cBhvr>
+                                        <p:cTn id="6" dur="1" fill="hold">
+                                          <p:stCondLst>
+                                            <p:cond delay="0"/>
+                                          </p:stCondLst>
+                                        </p:cTn>
+                                        <p:tgtEl>
+                                          <p:spTgt spid="17"/>
+                                        </p:tgtEl>
+                                        <p:attrNameLst>
+                                          <p:attrName>style.visibility</p:attrName>
+                                        </p:attrNameLst>
+                                      </p:cBhvr>
+                                      <p:to>
+                                        <p:strVal val="visible"/>
+                                      </p:to>
+                                    </p:set>
+                                    <p:animEffect transition="in" filter="fade">
+                                      <p:cBhvr>
+                                        <p:cTn id="7" dur="500"/>
+                                        <p:tgtEl>
+                                          <p:spTgt spid="17"/>
+                                        </p:tgtEl>
+                                      </p:cBhvr>
+                                    </p:animEffect>
+                                  </p:childTnLst>
+                                </p:cTn>
+                              </p:par>
+                            </p:childTnLst>
+                          </p:cTn>
+                        </p:par>
+                      </p:childTnLst>
+                    </p:cTn>
+                  </p:par>
+                  <p:par>
+                    <p:cTn id="8" fill="hold">
+                      <p:stCondLst>
+                        <p:cond delay="indefinite"/>
+                      </p:stCondLst>
+                      <p:childTnLst>
+                        <p:par>
+                          <p:cTn id="9" fill="hold">
+                            <p:stCondLst>
+                              <p:cond delay="0"/>
+                            </p:stCondLst>
+                            <p:childTnLst>
+                              <p:par>
+                                <p:cTn id="10" presetID="10" presetClass="entr" presetSubtype="0" fill="hold" nodeType="clickEffect">
+                                  <p:stCondLst>
+                                    <p:cond delay="0"/>
+                                  </p:stCondLst>
+                                  <p:childTnLst>
+                                    <p:set>
+                                      <p:cBhvr>
+                                        <p:cTn id="11" dur="1" fill="hold">
+                                          <p:stCondLst>
+                                            <p:cond delay="0"/>
+                                          </p:stCondLst>
+                                        </p:cTn>
+                                        <p:tgtEl>
+                                          <p:spTgt spid="4"/>
+                                        </p:tgtEl>
+                                        <p:attrNameLst>
+                                          <p:attrName>style.visibility</p:attrName>
+                                        </p:attrNameLst>
+                                      </p:cBhvr>
+                                      <p:to>
+                                        <p:strVal val="visible"/>
+                                      </p:to>
+                                    </p:set>
+                                    <p:animEffect transition="in" filter="fade">
+                                      <p:cBhvr>
+                                        <p:cTn id="12" dur="500"/>
+                                        <p:tgtEl>
+                                          <p:spTgt spid="4"/>
+                                        </p:tgtEl>
+                                      </p:cBhvr>
+                                    </p:animEffect>
+                                  </p:childTnLst>
+                                </p:cTn>
+                              </p:par>
+                            </p:childTnLst>
+                          </p:cTn>
+                        </p:par>
+                      </p:childTnLst>
+                    </p:cTn>
+                  </p:par>
+                  <p:par>
+                    <p:cTn id="13" fill="hold">
+                      <p:stCondLst>
+                        <p:cond delay="indefinite"/>
+                      </p:stCondLst>
+                      <p:childTnLst>
+                        <p:par>
+                          <p:cTn id="14" fill="hold">
+                            <p:stCondLst>
+                              <p:cond delay="0"/>
+                            </p:stCondLst>
+                            <p:childTnLst>
+                              <p:par>
+                                <p:cTn id="15" presetID="10" presetClass="entr" presetSubtype="0" fill="hold" nodeType="clickEffect">
+                                  <p:stCondLst>
+                                    <p:cond delay="0"/>
+                                  </p:stCondLst>
+                                  <p:childTnLst>
+                                    <p:set>
+                                      <p:cBhvr>
+                                        <p:cTn id="16" dur="1" fill="hold">
+                                          <p:stCondLst>
+                                            <p:cond delay="0"/>
+                                          </p:stCondLst>
+                                        </p:cTn>
+                                        <p:tgtEl>
+                                          <p:spTgt spid="6"/>
+                                        </p:tgtEl>
+                                        <p:attrNameLst>
+                                          <p:attrName>style.visibility</p:attrName>
+                                        </p:attrNameLst>
+                                      </p:cBhvr>
+                                      <p:to>
+                                        <p:strVal val="visible"/>
+                                      </p:to>
+                                    </p:set>
+                                    <p:animEffect transition="in" filter="fade">
+                                      <p:cBhvr>
+                                        <p:cTn id="17" dur="500"/>
+                                        <p:tgtEl>
+                                          <p:spTgt spid="6"/>
+                                        </p:tgtEl>
+                                      </p:cBhvr>
+                                    </p:animEffect>
+                                  </p:childTnLst>
+                                </p:cTn>
+                              </p:par>
+                            </p:childTnLst>
+                          </p:cTn>
+                        </p:par>
+                      </p:childTnLst>
+                    </p:cTn>
+                  </p:par>
+                  <p:par>
+                    <p:cTn id="18" fill="hold">
+                      <p:stCondLst>
+                        <p:cond delay="indefinite"/>
+                      </p:stCondLst>
+                      <p:childTnLst>
+                        <p:par>
+                          <p:cTn id="19" fill="hold">
+                            <p:stCondLst>
+                              <p:cond delay="0"/>
+                            </p:stCondLst>
+                            <p:childTnLst>
+                              <p:par>
+                                <p:cTn id="20" presetID="10" presetClass="entr" presetSubtype="0" fill="hold" nodeType="clickEffect">
+                                  <p:stCondLst>
+                                    <p:cond delay="0"/>
+                                  </p:stCondLst>
+                                  <p:childTnLst>
+                                    <p:set>
+                                      <p:cBhvr>
+                                        <p:cTn id="21" dur="1" fill="hold">
+                                          <p:stCondLst>
+                                            <p:cond delay="0"/>
+                                          </p:stCondLst>
+                                        </p:cTn>
+                                        <p:tgtEl>
+                                          <p:spTgt spid="8"/>
+                                        </p:tgtEl>
+                                        <p:attrNameLst>
+                                          <p:attrName>style.visibility</p:attrName>
+                                        </p:attrNameLst>
+                                      </p:cBhvr>
+                                      <p:to>
+                                        <p:strVal val="visible"/>
+                                      </p:to>
+                                    </p:set>
+                                    <p:animEffect transition="in" filter="fade">
+                                      <p:cBhvr>
+                                        <p:cTn id="22" dur="500"/>
+                                        <p:tgtEl>
+                                          <p:spTgt spid="8"/>
+                                        </p:tgtEl>
+                                      </p:cBhvr>
+                                    </p:animEffect>
+                                  </p:childTnLst>
+                                </p:cTn>
+                              </p:par>
+                            </p:childTnLst>
+                          </p:cTn>
+                        </p:par>
+                      </p:childTnLst>
+                    </p:cTn>
+                  </p:par>
+                </p:childTnLst>
+              </p:cTn>
+              <p:prevCondLst>
+                <p:cond evt="onPrev" delay="0">
+                  <p:tgtEl>
+                    <p:sldTgt/>
+                  </p:tgtEl>
+                </p:cond>
+              </p:prevCondLst>
+              <p:nextCondLst>
+                <p:cond evt="onNext" delay="0">
+                  <p:tgtEl>
+                    <p:sldTgt/>
+                  </p:tgtEl>
+                </p:cond>
+              </p:nextCondLst>
+            </p:seq>
+          </p:childTnLst>
+        </p:cTn>
+      </p:par>
+    </p:tnLst>
+  </p:timing>
 </p:sld>
 </file>
 
-<file path=ppt/slides/slide28.xml><?xml version="1.0" encoding="utf-8"?>
+<file path=ppt/slides/slide29.xml><?xml version="1.0" encoding="utf-8"?>
 <p:sld xmlns:a="http://schemas.openxmlformats.org/drawingml/2006/main" xmlns:r="http://schemas.openxmlformats.org/officeDocument/2006/relationships" xmlns:p="http://schemas.openxmlformats.org/presentationml/2006/main">
   <p:cSld>
     <p:spTree>
@@ -22702,7 +23884,439 @@
 </p:sld>
 </file>
 
-<file path=ppt/slides/slide29.xml><?xml version="1.0" encoding="utf-8"?>
+<file path=ppt/slides/slide3.xml><?xml version="1.0" encoding="utf-8"?>
+<p:sld xmlns:a="http://schemas.openxmlformats.org/drawingml/2006/main" xmlns:r="http://schemas.openxmlformats.org/officeDocument/2006/relationships" xmlns:p="http://schemas.openxmlformats.org/presentationml/2006/main">
+  <p:cSld>
+    <p:spTree>
+      <p:nvGrpSpPr>
+        <p:cNvPr id="1" name=""/>
+        <p:cNvGrpSpPr/>
+        <p:nvPr/>
+      </p:nvGrpSpPr>
+      <p:grpSpPr>
+        <a:xfrm>
+          <a:off x="0" y="0"/>
+          <a:ext cx="0" cy="0"/>
+          <a:chOff x="0" y="0"/>
+          <a:chExt cx="0" cy="0"/>
+        </a:xfrm>
+      </p:grpSpPr>
+      <p:sp>
+        <p:nvSpPr>
+          <p:cNvPr id="7" name="Title 1">
+            <a:extLst>
+              <a:ext uri="{FF2B5EF4-FFF2-40B4-BE49-F238E27FC236}">
+                <a16:creationId xmlns:a16="http://schemas.microsoft.com/office/drawing/2014/main" id="{3DA40A8B-6345-2430-0E58-CE6E16436268}"/>
+              </a:ext>
+            </a:extLst>
+          </p:cNvPr>
+          <p:cNvSpPr>
+            <a:spLocks noGrp="1"/>
+          </p:cNvSpPr>
+          <p:nvPr>
+            <p:ph type="title"/>
+          </p:nvPr>
+        </p:nvSpPr>
+        <p:spPr>
+          <a:xfrm>
+            <a:off x="468000" y="396000"/>
+            <a:ext cx="7560000" cy="468000"/>
+          </a:xfrm>
+        </p:spPr>
+        <p:txBody>
+          <a:bodyPr/>
+          <a:lstStyle/>
+          <a:p>
+            <a:r>
+              <a:rPr lang="en-GB" sz="2400" noProof="0" dirty="0">
+                <a:solidFill>
+                  <a:srgbClr val="17365C"/>
+                </a:solidFill>
+                <a:cs typeface="Arial" panose="020B0604020202020204" pitchFamily="34" charset="0"/>
+              </a:rPr>
+              <a:t>Motivation</a:t>
+            </a:r>
+            <a:endParaRPr lang="en-GB" sz="2400" noProof="0" dirty="0"/>
+          </a:p>
+        </p:txBody>
+      </p:sp>
+      <p:sp>
+        <p:nvSpPr>
+          <p:cNvPr id="2" name="Slide Number Placeholder 1">
+            <a:extLst>
+              <a:ext uri="{FF2B5EF4-FFF2-40B4-BE49-F238E27FC236}">
+                <a16:creationId xmlns:a16="http://schemas.microsoft.com/office/drawing/2014/main" id="{EDB93A50-7D16-0EFA-627C-A54B36AE17D5}"/>
+              </a:ext>
+            </a:extLst>
+          </p:cNvPr>
+          <p:cNvSpPr>
+            <a:spLocks noGrp="1"/>
+          </p:cNvSpPr>
+          <p:nvPr>
+            <p:ph type="sldNum" sz="quarter" idx="12"/>
+          </p:nvPr>
+        </p:nvSpPr>
+        <p:spPr>
+          <a:xfrm>
+            <a:off x="324000" y="4840014"/>
+            <a:ext cx="252000" cy="108000"/>
+          </a:xfrm>
+        </p:spPr>
+        <p:txBody>
+          <a:bodyPr anchor="ctr">
+            <a:normAutofit/>
+          </a:bodyPr>
+          <a:lstStyle/>
+          <a:p>
+            <a:pPr>
+              <a:lnSpc>
+                <a:spcPct val="90000"/>
+              </a:lnSpc>
+              <a:spcAft>
+                <a:spcPts val="600"/>
+              </a:spcAft>
+            </a:pPr>
+            <a:fld id="{6C8FC03C-C266-4645-ABC5-645062898383}" type="slidenum">
+              <a:rPr lang="en-GB" sz="700" noProof="0" smtClean="0"/>
+              <a:pPr>
+                <a:lnSpc>
+                  <a:spcPct val="90000"/>
+                </a:lnSpc>
+                <a:spcAft>
+                  <a:spcPts val="600"/>
+                </a:spcAft>
+              </a:pPr>
+              <a:t>3</a:t>
+            </a:fld>
+            <a:r>
+              <a:rPr lang="en-GB" sz="700" noProof="0" dirty="0"/>
+              <a:t> </a:t>
+            </a:r>
+          </a:p>
+        </p:txBody>
+      </p:sp>
+      <p:sp>
+        <p:nvSpPr>
+          <p:cNvPr id="8" name="TextBox 7">
+            <a:extLst>
+              <a:ext uri="{FF2B5EF4-FFF2-40B4-BE49-F238E27FC236}">
+                <a16:creationId xmlns:a16="http://schemas.microsoft.com/office/drawing/2014/main" id="{E6F02395-7BB7-48B2-F654-FE1CFCD02D68}"/>
+              </a:ext>
+            </a:extLst>
+          </p:cNvPr>
+          <p:cNvSpPr txBox="1"/>
+          <p:nvPr/>
+        </p:nvSpPr>
+        <p:spPr>
+          <a:xfrm>
+            <a:off x="468000" y="1383618"/>
+            <a:ext cx="7560000" cy="1323439"/>
+          </a:xfrm>
+          <a:prstGeom prst="rect">
+            <a:avLst/>
+          </a:prstGeom>
+          <a:noFill/>
+        </p:spPr>
+        <p:txBody>
+          <a:bodyPr wrap="square" rtlCol="0">
+            <a:spAutoFit/>
+          </a:bodyPr>
+          <a:lstStyle/>
+          <a:p>
+            <a:pPr marL="285750" indent="-285750">
+              <a:buFont typeface="Arial" panose="020B0604020202020204" pitchFamily="34" charset="0"/>
+              <a:buChar char="•"/>
+            </a:pPr>
+            <a:r>
+              <a:rPr lang="en-GB" sz="1600" noProof="0" dirty="0">
+                <a:solidFill>
+                  <a:schemeClr val="tx2"/>
+                </a:solidFill>
+              </a:rPr>
+              <a:t>Modern systems growing log data</a:t>
+            </a:r>
+            <a:br>
+              <a:rPr lang="en-GB" sz="1600" noProof="0" dirty="0">
+                <a:solidFill>
+                  <a:schemeClr val="tx2"/>
+                </a:solidFill>
+              </a:rPr>
+            </a:br>
+            <a:endParaRPr lang="en-GB" sz="1600" noProof="0" dirty="0">
+              <a:solidFill>
+                <a:schemeClr val="tx2"/>
+              </a:solidFill>
+            </a:endParaRPr>
+          </a:p>
+          <a:p>
+            <a:pPr marL="285750" indent="-285750">
+              <a:buFont typeface="Arial" panose="020B0604020202020204" pitchFamily="34" charset="0"/>
+              <a:buChar char="•"/>
+            </a:pPr>
+            <a:r>
+              <a:rPr lang="en-GB" sz="1600" noProof="0" dirty="0">
+                <a:solidFill>
+                  <a:schemeClr val="tx2"/>
+                </a:solidFill>
+              </a:rPr>
+              <a:t>Debugging, monitoring, fault localisation</a:t>
+            </a:r>
+            <a:br>
+              <a:rPr lang="en-GB" sz="1600" noProof="0" dirty="0">
+                <a:solidFill>
+                  <a:schemeClr val="tx2"/>
+                </a:solidFill>
+              </a:rPr>
+            </a:br>
+            <a:endParaRPr lang="en-GB" sz="1600" noProof="0" dirty="0">
+              <a:solidFill>
+                <a:schemeClr val="tx2"/>
+              </a:solidFill>
+            </a:endParaRPr>
+          </a:p>
+          <a:p>
+            <a:pPr marL="285750" indent="-285750">
+              <a:buFont typeface="Arial" panose="020B0604020202020204" pitchFamily="34" charset="0"/>
+              <a:buChar char="•"/>
+            </a:pPr>
+            <a:r>
+              <a:rPr lang="en-GB" sz="1600" noProof="0" dirty="0">
+                <a:solidFill>
+                  <a:schemeClr val="tx2"/>
+                </a:solidFill>
+              </a:rPr>
+              <a:t>Log quality &amp; consistency</a:t>
+            </a:r>
+          </a:p>
+        </p:txBody>
+      </p:sp>
+    </p:spTree>
+    <p:extLst>
+      <p:ext uri="{BB962C8B-B14F-4D97-AF65-F5344CB8AC3E}">
+        <p14:creationId xmlns:p14="http://schemas.microsoft.com/office/powerpoint/2010/main" val="796647774"/>
+      </p:ext>
+    </p:extLst>
+  </p:cSld>
+  <p:clrMapOvr>
+    <a:masterClrMapping/>
+  </p:clrMapOvr>
+  <p:timing>
+    <p:tnLst>
+      <p:par>
+        <p:cTn id="1" dur="indefinite" restart="never" nodeType="tmRoot">
+          <p:childTnLst>
+            <p:seq concurrent="1" nextAc="seek">
+              <p:cTn id="2" dur="indefinite" nodeType="mainSeq">
+                <p:childTnLst>
+                  <p:par>
+                    <p:cTn id="3" fill="hold">
+                      <p:stCondLst>
+                        <p:cond delay="indefinite"/>
+                      </p:stCondLst>
+                      <p:childTnLst>
+                        <p:par>
+                          <p:cTn id="4" fill="hold">
+                            <p:stCondLst>
+                              <p:cond delay="0"/>
+                            </p:stCondLst>
+                            <p:childTnLst>
+                              <p:par>
+                                <p:cTn id="5" presetID="10" presetClass="entr" presetSubtype="0" fill="hold" nodeType="clickEffect">
+                                  <p:stCondLst>
+                                    <p:cond delay="0"/>
+                                  </p:stCondLst>
+                                  <p:childTnLst>
+                                    <p:set>
+                                      <p:cBhvr>
+                                        <p:cTn id="6" dur="1" fill="hold">
+                                          <p:stCondLst>
+                                            <p:cond delay="0"/>
+                                          </p:stCondLst>
+                                        </p:cTn>
+                                        <p:tgtEl>
+                                          <p:spTgt spid="8">
+                                            <p:txEl>
+                                              <p:pRg st="0" end="0"/>
+                                            </p:txEl>
+                                          </p:spTgt>
+                                        </p:tgtEl>
+                                        <p:attrNameLst>
+                                          <p:attrName>style.visibility</p:attrName>
+                                        </p:attrNameLst>
+                                      </p:cBhvr>
+                                      <p:to>
+                                        <p:strVal val="visible"/>
+                                      </p:to>
+                                    </p:set>
+                                    <p:animEffect transition="in" filter="fade">
+                                      <p:cBhvr>
+                                        <p:cTn id="7" dur="500"/>
+                                        <p:tgtEl>
+                                          <p:spTgt spid="8">
+                                            <p:txEl>
+                                              <p:pRg st="0" end="0"/>
+                                            </p:txEl>
+                                          </p:spTgt>
+                                        </p:tgtEl>
+                                      </p:cBhvr>
+                                    </p:animEffect>
+                                  </p:childTnLst>
+                                </p:cTn>
+                              </p:par>
+                            </p:childTnLst>
+                          </p:cTn>
+                        </p:par>
+                      </p:childTnLst>
+                    </p:cTn>
+                  </p:par>
+                  <p:par>
+                    <p:cTn id="8" fill="hold">
+                      <p:stCondLst>
+                        <p:cond delay="indefinite"/>
+                      </p:stCondLst>
+                      <p:childTnLst>
+                        <p:par>
+                          <p:cTn id="9" fill="hold">
+                            <p:stCondLst>
+                              <p:cond delay="0"/>
+                            </p:stCondLst>
+                            <p:childTnLst>
+                              <p:par>
+                                <p:cTn id="10" presetID="10" presetClass="entr" presetSubtype="0" fill="hold" nodeType="clickEffect">
+                                  <p:stCondLst>
+                                    <p:cond delay="0"/>
+                                  </p:stCondLst>
+                                  <p:childTnLst>
+                                    <p:set>
+                                      <p:cBhvr>
+                                        <p:cTn id="11" dur="1" fill="hold">
+                                          <p:stCondLst>
+                                            <p:cond delay="0"/>
+                                          </p:stCondLst>
+                                        </p:cTn>
+                                        <p:tgtEl>
+                                          <p:spTgt spid="8">
+                                            <p:txEl>
+                                              <p:pRg st="1" end="1"/>
+                                            </p:txEl>
+                                          </p:spTgt>
+                                        </p:tgtEl>
+                                        <p:attrNameLst>
+                                          <p:attrName>style.visibility</p:attrName>
+                                        </p:attrNameLst>
+                                      </p:cBhvr>
+                                      <p:to>
+                                        <p:strVal val="visible"/>
+                                      </p:to>
+                                    </p:set>
+                                    <p:animEffect transition="in" filter="fade">
+                                      <p:cBhvr>
+                                        <p:cTn id="12" dur="500"/>
+                                        <p:tgtEl>
+                                          <p:spTgt spid="8">
+                                            <p:txEl>
+                                              <p:pRg st="1" end="1"/>
+                                            </p:txEl>
+                                          </p:spTgt>
+                                        </p:tgtEl>
+                                      </p:cBhvr>
+                                    </p:animEffect>
+                                  </p:childTnLst>
+                                </p:cTn>
+                              </p:par>
+                            </p:childTnLst>
+                          </p:cTn>
+                        </p:par>
+                      </p:childTnLst>
+                    </p:cTn>
+                  </p:par>
+                  <p:par>
+                    <p:cTn id="13" fill="hold">
+                      <p:stCondLst>
+                        <p:cond delay="indefinite"/>
+                      </p:stCondLst>
+                      <p:childTnLst>
+                        <p:par>
+                          <p:cTn id="14" fill="hold">
+                            <p:stCondLst>
+                              <p:cond delay="0"/>
+                            </p:stCondLst>
+                            <p:childTnLst>
+                              <p:par>
+                                <p:cTn id="15" presetID="10" presetClass="entr" presetSubtype="0" fill="hold" nodeType="clickEffect">
+                                  <p:stCondLst>
+                                    <p:cond delay="0"/>
+                                  </p:stCondLst>
+                                  <p:childTnLst>
+                                    <p:set>
+                                      <p:cBhvr>
+                                        <p:cTn id="16" dur="1" fill="hold">
+                                          <p:stCondLst>
+                                            <p:cond delay="0"/>
+                                          </p:stCondLst>
+                                        </p:cTn>
+                                        <p:tgtEl>
+                                          <p:spTgt spid="8">
+                                            <p:txEl>
+                                              <p:pRg st="2" end="2"/>
+                                            </p:txEl>
+                                          </p:spTgt>
+                                        </p:tgtEl>
+                                        <p:attrNameLst>
+                                          <p:attrName>style.visibility</p:attrName>
+                                        </p:attrNameLst>
+                                      </p:cBhvr>
+                                      <p:to>
+                                        <p:strVal val="visible"/>
+                                      </p:to>
+                                    </p:set>
+                                    <p:animEffect transition="in" filter="fade">
+                                      <p:cBhvr>
+                                        <p:cTn id="17" dur="500"/>
+                                        <p:tgtEl>
+                                          <p:spTgt spid="8">
+                                            <p:txEl>
+                                              <p:pRg st="2" end="2"/>
+                                            </p:txEl>
+                                          </p:spTgt>
+                                        </p:tgtEl>
+                                      </p:cBhvr>
+                                    </p:animEffect>
+                                  </p:childTnLst>
+                                </p:cTn>
+                              </p:par>
+                            </p:childTnLst>
+                          </p:cTn>
+                        </p:par>
+                      </p:childTnLst>
+                    </p:cTn>
+                  </p:par>
+                </p:childTnLst>
+              </p:cTn>
+              <p:prevCondLst>
+                <p:cond evt="onPrev" delay="0">
+                  <p:tgtEl>
+                    <p:sldTgt/>
+                  </p:tgtEl>
+                </p:cond>
+              </p:prevCondLst>
+              <p:nextCondLst>
+                <p:cond evt="onNext" delay="0">
+                  <p:tgtEl>
+                    <p:sldTgt/>
+                  </p:tgtEl>
+                </p:cond>
+              </p:nextCondLst>
+            </p:seq>
+          </p:childTnLst>
+        </p:cTn>
+      </p:par>
+    </p:tnLst>
+  </p:timing>
+</p:sld>
+</file>
+
+<file path=ppt/slides/slide30.xml><?xml version="1.0" encoding="utf-8"?>
 <p:sld xmlns:a="http://schemas.openxmlformats.org/drawingml/2006/main" xmlns:r="http://schemas.openxmlformats.org/officeDocument/2006/relationships" xmlns:p="http://schemas.openxmlformats.org/presentationml/2006/main">
   <p:cSld>
     <p:spTree>
@@ -23279,439 +24893,7 @@
 </p:sld>
 </file>
 
-<file path=ppt/slides/slide3.xml><?xml version="1.0" encoding="utf-8"?>
-<p:sld xmlns:a="http://schemas.openxmlformats.org/drawingml/2006/main" xmlns:r="http://schemas.openxmlformats.org/officeDocument/2006/relationships" xmlns:p="http://schemas.openxmlformats.org/presentationml/2006/main">
-  <p:cSld>
-    <p:spTree>
-      <p:nvGrpSpPr>
-        <p:cNvPr id="1" name=""/>
-        <p:cNvGrpSpPr/>
-        <p:nvPr/>
-      </p:nvGrpSpPr>
-      <p:grpSpPr>
-        <a:xfrm>
-          <a:off x="0" y="0"/>
-          <a:ext cx="0" cy="0"/>
-          <a:chOff x="0" y="0"/>
-          <a:chExt cx="0" cy="0"/>
-        </a:xfrm>
-      </p:grpSpPr>
-      <p:sp>
-        <p:nvSpPr>
-          <p:cNvPr id="7" name="Title 1">
-            <a:extLst>
-              <a:ext uri="{FF2B5EF4-FFF2-40B4-BE49-F238E27FC236}">
-                <a16:creationId xmlns:a16="http://schemas.microsoft.com/office/drawing/2014/main" id="{3DA40A8B-6345-2430-0E58-CE6E16436268}"/>
-              </a:ext>
-            </a:extLst>
-          </p:cNvPr>
-          <p:cNvSpPr>
-            <a:spLocks noGrp="1"/>
-          </p:cNvSpPr>
-          <p:nvPr>
-            <p:ph type="title"/>
-          </p:nvPr>
-        </p:nvSpPr>
-        <p:spPr>
-          <a:xfrm>
-            <a:off x="468000" y="396000"/>
-            <a:ext cx="7560000" cy="468000"/>
-          </a:xfrm>
-        </p:spPr>
-        <p:txBody>
-          <a:bodyPr/>
-          <a:lstStyle/>
-          <a:p>
-            <a:r>
-              <a:rPr lang="en-GB" sz="2400" noProof="0" dirty="0">
-                <a:solidFill>
-                  <a:srgbClr val="17365C"/>
-                </a:solidFill>
-                <a:cs typeface="Arial" panose="020B0604020202020204" pitchFamily="34" charset="0"/>
-              </a:rPr>
-              <a:t>Motivation</a:t>
-            </a:r>
-            <a:endParaRPr lang="en-GB" sz="2400" noProof="0" dirty="0"/>
-          </a:p>
-        </p:txBody>
-      </p:sp>
-      <p:sp>
-        <p:nvSpPr>
-          <p:cNvPr id="2" name="Slide Number Placeholder 1">
-            <a:extLst>
-              <a:ext uri="{FF2B5EF4-FFF2-40B4-BE49-F238E27FC236}">
-                <a16:creationId xmlns:a16="http://schemas.microsoft.com/office/drawing/2014/main" id="{EDB93A50-7D16-0EFA-627C-A54B36AE17D5}"/>
-              </a:ext>
-            </a:extLst>
-          </p:cNvPr>
-          <p:cNvSpPr>
-            <a:spLocks noGrp="1"/>
-          </p:cNvSpPr>
-          <p:nvPr>
-            <p:ph type="sldNum" sz="quarter" idx="12"/>
-          </p:nvPr>
-        </p:nvSpPr>
-        <p:spPr>
-          <a:xfrm>
-            <a:off x="324000" y="4840014"/>
-            <a:ext cx="252000" cy="108000"/>
-          </a:xfrm>
-        </p:spPr>
-        <p:txBody>
-          <a:bodyPr anchor="ctr">
-            <a:normAutofit/>
-          </a:bodyPr>
-          <a:lstStyle/>
-          <a:p>
-            <a:pPr>
-              <a:lnSpc>
-                <a:spcPct val="90000"/>
-              </a:lnSpc>
-              <a:spcAft>
-                <a:spcPts val="600"/>
-              </a:spcAft>
-            </a:pPr>
-            <a:fld id="{6C8FC03C-C266-4645-ABC5-645062898383}" type="slidenum">
-              <a:rPr lang="en-GB" sz="700" noProof="0" smtClean="0"/>
-              <a:pPr>
-                <a:lnSpc>
-                  <a:spcPct val="90000"/>
-                </a:lnSpc>
-                <a:spcAft>
-                  <a:spcPts val="600"/>
-                </a:spcAft>
-              </a:pPr>
-              <a:t>3</a:t>
-            </a:fld>
-            <a:r>
-              <a:rPr lang="en-GB" sz="700" noProof="0" dirty="0"/>
-              <a:t> </a:t>
-            </a:r>
-          </a:p>
-        </p:txBody>
-      </p:sp>
-      <p:sp>
-        <p:nvSpPr>
-          <p:cNvPr id="8" name="TextBox 7">
-            <a:extLst>
-              <a:ext uri="{FF2B5EF4-FFF2-40B4-BE49-F238E27FC236}">
-                <a16:creationId xmlns:a16="http://schemas.microsoft.com/office/drawing/2014/main" id="{E6F02395-7BB7-48B2-F654-FE1CFCD02D68}"/>
-              </a:ext>
-            </a:extLst>
-          </p:cNvPr>
-          <p:cNvSpPr txBox="1"/>
-          <p:nvPr/>
-        </p:nvSpPr>
-        <p:spPr>
-          <a:xfrm>
-            <a:off x="468000" y="1383618"/>
-            <a:ext cx="7560000" cy="1323439"/>
-          </a:xfrm>
-          <a:prstGeom prst="rect">
-            <a:avLst/>
-          </a:prstGeom>
-          <a:noFill/>
-        </p:spPr>
-        <p:txBody>
-          <a:bodyPr wrap="square" rtlCol="0">
-            <a:spAutoFit/>
-          </a:bodyPr>
-          <a:lstStyle/>
-          <a:p>
-            <a:pPr marL="285750" indent="-285750">
-              <a:buFont typeface="Arial" panose="020B0604020202020204" pitchFamily="34" charset="0"/>
-              <a:buChar char="•"/>
-            </a:pPr>
-            <a:r>
-              <a:rPr lang="en-GB" sz="1600" noProof="0" dirty="0">
-                <a:solidFill>
-                  <a:schemeClr val="tx2"/>
-                </a:solidFill>
-              </a:rPr>
-              <a:t>Modern systems growing log data</a:t>
-            </a:r>
-            <a:br>
-              <a:rPr lang="en-GB" sz="1600" noProof="0" dirty="0">
-                <a:solidFill>
-                  <a:schemeClr val="tx2"/>
-                </a:solidFill>
-              </a:rPr>
-            </a:br>
-            <a:endParaRPr lang="en-GB" sz="1600" noProof="0" dirty="0">
-              <a:solidFill>
-                <a:schemeClr val="tx2"/>
-              </a:solidFill>
-            </a:endParaRPr>
-          </a:p>
-          <a:p>
-            <a:pPr marL="285750" indent="-285750">
-              <a:buFont typeface="Arial" panose="020B0604020202020204" pitchFamily="34" charset="0"/>
-              <a:buChar char="•"/>
-            </a:pPr>
-            <a:r>
-              <a:rPr lang="en-GB" sz="1600" noProof="0" dirty="0">
-                <a:solidFill>
-                  <a:schemeClr val="tx2"/>
-                </a:solidFill>
-              </a:rPr>
-              <a:t>Debugging, monitoring, fault localisation</a:t>
-            </a:r>
-            <a:br>
-              <a:rPr lang="en-GB" sz="1600" noProof="0" dirty="0">
-                <a:solidFill>
-                  <a:schemeClr val="tx2"/>
-                </a:solidFill>
-              </a:rPr>
-            </a:br>
-            <a:endParaRPr lang="en-GB" sz="1600" noProof="0" dirty="0">
-              <a:solidFill>
-                <a:schemeClr val="tx2"/>
-              </a:solidFill>
-            </a:endParaRPr>
-          </a:p>
-          <a:p>
-            <a:pPr marL="285750" indent="-285750">
-              <a:buFont typeface="Arial" panose="020B0604020202020204" pitchFamily="34" charset="0"/>
-              <a:buChar char="•"/>
-            </a:pPr>
-            <a:r>
-              <a:rPr lang="en-GB" sz="1600" noProof="0" dirty="0">
-                <a:solidFill>
-                  <a:schemeClr val="tx2"/>
-                </a:solidFill>
-              </a:rPr>
-              <a:t>Log quality &amp; consistency</a:t>
-            </a:r>
-          </a:p>
-        </p:txBody>
-      </p:sp>
-    </p:spTree>
-    <p:extLst>
-      <p:ext uri="{BB962C8B-B14F-4D97-AF65-F5344CB8AC3E}">
-        <p14:creationId xmlns:p14="http://schemas.microsoft.com/office/powerpoint/2010/main" val="796647774"/>
-      </p:ext>
-    </p:extLst>
-  </p:cSld>
-  <p:clrMapOvr>
-    <a:masterClrMapping/>
-  </p:clrMapOvr>
-  <p:timing>
-    <p:tnLst>
-      <p:par>
-        <p:cTn id="1" dur="indefinite" restart="never" nodeType="tmRoot">
-          <p:childTnLst>
-            <p:seq concurrent="1" nextAc="seek">
-              <p:cTn id="2" dur="indefinite" nodeType="mainSeq">
-                <p:childTnLst>
-                  <p:par>
-                    <p:cTn id="3" fill="hold">
-                      <p:stCondLst>
-                        <p:cond delay="indefinite"/>
-                      </p:stCondLst>
-                      <p:childTnLst>
-                        <p:par>
-                          <p:cTn id="4" fill="hold">
-                            <p:stCondLst>
-                              <p:cond delay="0"/>
-                            </p:stCondLst>
-                            <p:childTnLst>
-                              <p:par>
-                                <p:cTn id="5" presetID="10" presetClass="entr" presetSubtype="0" fill="hold" nodeType="clickEffect">
-                                  <p:stCondLst>
-                                    <p:cond delay="0"/>
-                                  </p:stCondLst>
-                                  <p:childTnLst>
-                                    <p:set>
-                                      <p:cBhvr>
-                                        <p:cTn id="6" dur="1" fill="hold">
-                                          <p:stCondLst>
-                                            <p:cond delay="0"/>
-                                          </p:stCondLst>
-                                        </p:cTn>
-                                        <p:tgtEl>
-                                          <p:spTgt spid="8">
-                                            <p:txEl>
-                                              <p:pRg st="0" end="0"/>
-                                            </p:txEl>
-                                          </p:spTgt>
-                                        </p:tgtEl>
-                                        <p:attrNameLst>
-                                          <p:attrName>style.visibility</p:attrName>
-                                        </p:attrNameLst>
-                                      </p:cBhvr>
-                                      <p:to>
-                                        <p:strVal val="visible"/>
-                                      </p:to>
-                                    </p:set>
-                                    <p:animEffect transition="in" filter="fade">
-                                      <p:cBhvr>
-                                        <p:cTn id="7" dur="500"/>
-                                        <p:tgtEl>
-                                          <p:spTgt spid="8">
-                                            <p:txEl>
-                                              <p:pRg st="0" end="0"/>
-                                            </p:txEl>
-                                          </p:spTgt>
-                                        </p:tgtEl>
-                                      </p:cBhvr>
-                                    </p:animEffect>
-                                  </p:childTnLst>
-                                </p:cTn>
-                              </p:par>
-                            </p:childTnLst>
-                          </p:cTn>
-                        </p:par>
-                      </p:childTnLst>
-                    </p:cTn>
-                  </p:par>
-                  <p:par>
-                    <p:cTn id="8" fill="hold">
-                      <p:stCondLst>
-                        <p:cond delay="indefinite"/>
-                      </p:stCondLst>
-                      <p:childTnLst>
-                        <p:par>
-                          <p:cTn id="9" fill="hold">
-                            <p:stCondLst>
-                              <p:cond delay="0"/>
-                            </p:stCondLst>
-                            <p:childTnLst>
-                              <p:par>
-                                <p:cTn id="10" presetID="10" presetClass="entr" presetSubtype="0" fill="hold" nodeType="clickEffect">
-                                  <p:stCondLst>
-                                    <p:cond delay="0"/>
-                                  </p:stCondLst>
-                                  <p:childTnLst>
-                                    <p:set>
-                                      <p:cBhvr>
-                                        <p:cTn id="11" dur="1" fill="hold">
-                                          <p:stCondLst>
-                                            <p:cond delay="0"/>
-                                          </p:stCondLst>
-                                        </p:cTn>
-                                        <p:tgtEl>
-                                          <p:spTgt spid="8">
-                                            <p:txEl>
-                                              <p:pRg st="1" end="1"/>
-                                            </p:txEl>
-                                          </p:spTgt>
-                                        </p:tgtEl>
-                                        <p:attrNameLst>
-                                          <p:attrName>style.visibility</p:attrName>
-                                        </p:attrNameLst>
-                                      </p:cBhvr>
-                                      <p:to>
-                                        <p:strVal val="visible"/>
-                                      </p:to>
-                                    </p:set>
-                                    <p:animEffect transition="in" filter="fade">
-                                      <p:cBhvr>
-                                        <p:cTn id="12" dur="500"/>
-                                        <p:tgtEl>
-                                          <p:spTgt spid="8">
-                                            <p:txEl>
-                                              <p:pRg st="1" end="1"/>
-                                            </p:txEl>
-                                          </p:spTgt>
-                                        </p:tgtEl>
-                                      </p:cBhvr>
-                                    </p:animEffect>
-                                  </p:childTnLst>
-                                </p:cTn>
-                              </p:par>
-                            </p:childTnLst>
-                          </p:cTn>
-                        </p:par>
-                      </p:childTnLst>
-                    </p:cTn>
-                  </p:par>
-                  <p:par>
-                    <p:cTn id="13" fill="hold">
-                      <p:stCondLst>
-                        <p:cond delay="indefinite"/>
-                      </p:stCondLst>
-                      <p:childTnLst>
-                        <p:par>
-                          <p:cTn id="14" fill="hold">
-                            <p:stCondLst>
-                              <p:cond delay="0"/>
-                            </p:stCondLst>
-                            <p:childTnLst>
-                              <p:par>
-                                <p:cTn id="15" presetID="10" presetClass="entr" presetSubtype="0" fill="hold" nodeType="clickEffect">
-                                  <p:stCondLst>
-                                    <p:cond delay="0"/>
-                                  </p:stCondLst>
-                                  <p:childTnLst>
-                                    <p:set>
-                                      <p:cBhvr>
-                                        <p:cTn id="16" dur="1" fill="hold">
-                                          <p:stCondLst>
-                                            <p:cond delay="0"/>
-                                          </p:stCondLst>
-                                        </p:cTn>
-                                        <p:tgtEl>
-                                          <p:spTgt spid="8">
-                                            <p:txEl>
-                                              <p:pRg st="2" end="2"/>
-                                            </p:txEl>
-                                          </p:spTgt>
-                                        </p:tgtEl>
-                                        <p:attrNameLst>
-                                          <p:attrName>style.visibility</p:attrName>
-                                        </p:attrNameLst>
-                                      </p:cBhvr>
-                                      <p:to>
-                                        <p:strVal val="visible"/>
-                                      </p:to>
-                                    </p:set>
-                                    <p:animEffect transition="in" filter="fade">
-                                      <p:cBhvr>
-                                        <p:cTn id="17" dur="500"/>
-                                        <p:tgtEl>
-                                          <p:spTgt spid="8">
-                                            <p:txEl>
-                                              <p:pRg st="2" end="2"/>
-                                            </p:txEl>
-                                          </p:spTgt>
-                                        </p:tgtEl>
-                                      </p:cBhvr>
-                                    </p:animEffect>
-                                  </p:childTnLst>
-                                </p:cTn>
-                              </p:par>
-                            </p:childTnLst>
-                          </p:cTn>
-                        </p:par>
-                      </p:childTnLst>
-                    </p:cTn>
-                  </p:par>
-                </p:childTnLst>
-              </p:cTn>
-              <p:prevCondLst>
-                <p:cond evt="onPrev" delay="0">
-                  <p:tgtEl>
-                    <p:sldTgt/>
-                  </p:tgtEl>
-                </p:cond>
-              </p:prevCondLst>
-              <p:nextCondLst>
-                <p:cond evt="onNext" delay="0">
-                  <p:tgtEl>
-                    <p:sldTgt/>
-                  </p:tgtEl>
-                </p:cond>
-              </p:nextCondLst>
-            </p:seq>
-          </p:childTnLst>
-        </p:cTn>
-      </p:par>
-    </p:tnLst>
-  </p:timing>
-</p:sld>
-</file>
-
-<file path=ppt/slides/slide30.xml><?xml version="1.0" encoding="utf-8"?>
+<file path=ppt/slides/slide31.xml><?xml version="1.0" encoding="utf-8"?>
 <p:sld xmlns:a="http://schemas.openxmlformats.org/drawingml/2006/main" xmlns:r="http://schemas.openxmlformats.org/officeDocument/2006/relationships" xmlns:p="http://schemas.openxmlformats.org/presentationml/2006/main" show="0">
   <p:cSld>
     <p:spTree>
@@ -23841,7 +25023,7 @@
                   <a:spcPts val="600"/>
                 </a:spcAft>
               </a:pPr>
-              <a:t>30</a:t>
+              <a:t>31</a:t>
             </a:fld>
             <a:r>
               <a:rPr lang="en-GB" sz="700" noProof="0" dirty="0"/>
@@ -24462,777 +25644,6 @@
                                           <p:spTgt spid="4">
                                             <p:txEl>
                                               <p:pRg st="9" end="9"/>
-                                            </p:txEl>
-                                          </p:spTgt>
-                                        </p:tgtEl>
-                                      </p:cBhvr>
-                                    </p:animEffect>
-                                  </p:childTnLst>
-                                </p:cTn>
-                              </p:par>
-                            </p:childTnLst>
-                          </p:cTn>
-                        </p:par>
-                      </p:childTnLst>
-                    </p:cTn>
-                  </p:par>
-                </p:childTnLst>
-              </p:cTn>
-              <p:prevCondLst>
-                <p:cond evt="onPrev" delay="0">
-                  <p:tgtEl>
-                    <p:sldTgt/>
-                  </p:tgtEl>
-                </p:cond>
-              </p:prevCondLst>
-              <p:nextCondLst>
-                <p:cond evt="onNext" delay="0">
-                  <p:tgtEl>
-                    <p:sldTgt/>
-                  </p:tgtEl>
-                </p:cond>
-              </p:nextCondLst>
-            </p:seq>
-          </p:childTnLst>
-        </p:cTn>
-      </p:par>
-    </p:tnLst>
-  </p:timing>
-</p:sld>
-</file>
-
-<file path=ppt/slides/slide31.xml><?xml version="1.0" encoding="utf-8"?>
-<p:sld xmlns:a="http://schemas.openxmlformats.org/drawingml/2006/main" xmlns:r="http://schemas.openxmlformats.org/officeDocument/2006/relationships" xmlns:p="http://schemas.openxmlformats.org/presentationml/2006/main">
-  <p:cSld>
-    <p:spTree>
-      <p:nvGrpSpPr>
-        <p:cNvPr id="1" name="">
-          <a:extLst>
-            <a:ext uri="{FF2B5EF4-FFF2-40B4-BE49-F238E27FC236}">
-              <a16:creationId xmlns:a16="http://schemas.microsoft.com/office/drawing/2014/main" id="{C2C3F31F-FC6D-54A5-C034-30D8B2712D53}"/>
-            </a:ext>
-          </a:extLst>
-        </p:cNvPr>
-        <p:cNvGrpSpPr/>
-        <p:nvPr/>
-      </p:nvGrpSpPr>
-      <p:grpSpPr>
-        <a:xfrm>
-          <a:off x="0" y="0"/>
-          <a:ext cx="0" cy="0"/>
-          <a:chOff x="0" y="0"/>
-          <a:chExt cx="0" cy="0"/>
-        </a:xfrm>
-      </p:grpSpPr>
-      <p:sp>
-        <p:nvSpPr>
-          <p:cNvPr id="21" name="Title 20">
-            <a:extLst>
-              <a:ext uri="{FF2B5EF4-FFF2-40B4-BE49-F238E27FC236}">
-                <a16:creationId xmlns:a16="http://schemas.microsoft.com/office/drawing/2014/main" id="{6A994EA0-E5E2-65C3-CEE9-BCAEB4C83182}"/>
-              </a:ext>
-            </a:extLst>
-          </p:cNvPr>
-          <p:cNvSpPr>
-            <a:spLocks noGrp="1"/>
-          </p:cNvSpPr>
-          <p:nvPr>
-            <p:ph type="title"/>
-          </p:nvPr>
-        </p:nvSpPr>
-        <p:spPr/>
-        <p:txBody>
-          <a:bodyPr/>
-          <a:lstStyle/>
-          <a:p>
-            <a:r>
-              <a:rPr lang="en-GB" sz="2800" dirty="0">
-                <a:solidFill>
-                  <a:srgbClr val="0B365B"/>
-                </a:solidFill>
-              </a:rPr>
-              <a:t>Example</a:t>
-            </a:r>
-            <a:endParaRPr lang="en-US" dirty="0"/>
-          </a:p>
-        </p:txBody>
-      </p:sp>
-      <p:sp>
-        <p:nvSpPr>
-          <p:cNvPr id="4" name="TextBox 3">
-            <a:extLst>
-              <a:ext uri="{FF2B5EF4-FFF2-40B4-BE49-F238E27FC236}">
-                <a16:creationId xmlns:a16="http://schemas.microsoft.com/office/drawing/2014/main" id="{9A4B22F3-5FC7-53ED-1B00-AB9C675141BF}"/>
-              </a:ext>
-            </a:extLst>
-          </p:cNvPr>
-          <p:cNvSpPr txBox="1"/>
-          <p:nvPr/>
-        </p:nvSpPr>
-        <p:spPr>
-          <a:xfrm>
-            <a:off x="468000" y="1383618"/>
-            <a:ext cx="7560000" cy="3016210"/>
-          </a:xfrm>
-          <a:prstGeom prst="rect">
-            <a:avLst/>
-          </a:prstGeom>
-          <a:noFill/>
-        </p:spPr>
-        <p:txBody>
-          <a:bodyPr wrap="square" rtlCol="0">
-            <a:spAutoFit/>
-          </a:bodyPr>
-          <a:lstStyle/>
-          <a:p>
-            <a:pPr marL="285750" indent="-285750">
-              <a:buFont typeface="Arial" panose="020B0604020202020204" pitchFamily="34" charset="0"/>
-              <a:buChar char="•"/>
-            </a:pPr>
-            <a:r>
-              <a:rPr lang="en-GB" sz="1600" b="1" dirty="0">
-                <a:solidFill>
-                  <a:schemeClr val="tx2"/>
-                </a:solidFill>
-              </a:rPr>
-              <a:t>Search Query:</a:t>
-            </a:r>
-          </a:p>
-          <a:p>
-            <a:pPr marL="628650" lvl="1" indent="-285750">
-              <a:buFont typeface="Arial" panose="020B0604020202020204" pitchFamily="34" charset="0"/>
-              <a:buChar char="•"/>
-            </a:pPr>
-            <a:r>
-              <a:rPr lang="en-US" sz="1400" dirty="0">
-                <a:solidFill>
-                  <a:schemeClr val="tx2"/>
-                </a:solidFill>
-              </a:rPr>
-              <a:t>Query 1 (General guidelines)</a:t>
-            </a:r>
-          </a:p>
-          <a:p>
-            <a:pPr marL="628650" lvl="1" indent="-285750">
-              <a:buFont typeface="Arial" panose="020B0604020202020204" pitchFamily="34" charset="0"/>
-              <a:buChar char="•"/>
-            </a:pPr>
-            <a:r>
-              <a:rPr lang="en-GB" sz="1400" dirty="0">
-                <a:solidFill>
-                  <a:schemeClr val="tx2"/>
-                </a:solidFill>
-              </a:rPr>
-              <a:t>Repo: </a:t>
-            </a:r>
-            <a:r>
-              <a:rPr lang="en-GB" sz="1400" dirty="0" err="1">
-                <a:solidFill>
-                  <a:schemeClr val="tx2"/>
-                </a:solidFill>
-              </a:rPr>
-              <a:t>sveneisenschmidt</a:t>
-            </a:r>
-            <a:r>
-              <a:rPr lang="en-GB" sz="1400" dirty="0">
-                <a:solidFill>
-                  <a:schemeClr val="tx2"/>
-                </a:solidFill>
-              </a:rPr>
-              <a:t>/n8n-openai-bridge</a:t>
-            </a:r>
-            <a:endParaRPr lang="en-US" sz="1400" dirty="0">
-              <a:solidFill>
-                <a:schemeClr val="tx2"/>
-              </a:solidFill>
-            </a:endParaRPr>
-          </a:p>
-          <a:p>
-            <a:pPr marL="628650" lvl="1" indent="-285750">
-              <a:buFont typeface="Arial" panose="020B0604020202020204" pitchFamily="34" charset="0"/>
-              <a:buChar char="•"/>
-            </a:pPr>
-            <a:r>
-              <a:rPr lang="en-US" sz="1400" dirty="0">
-                <a:solidFill>
-                  <a:schemeClr val="tx2"/>
-                </a:solidFill>
-              </a:rPr>
-              <a:t>“This document describes the logging standards and practices for the n8n OpenAI Bridge application.”</a:t>
-            </a:r>
-          </a:p>
-          <a:p>
-            <a:pPr lvl="1"/>
-            <a:endParaRPr lang="en-GB" sz="1600" dirty="0">
-              <a:solidFill>
-                <a:schemeClr val="tx2"/>
-              </a:solidFill>
-            </a:endParaRPr>
-          </a:p>
-          <a:p>
-            <a:pPr marL="285750" indent="-285750">
-              <a:buFont typeface="Arial" panose="020B0604020202020204" pitchFamily="34" charset="0"/>
-              <a:buChar char="•"/>
-            </a:pPr>
-            <a:r>
-              <a:rPr lang="en-GB" sz="1600" b="1" dirty="0">
-                <a:solidFill>
-                  <a:schemeClr val="tx2"/>
-                </a:solidFill>
-              </a:rPr>
-              <a:t> Metadata:</a:t>
-            </a:r>
-          </a:p>
-          <a:p>
-            <a:pPr marL="628650" lvl="1" indent="-285750">
-              <a:buFont typeface="Arial" panose="020B0604020202020204" pitchFamily="34" charset="0"/>
-              <a:buChar char="•"/>
-            </a:pPr>
-            <a:r>
-              <a:rPr lang="en-GB" sz="1400" dirty="0">
-                <a:solidFill>
-                  <a:schemeClr val="tx2"/>
-                </a:solidFill>
-              </a:rPr>
-              <a:t>Stars: 124</a:t>
-            </a:r>
-          </a:p>
-          <a:p>
-            <a:pPr marL="628650" lvl="1" indent="-285750">
-              <a:buFont typeface="Arial" panose="020B0604020202020204" pitchFamily="34" charset="0"/>
-              <a:buChar char="•"/>
-            </a:pPr>
-            <a:r>
-              <a:rPr lang="en-GB" sz="1400" dirty="0">
-                <a:solidFill>
-                  <a:schemeClr val="tx2"/>
-                </a:solidFill>
-              </a:rPr>
-              <a:t>Commits: 87</a:t>
-            </a:r>
-          </a:p>
-          <a:p>
-            <a:pPr marL="628650" lvl="1" indent="-285750">
-              <a:buFont typeface="Arial" panose="020B0604020202020204" pitchFamily="34" charset="0"/>
-              <a:buChar char="•"/>
-            </a:pPr>
-            <a:r>
-              <a:rPr lang="en-GB" sz="1400" dirty="0">
-                <a:solidFill>
-                  <a:schemeClr val="tx2"/>
-                </a:solidFill>
-              </a:rPr>
-              <a:t>Developers: 3</a:t>
-            </a:r>
-          </a:p>
-          <a:p>
-            <a:pPr marL="628650" lvl="1" indent="-285750">
-              <a:buFont typeface="Arial" panose="020B0604020202020204" pitchFamily="34" charset="0"/>
-              <a:buChar char="•"/>
-            </a:pPr>
-            <a:r>
-              <a:rPr lang="en-GB" sz="1400" dirty="0">
-                <a:solidFill>
-                  <a:schemeClr val="tx2"/>
-                </a:solidFill>
-              </a:rPr>
-              <a:t>Latest updated: 27/03/26</a:t>
-            </a:r>
-          </a:p>
-          <a:p>
-            <a:pPr marL="628650" lvl="1" indent="-285750">
-              <a:buFont typeface="Arial" panose="020B0604020202020204" pitchFamily="34" charset="0"/>
-              <a:buChar char="•"/>
-            </a:pPr>
-            <a:r>
-              <a:rPr lang="en-GB" sz="1400" dirty="0">
-                <a:solidFill>
-                  <a:schemeClr val="tx2"/>
-                </a:solidFill>
-              </a:rPr>
-              <a:t>Created: 10/10/25</a:t>
-            </a:r>
-          </a:p>
-          <a:p>
-            <a:pPr lvl="1"/>
-            <a:endParaRPr lang="en-GB" sz="1600" dirty="0">
-              <a:solidFill>
-                <a:schemeClr val="tx2"/>
-              </a:solidFill>
-            </a:endParaRPr>
-          </a:p>
-        </p:txBody>
-      </p:sp>
-    </p:spTree>
-    <p:extLst>
-      <p:ext uri="{BB962C8B-B14F-4D97-AF65-F5344CB8AC3E}">
-        <p14:creationId xmlns:p14="http://schemas.microsoft.com/office/powerpoint/2010/main" val="2719512846"/>
-      </p:ext>
-    </p:extLst>
-  </p:cSld>
-  <p:clrMapOvr>
-    <a:masterClrMapping/>
-  </p:clrMapOvr>
-  <p:timing>
-    <p:tnLst>
-      <p:par>
-        <p:cTn id="1" dur="indefinite" restart="never" nodeType="tmRoot">
-          <p:childTnLst>
-            <p:seq concurrent="1" nextAc="seek">
-              <p:cTn id="2" dur="indefinite" nodeType="mainSeq">
-                <p:childTnLst>
-                  <p:par>
-                    <p:cTn id="3" fill="hold">
-                      <p:stCondLst>
-                        <p:cond delay="indefinite"/>
-                      </p:stCondLst>
-                      <p:childTnLst>
-                        <p:par>
-                          <p:cTn id="4" fill="hold">
-                            <p:stCondLst>
-                              <p:cond delay="0"/>
-                            </p:stCondLst>
-                            <p:childTnLst>
-                              <p:par>
-                                <p:cTn id="5" presetID="10" presetClass="entr" presetSubtype="0" fill="hold" nodeType="clickEffect">
-                                  <p:stCondLst>
-                                    <p:cond delay="0"/>
-                                  </p:stCondLst>
-                                  <p:childTnLst>
-                                    <p:set>
-                                      <p:cBhvr>
-                                        <p:cTn id="6" dur="1" fill="hold">
-                                          <p:stCondLst>
-                                            <p:cond delay="0"/>
-                                          </p:stCondLst>
-                                        </p:cTn>
-                                        <p:tgtEl>
-                                          <p:spTgt spid="4">
-                                            <p:txEl>
-                                              <p:pRg st="0" end="0"/>
-                                            </p:txEl>
-                                          </p:spTgt>
-                                        </p:tgtEl>
-                                        <p:attrNameLst>
-                                          <p:attrName>style.visibility</p:attrName>
-                                        </p:attrNameLst>
-                                      </p:cBhvr>
-                                      <p:to>
-                                        <p:strVal val="visible"/>
-                                      </p:to>
-                                    </p:set>
-                                    <p:animEffect transition="in" filter="fade">
-                                      <p:cBhvr>
-                                        <p:cTn id="7" dur="500"/>
-                                        <p:tgtEl>
-                                          <p:spTgt spid="4">
-                                            <p:txEl>
-                                              <p:pRg st="0" end="0"/>
-                                            </p:txEl>
-                                          </p:spTgt>
-                                        </p:tgtEl>
-                                      </p:cBhvr>
-                                    </p:animEffect>
-                                  </p:childTnLst>
-                                </p:cTn>
-                              </p:par>
-                              <p:par>
-                                <p:cTn id="8" presetID="10" presetClass="entr" presetSubtype="0" fill="hold" nodeType="withEffect">
-                                  <p:stCondLst>
-                                    <p:cond delay="0"/>
-                                  </p:stCondLst>
-                                  <p:childTnLst>
-                                    <p:set>
-                                      <p:cBhvr>
-                                        <p:cTn id="9" dur="1" fill="hold">
-                                          <p:stCondLst>
-                                            <p:cond delay="0"/>
-                                          </p:stCondLst>
-                                        </p:cTn>
-                                        <p:tgtEl>
-                                          <p:spTgt spid="4">
-                                            <p:txEl>
-                                              <p:pRg st="1" end="1"/>
-                                            </p:txEl>
-                                          </p:spTgt>
-                                        </p:tgtEl>
-                                        <p:attrNameLst>
-                                          <p:attrName>style.visibility</p:attrName>
-                                        </p:attrNameLst>
-                                      </p:cBhvr>
-                                      <p:to>
-                                        <p:strVal val="visible"/>
-                                      </p:to>
-                                    </p:set>
-                                    <p:animEffect transition="in" filter="fade">
-                                      <p:cBhvr>
-                                        <p:cTn id="10" dur="500"/>
-                                        <p:tgtEl>
-                                          <p:spTgt spid="4">
-                                            <p:txEl>
-                                              <p:pRg st="1" end="1"/>
-                                            </p:txEl>
-                                          </p:spTgt>
-                                        </p:tgtEl>
-                                      </p:cBhvr>
-                                    </p:animEffect>
-                                  </p:childTnLst>
-                                </p:cTn>
-                              </p:par>
-                              <p:par>
-                                <p:cTn id="11" presetID="10" presetClass="entr" presetSubtype="0" fill="hold" nodeType="withEffect">
-                                  <p:stCondLst>
-                                    <p:cond delay="0"/>
-                                  </p:stCondLst>
-                                  <p:childTnLst>
-                                    <p:set>
-                                      <p:cBhvr>
-                                        <p:cTn id="12" dur="1" fill="hold">
-                                          <p:stCondLst>
-                                            <p:cond delay="0"/>
-                                          </p:stCondLst>
-                                        </p:cTn>
-                                        <p:tgtEl>
-                                          <p:spTgt spid="4">
-                                            <p:txEl>
-                                              <p:pRg st="2" end="2"/>
-                                            </p:txEl>
-                                          </p:spTgt>
-                                        </p:tgtEl>
-                                        <p:attrNameLst>
-                                          <p:attrName>style.visibility</p:attrName>
-                                        </p:attrNameLst>
-                                      </p:cBhvr>
-                                      <p:to>
-                                        <p:strVal val="visible"/>
-                                      </p:to>
-                                    </p:set>
-                                    <p:animEffect transition="in" filter="fade">
-                                      <p:cBhvr>
-                                        <p:cTn id="13" dur="500"/>
-                                        <p:tgtEl>
-                                          <p:spTgt spid="4">
-                                            <p:txEl>
-                                              <p:pRg st="2" end="2"/>
-                                            </p:txEl>
-                                          </p:spTgt>
-                                        </p:tgtEl>
-                                      </p:cBhvr>
-                                    </p:animEffect>
-                                  </p:childTnLst>
-                                </p:cTn>
-                              </p:par>
-                              <p:par>
-                                <p:cTn id="14" presetID="10" presetClass="entr" presetSubtype="0" fill="hold" nodeType="withEffect">
-                                  <p:stCondLst>
-                                    <p:cond delay="0"/>
-                                  </p:stCondLst>
-                                  <p:childTnLst>
-                                    <p:set>
-                                      <p:cBhvr>
-                                        <p:cTn id="15" dur="1" fill="hold">
-                                          <p:stCondLst>
-                                            <p:cond delay="0"/>
-                                          </p:stCondLst>
-                                        </p:cTn>
-                                        <p:tgtEl>
-                                          <p:spTgt spid="4">
-                                            <p:txEl>
-                                              <p:pRg st="3" end="3"/>
-                                            </p:txEl>
-                                          </p:spTgt>
-                                        </p:tgtEl>
-                                        <p:attrNameLst>
-                                          <p:attrName>style.visibility</p:attrName>
-                                        </p:attrNameLst>
-                                      </p:cBhvr>
-                                      <p:to>
-                                        <p:strVal val="visible"/>
-                                      </p:to>
-                                    </p:set>
-                                    <p:animEffect transition="in" filter="fade">
-                                      <p:cBhvr>
-                                        <p:cTn id="16" dur="500"/>
-                                        <p:tgtEl>
-                                          <p:spTgt spid="4">
-                                            <p:txEl>
-                                              <p:pRg st="3" end="3"/>
-                                            </p:txEl>
-                                          </p:spTgt>
-                                        </p:tgtEl>
-                                      </p:cBhvr>
-                                    </p:animEffect>
-                                  </p:childTnLst>
-                                </p:cTn>
-                              </p:par>
-                            </p:childTnLst>
-                          </p:cTn>
-                        </p:par>
-                      </p:childTnLst>
-                    </p:cTn>
-                  </p:par>
-                  <p:par>
-                    <p:cTn id="17" fill="hold">
-                      <p:stCondLst>
-                        <p:cond delay="indefinite"/>
-                      </p:stCondLst>
-                      <p:childTnLst>
-                        <p:par>
-                          <p:cTn id="18" fill="hold">
-                            <p:stCondLst>
-                              <p:cond delay="0"/>
-                            </p:stCondLst>
-                            <p:childTnLst>
-                              <p:par>
-                                <p:cTn id="19" presetID="10" presetClass="entr" presetSubtype="0" fill="hold" nodeType="clickEffect">
-                                  <p:stCondLst>
-                                    <p:cond delay="0"/>
-                                  </p:stCondLst>
-                                  <p:childTnLst>
-                                    <p:set>
-                                      <p:cBhvr>
-                                        <p:cTn id="20" dur="1" fill="hold">
-                                          <p:stCondLst>
-                                            <p:cond delay="0"/>
-                                          </p:stCondLst>
-                                        </p:cTn>
-                                        <p:tgtEl>
-                                          <p:spTgt spid="4">
-                                            <p:txEl>
-                                              <p:pRg st="5" end="5"/>
-                                            </p:txEl>
-                                          </p:spTgt>
-                                        </p:tgtEl>
-                                        <p:attrNameLst>
-                                          <p:attrName>style.visibility</p:attrName>
-                                        </p:attrNameLst>
-                                      </p:cBhvr>
-                                      <p:to>
-                                        <p:strVal val="visible"/>
-                                      </p:to>
-                                    </p:set>
-                                    <p:animEffect transition="in" filter="fade">
-                                      <p:cBhvr>
-                                        <p:cTn id="21" dur="500"/>
-                                        <p:tgtEl>
-                                          <p:spTgt spid="4">
-                                            <p:txEl>
-                                              <p:pRg st="5" end="5"/>
-                                            </p:txEl>
-                                          </p:spTgt>
-                                        </p:tgtEl>
-                                      </p:cBhvr>
-                                    </p:animEffect>
-                                  </p:childTnLst>
-                                </p:cTn>
-                              </p:par>
-                              <p:par>
-                                <p:cTn id="22" presetID="10" presetClass="entr" presetSubtype="0" fill="hold" nodeType="withEffect">
-                                  <p:stCondLst>
-                                    <p:cond delay="0"/>
-                                  </p:stCondLst>
-                                  <p:childTnLst>
-                                    <p:set>
-                                      <p:cBhvr>
-                                        <p:cTn id="23" dur="1" fill="hold">
-                                          <p:stCondLst>
-                                            <p:cond delay="0"/>
-                                          </p:stCondLst>
-                                        </p:cTn>
-                                        <p:tgtEl>
-                                          <p:spTgt spid="4">
-                                            <p:txEl>
-                                              <p:pRg st="6" end="6"/>
-                                            </p:txEl>
-                                          </p:spTgt>
-                                        </p:tgtEl>
-                                        <p:attrNameLst>
-                                          <p:attrName>style.visibility</p:attrName>
-                                        </p:attrNameLst>
-                                      </p:cBhvr>
-                                      <p:to>
-                                        <p:strVal val="visible"/>
-                                      </p:to>
-                                    </p:set>
-                                    <p:animEffect transition="in" filter="fade">
-                                      <p:cBhvr>
-                                        <p:cTn id="24" dur="500"/>
-                                        <p:tgtEl>
-                                          <p:spTgt spid="4">
-                                            <p:txEl>
-                                              <p:pRg st="6" end="6"/>
-                                            </p:txEl>
-                                          </p:spTgt>
-                                        </p:tgtEl>
-                                      </p:cBhvr>
-                                    </p:animEffect>
-                                  </p:childTnLst>
-                                </p:cTn>
-                              </p:par>
-                              <p:par>
-                                <p:cTn id="25" presetID="10" presetClass="entr" presetSubtype="0" fill="hold" nodeType="withEffect">
-                                  <p:stCondLst>
-                                    <p:cond delay="0"/>
-                                  </p:stCondLst>
-                                  <p:childTnLst>
-                                    <p:set>
-                                      <p:cBhvr>
-                                        <p:cTn id="26" dur="1" fill="hold">
-                                          <p:stCondLst>
-                                            <p:cond delay="0"/>
-                                          </p:stCondLst>
-                                        </p:cTn>
-                                        <p:tgtEl>
-                                          <p:spTgt spid="4">
-                                            <p:txEl>
-                                              <p:pRg st="7" end="7"/>
-                                            </p:txEl>
-                                          </p:spTgt>
-                                        </p:tgtEl>
-                                        <p:attrNameLst>
-                                          <p:attrName>style.visibility</p:attrName>
-                                        </p:attrNameLst>
-                                      </p:cBhvr>
-                                      <p:to>
-                                        <p:strVal val="visible"/>
-                                      </p:to>
-                                    </p:set>
-                                    <p:animEffect transition="in" filter="fade">
-                                      <p:cBhvr>
-                                        <p:cTn id="27" dur="500"/>
-                                        <p:tgtEl>
-                                          <p:spTgt spid="4">
-                                            <p:txEl>
-                                              <p:pRg st="7" end="7"/>
-                                            </p:txEl>
-                                          </p:spTgt>
-                                        </p:tgtEl>
-                                      </p:cBhvr>
-                                    </p:animEffect>
-                                  </p:childTnLst>
-                                </p:cTn>
-                              </p:par>
-                              <p:par>
-                                <p:cTn id="28" presetID="10" presetClass="entr" presetSubtype="0" fill="hold" nodeType="withEffect">
-                                  <p:stCondLst>
-                                    <p:cond delay="0"/>
-                                  </p:stCondLst>
-                                  <p:childTnLst>
-                                    <p:set>
-                                      <p:cBhvr>
-                                        <p:cTn id="29" dur="1" fill="hold">
-                                          <p:stCondLst>
-                                            <p:cond delay="0"/>
-                                          </p:stCondLst>
-                                        </p:cTn>
-                                        <p:tgtEl>
-                                          <p:spTgt spid="4">
-                                            <p:txEl>
-                                              <p:pRg st="8" end="8"/>
-                                            </p:txEl>
-                                          </p:spTgt>
-                                        </p:tgtEl>
-                                        <p:attrNameLst>
-                                          <p:attrName>style.visibility</p:attrName>
-                                        </p:attrNameLst>
-                                      </p:cBhvr>
-                                      <p:to>
-                                        <p:strVal val="visible"/>
-                                      </p:to>
-                                    </p:set>
-                                    <p:animEffect transition="in" filter="fade">
-                                      <p:cBhvr>
-                                        <p:cTn id="30" dur="500"/>
-                                        <p:tgtEl>
-                                          <p:spTgt spid="4">
-                                            <p:txEl>
-                                              <p:pRg st="8" end="8"/>
-                                            </p:txEl>
-                                          </p:spTgt>
-                                        </p:tgtEl>
-                                      </p:cBhvr>
-                                    </p:animEffect>
-                                  </p:childTnLst>
-                                </p:cTn>
-                              </p:par>
-                              <p:par>
-                                <p:cTn id="31" presetID="10" presetClass="entr" presetSubtype="0" fill="hold" nodeType="withEffect">
-                                  <p:stCondLst>
-                                    <p:cond delay="0"/>
-                                  </p:stCondLst>
-                                  <p:childTnLst>
-                                    <p:set>
-                                      <p:cBhvr>
-                                        <p:cTn id="32" dur="1" fill="hold">
-                                          <p:stCondLst>
-                                            <p:cond delay="0"/>
-                                          </p:stCondLst>
-                                        </p:cTn>
-                                        <p:tgtEl>
-                                          <p:spTgt spid="4">
-                                            <p:txEl>
-                                              <p:pRg st="9" end="9"/>
-                                            </p:txEl>
-                                          </p:spTgt>
-                                        </p:tgtEl>
-                                        <p:attrNameLst>
-                                          <p:attrName>style.visibility</p:attrName>
-                                        </p:attrNameLst>
-                                      </p:cBhvr>
-                                      <p:to>
-                                        <p:strVal val="visible"/>
-                                      </p:to>
-                                    </p:set>
-                                    <p:animEffect transition="in" filter="fade">
-                                      <p:cBhvr>
-                                        <p:cTn id="33" dur="500"/>
-                                        <p:tgtEl>
-                                          <p:spTgt spid="4">
-                                            <p:txEl>
-                                              <p:pRg st="9" end="9"/>
-                                            </p:txEl>
-                                          </p:spTgt>
-                                        </p:tgtEl>
-                                      </p:cBhvr>
-                                    </p:animEffect>
-                                  </p:childTnLst>
-                                </p:cTn>
-                              </p:par>
-                              <p:par>
-                                <p:cTn id="34" presetID="10" presetClass="entr" presetSubtype="0" fill="hold" nodeType="withEffect">
-                                  <p:stCondLst>
-                                    <p:cond delay="0"/>
-                                  </p:stCondLst>
-                                  <p:childTnLst>
-                                    <p:set>
-                                      <p:cBhvr>
-                                        <p:cTn id="35" dur="1" fill="hold">
-                                          <p:stCondLst>
-                                            <p:cond delay="0"/>
-                                          </p:stCondLst>
-                                        </p:cTn>
-                                        <p:tgtEl>
-                                          <p:spTgt spid="4">
-                                            <p:txEl>
-                                              <p:pRg st="10" end="10"/>
-                                            </p:txEl>
-                                          </p:spTgt>
-                                        </p:tgtEl>
-                                        <p:attrNameLst>
-                                          <p:attrName>style.visibility</p:attrName>
-                                        </p:attrNameLst>
-                                      </p:cBhvr>
-                                      <p:to>
-                                        <p:strVal val="visible"/>
-                                      </p:to>
-                                    </p:set>
-                                    <p:animEffect transition="in" filter="fade">
-                                      <p:cBhvr>
-                                        <p:cTn id="36" dur="500"/>
-                                        <p:tgtEl>
-                                          <p:spTgt spid="4">
-                                            <p:txEl>
-                                              <p:pRg st="10" end="10"/>
                                             </p:txEl>
                                           </p:spTgt>
                                         </p:tgtEl>
@@ -25280,7 +25691,7 @@
         <p:cNvPr id="1" name="">
           <a:extLst>
             <a:ext uri="{FF2B5EF4-FFF2-40B4-BE49-F238E27FC236}">
-              <a16:creationId xmlns:a16="http://schemas.microsoft.com/office/drawing/2014/main" id="{DDD80404-08E8-A528-71E4-F05493BC3936}"/>
+              <a16:creationId xmlns:a16="http://schemas.microsoft.com/office/drawing/2014/main" id="{C2C3F31F-FC6D-54A5-C034-30D8B2712D53}"/>
             </a:ext>
           </a:extLst>
         </p:cNvPr>
@@ -25300,7 +25711,7 @@
           <p:cNvPr id="21" name="Title 20">
             <a:extLst>
               <a:ext uri="{FF2B5EF4-FFF2-40B4-BE49-F238E27FC236}">
-                <a16:creationId xmlns:a16="http://schemas.microsoft.com/office/drawing/2014/main" id="{0C49B100-BA72-1CA4-26AB-7F28B79B320C}"/>
+                <a16:creationId xmlns:a16="http://schemas.microsoft.com/office/drawing/2014/main" id="{6A994EA0-E5E2-65C3-CEE9-BCAEB4C83182}"/>
               </a:ext>
             </a:extLst>
           </p:cNvPr>
@@ -25333,7 +25744,7 @@
           <p:cNvPr id="4" name="TextBox 3">
             <a:extLst>
               <a:ext uri="{FF2B5EF4-FFF2-40B4-BE49-F238E27FC236}">
-                <a16:creationId xmlns:a16="http://schemas.microsoft.com/office/drawing/2014/main" id="{738746DA-1BD8-0D32-6F7C-64C5DA6EBDD1}"/>
+                <a16:creationId xmlns:a16="http://schemas.microsoft.com/office/drawing/2014/main" id="{9A4B22F3-5FC7-53ED-1B00-AB9C675141BF}"/>
               </a:ext>
             </a:extLst>
           </p:cNvPr>
@@ -25343,7 +25754,7 @@
         <p:spPr>
           <a:xfrm>
             <a:off x="468000" y="1383618"/>
-            <a:ext cx="7560000" cy="3108543"/>
+            <a:ext cx="7560000" cy="3016210"/>
           </a:xfrm>
           <a:prstGeom prst="rect">
             <a:avLst/>
@@ -25366,172 +25777,70 @@
                   <a:schemeClr val="tx2"/>
                 </a:solidFill>
               </a:rPr>
-              <a:t>XML Tag:</a:t>
-            </a:r>
-          </a:p>
-          <a:p>
-            <a:pPr lvl="1"/>
-            <a:r>
-              <a:rPr lang="en-US" sz="900" dirty="0">
+              <a:t>Search Query:</a:t>
+            </a:r>
+          </a:p>
+          <a:p>
+            <a:pPr marL="628650" lvl="1" indent="-285750">
+              <a:buFont typeface="Arial" panose="020B0604020202020204" pitchFamily="34" charset="0"/>
+              <a:buChar char="•"/>
+            </a:pPr>
+            <a:r>
+              <a:rPr lang="en-US" sz="1400" dirty="0">
                 <a:solidFill>
                   <a:schemeClr val="tx2"/>
                 </a:solidFill>
               </a:rPr>
-              <a:t>&lt;</a:t>
-            </a:r>
-            <a:r>
-              <a:rPr lang="en-US" sz="900" dirty="0" err="1">
+              <a:t>Query 1 (General guidelines)</a:t>
+            </a:r>
+          </a:p>
+          <a:p>
+            <a:pPr marL="628650" lvl="1" indent="-285750">
+              <a:buFont typeface="Arial" panose="020B0604020202020204" pitchFamily="34" charset="0"/>
+              <a:buChar char="•"/>
+            </a:pPr>
+            <a:r>
+              <a:rPr lang="en-GB" sz="1400" dirty="0">
                 <a:solidFill>
                   <a:schemeClr val="tx2"/>
                 </a:solidFill>
               </a:rPr>
-              <a:t>how_to_log</a:t>
-            </a:r>
-            <a:r>
-              <a:rPr lang="en-US" sz="900" dirty="0">
+              <a:t>Repo: </a:t>
+            </a:r>
+            <a:r>
+              <a:rPr lang="en-GB" sz="1400" dirty="0" err="1">
                 <a:solidFill>
                   <a:schemeClr val="tx2"/>
                 </a:solidFill>
               </a:rPr>
-              <a:t>&gt;3. **Never log sensitive data directly**:</a:t>
-            </a:r>
-          </a:p>
-          <a:p>
-            <a:pPr lvl="1"/>
-            <a:r>
-              <a:rPr lang="en-US" sz="900" dirty="0">
+              <a:t>sveneisenschmidt</a:t>
+            </a:r>
+            <a:r>
+              <a:rPr lang="en-GB" sz="1400" dirty="0">
                 <a:solidFill>
                   <a:schemeClr val="tx2"/>
                 </a:solidFill>
               </a:rPr>
-              <a:t>   ```</a:t>
-            </a:r>
-            <a:r>
-              <a:rPr lang="en-US" sz="900" dirty="0" err="1">
-                <a:solidFill>
-                  <a:schemeClr val="tx2"/>
-                </a:solidFill>
-              </a:rPr>
-              <a:t>javascript</a:t>
-            </a:r>
-            <a:endParaRPr lang="en-US" sz="900" dirty="0">
+              <a:t>/n8n-openai-bridge</a:t>
+            </a:r>
+            <a:endParaRPr lang="en-US" sz="1400" dirty="0">
               <a:solidFill>
                 <a:schemeClr val="tx2"/>
               </a:solidFill>
             </a:endParaRPr>
           </a:p>
           <a:p>
-            <a:pPr lvl="1"/>
-            <a:r>
-              <a:rPr lang="en-US" sz="900" dirty="0">
+            <a:pPr marL="628650" lvl="1" indent="-285750">
+              <a:buFont typeface="Arial" panose="020B0604020202020204" pitchFamily="34" charset="0"/>
+              <a:buChar char="•"/>
+            </a:pPr>
+            <a:r>
+              <a:rPr lang="en-US" sz="1400" dirty="0">
                 <a:solidFill>
                   <a:schemeClr val="tx2"/>
                 </a:solidFill>
               </a:rPr>
-              <a:t>   // Bad</a:t>
-            </a:r>
-          </a:p>
-          <a:p>
-            <a:pPr lvl="1"/>
-            <a:r>
-              <a:rPr lang="en-US" sz="900" dirty="0">
-                <a:solidFill>
-                  <a:schemeClr val="tx2"/>
-                </a:solidFill>
-              </a:rPr>
-              <a:t>   console.log('Token:', </a:t>
-            </a:r>
-            <a:r>
-              <a:rPr lang="en-US" sz="900" dirty="0" err="1">
-                <a:solidFill>
-                  <a:schemeClr val="tx2"/>
-                </a:solidFill>
-              </a:rPr>
-              <a:t>bearerToken</a:t>
-            </a:r>
-            <a:r>
-              <a:rPr lang="en-US" sz="900" dirty="0">
-                <a:solidFill>
-                  <a:schemeClr val="tx2"/>
-                </a:solidFill>
-              </a:rPr>
-              <a:t>);</a:t>
-            </a:r>
-          </a:p>
-          <a:p>
-            <a:pPr lvl="1"/>
-            <a:r>
-              <a:rPr lang="en-US" sz="900" dirty="0">
-                <a:solidFill>
-                  <a:schemeClr val="tx2"/>
-                </a:solidFill>
-              </a:rPr>
-              <a:t>   </a:t>
-            </a:r>
-          </a:p>
-          <a:p>
-            <a:pPr lvl="1"/>
-            <a:r>
-              <a:rPr lang="en-US" sz="900" dirty="0">
-                <a:solidFill>
-                  <a:schemeClr val="tx2"/>
-                </a:solidFill>
-              </a:rPr>
-              <a:t>   // Good</a:t>
-            </a:r>
-          </a:p>
-          <a:p>
-            <a:pPr lvl="1"/>
-            <a:r>
-              <a:rPr lang="en-US" sz="900" dirty="0">
-                <a:solidFill>
-                  <a:schemeClr val="tx2"/>
-                </a:solidFill>
-              </a:rPr>
-              <a:t>   console.log('Headers:', </a:t>
-            </a:r>
-            <a:r>
-              <a:rPr lang="en-US" sz="900" dirty="0" err="1">
-                <a:solidFill>
-                  <a:schemeClr val="tx2"/>
-                </a:solidFill>
-              </a:rPr>
-              <a:t>maskSensitiveHeaders</a:t>
-            </a:r>
-            <a:r>
-              <a:rPr lang="en-US" sz="900" dirty="0">
-                <a:solidFill>
-                  <a:schemeClr val="tx2"/>
-                </a:solidFill>
-              </a:rPr>
-              <a:t>(headers));</a:t>
-            </a:r>
-          </a:p>
-          <a:p>
-            <a:pPr lvl="1"/>
-            <a:r>
-              <a:rPr lang="en-US" sz="900" dirty="0">
-                <a:solidFill>
-                  <a:schemeClr val="tx2"/>
-                </a:solidFill>
-              </a:rPr>
-              <a:t>   ```&lt;/</a:t>
-            </a:r>
-            <a:r>
-              <a:rPr lang="en-US" sz="900" dirty="0" err="1">
-                <a:solidFill>
-                  <a:schemeClr val="tx2"/>
-                </a:solidFill>
-              </a:rPr>
-              <a:t>how_to_log</a:t>
-            </a:r>
-            <a:r>
-              <a:rPr lang="en-US" sz="900" dirty="0">
-                <a:solidFill>
-                  <a:schemeClr val="tx2"/>
-                </a:solidFill>
-              </a:rPr>
-              <a:t>&gt;</a:t>
+              <a:t>“This document describes the logging standards and practices for the n8n OpenAI Bridge application.”</a:t>
             </a:r>
           </a:p>
           <a:p>
@@ -25553,7 +25862,7 @@
                   <a:schemeClr val="tx2"/>
                 </a:solidFill>
               </a:rPr>
-              <a:t>Content Tag:</a:t>
+              <a:t> Metadata:</a:t>
             </a:r>
           </a:p>
           <a:p>
@@ -25562,42 +25871,12 @@
               <a:buChar char="•"/>
             </a:pPr>
             <a:r>
-              <a:rPr lang="en-US" sz="1400" dirty="0">
+              <a:rPr lang="en-GB" sz="1400" dirty="0">
                 <a:solidFill>
                   <a:schemeClr val="tx2"/>
                 </a:solidFill>
               </a:rPr>
-              <a:t>access tokens · sensitive data · console output</a:t>
-            </a:r>
-            <a:endParaRPr lang="en-GB" sz="1400" dirty="0">
-              <a:solidFill>
-                <a:schemeClr val="tx2"/>
-              </a:solidFill>
-            </a:endParaRPr>
-          </a:p>
-          <a:p>
-            <a:pPr marL="285750" indent="-285750">
-              <a:buFont typeface="Arial" panose="020B0604020202020204" pitchFamily="34" charset="0"/>
-              <a:buChar char="•"/>
-            </a:pPr>
-            <a:endParaRPr lang="en-GB" sz="1600" b="1" dirty="0">
-              <a:solidFill>
-                <a:schemeClr val="tx2"/>
-              </a:solidFill>
-            </a:endParaRPr>
-          </a:p>
-          <a:p>
-            <a:pPr marL="285750" indent="-285750">
-              <a:buFont typeface="Arial" panose="020B0604020202020204" pitchFamily="34" charset="0"/>
-              <a:buChar char="•"/>
-            </a:pPr>
-            <a:r>
-              <a:rPr lang="en-GB" sz="1600" b="1" dirty="0">
-                <a:solidFill>
-                  <a:schemeClr val="tx2"/>
-                </a:solidFill>
-              </a:rPr>
-              <a:t>Normalised Guideline:</a:t>
+              <a:t>Stars: 124</a:t>
             </a:r>
           </a:p>
           <a:p>
@@ -25611,13 +25890,50 @@
                   <a:schemeClr val="tx2"/>
                 </a:solidFill>
               </a:rPr>
-              <a:t>Never log sensitive data directly.</a:t>
-            </a:r>
-            <a:endParaRPr lang="en-GB" sz="1600" b="1" dirty="0">
-              <a:solidFill>
-                <a:schemeClr val="tx2"/>
-              </a:solidFill>
-            </a:endParaRPr>
+              <a:t>Commits: 87</a:t>
+            </a:r>
+          </a:p>
+          <a:p>
+            <a:pPr marL="628650" lvl="1" indent="-285750">
+              <a:buFont typeface="Arial" panose="020B0604020202020204" pitchFamily="34" charset="0"/>
+              <a:buChar char="•"/>
+            </a:pPr>
+            <a:r>
+              <a:rPr lang="en-GB" sz="1400" dirty="0">
+                <a:solidFill>
+                  <a:schemeClr val="tx2"/>
+                </a:solidFill>
+              </a:rPr>
+              <a:t>Developers: 3</a:t>
+            </a:r>
+          </a:p>
+          <a:p>
+            <a:pPr marL="628650" lvl="1" indent="-285750">
+              <a:buFont typeface="Arial" panose="020B0604020202020204" pitchFamily="34" charset="0"/>
+              <a:buChar char="•"/>
+            </a:pPr>
+            <a:r>
+              <a:rPr lang="en-GB" sz="1400" dirty="0">
+                <a:solidFill>
+                  <a:schemeClr val="tx2"/>
+                </a:solidFill>
+              </a:rPr>
+              <a:t>Latest updated: 27/03/26</a:t>
+            </a:r>
+          </a:p>
+          <a:p>
+            <a:pPr marL="628650" lvl="1" indent="-285750">
+              <a:buFont typeface="Arial" panose="020B0604020202020204" pitchFamily="34" charset="0"/>
+              <a:buChar char="•"/>
+            </a:pPr>
+            <a:r>
+              <a:rPr lang="en-GB" sz="1400" dirty="0">
+                <a:solidFill>
+                  <a:schemeClr val="tx2"/>
+                </a:solidFill>
+              </a:rPr>
+              <a:t>Created: 10/10/25</a:t>
+            </a:r>
           </a:p>
           <a:p>
             <a:pPr lvl="1"/>
@@ -25632,7 +25948,7 @@
     </p:spTree>
     <p:extLst>
       <p:ext uri="{BB962C8B-B14F-4D97-AF65-F5344CB8AC3E}">
-        <p14:creationId xmlns:p14="http://schemas.microsoft.com/office/powerpoint/2010/main" val="2357853359"/>
+        <p14:creationId xmlns:p14="http://schemas.microsoft.com/office/powerpoint/2010/main" val="2719512846"/>
       </p:ext>
     </p:extLst>
   </p:cSld>
@@ -25831,221 +26147,6 @@
                                   </p:childTnLst>
                                 </p:cTn>
                               </p:par>
-                              <p:par>
-                                <p:cTn id="17" presetID="10" presetClass="entr" presetSubtype="0" fill="hold" nodeType="withEffect">
-                                  <p:stCondLst>
-                                    <p:cond delay="0"/>
-                                  </p:stCondLst>
-                                  <p:childTnLst>
-                                    <p:set>
-                                      <p:cBhvr>
-                                        <p:cTn id="18" dur="1" fill="hold">
-                                          <p:stCondLst>
-                                            <p:cond delay="0"/>
-                                          </p:stCondLst>
-                                        </p:cTn>
-                                        <p:tgtEl>
-                                          <p:spTgt spid="4">
-                                            <p:txEl>
-                                              <p:pRg st="4" end="4"/>
-                                            </p:txEl>
-                                          </p:spTgt>
-                                        </p:tgtEl>
-                                        <p:attrNameLst>
-                                          <p:attrName>style.visibility</p:attrName>
-                                        </p:attrNameLst>
-                                      </p:cBhvr>
-                                      <p:to>
-                                        <p:strVal val="visible"/>
-                                      </p:to>
-                                    </p:set>
-                                    <p:animEffect transition="in" filter="fade">
-                                      <p:cBhvr>
-                                        <p:cTn id="19" dur="500"/>
-                                        <p:tgtEl>
-                                          <p:spTgt spid="4">
-                                            <p:txEl>
-                                              <p:pRg st="4" end="4"/>
-                                            </p:txEl>
-                                          </p:spTgt>
-                                        </p:tgtEl>
-                                      </p:cBhvr>
-                                    </p:animEffect>
-                                  </p:childTnLst>
-                                </p:cTn>
-                              </p:par>
-                              <p:par>
-                                <p:cTn id="20" presetID="10" presetClass="entr" presetSubtype="0" fill="hold" nodeType="withEffect">
-                                  <p:stCondLst>
-                                    <p:cond delay="0"/>
-                                  </p:stCondLst>
-                                  <p:childTnLst>
-                                    <p:set>
-                                      <p:cBhvr>
-                                        <p:cTn id="21" dur="1" fill="hold">
-                                          <p:stCondLst>
-                                            <p:cond delay="0"/>
-                                          </p:stCondLst>
-                                        </p:cTn>
-                                        <p:tgtEl>
-                                          <p:spTgt spid="4">
-                                            <p:txEl>
-                                              <p:pRg st="5" end="5"/>
-                                            </p:txEl>
-                                          </p:spTgt>
-                                        </p:tgtEl>
-                                        <p:attrNameLst>
-                                          <p:attrName>style.visibility</p:attrName>
-                                        </p:attrNameLst>
-                                      </p:cBhvr>
-                                      <p:to>
-                                        <p:strVal val="visible"/>
-                                      </p:to>
-                                    </p:set>
-                                    <p:animEffect transition="in" filter="fade">
-                                      <p:cBhvr>
-                                        <p:cTn id="22" dur="500"/>
-                                        <p:tgtEl>
-                                          <p:spTgt spid="4">
-                                            <p:txEl>
-                                              <p:pRg st="5" end="5"/>
-                                            </p:txEl>
-                                          </p:spTgt>
-                                        </p:tgtEl>
-                                      </p:cBhvr>
-                                    </p:animEffect>
-                                  </p:childTnLst>
-                                </p:cTn>
-                              </p:par>
-                              <p:par>
-                                <p:cTn id="23" presetID="10" presetClass="entr" presetSubtype="0" fill="hold" nodeType="withEffect">
-                                  <p:stCondLst>
-                                    <p:cond delay="0"/>
-                                  </p:stCondLst>
-                                  <p:childTnLst>
-                                    <p:set>
-                                      <p:cBhvr>
-                                        <p:cTn id="24" dur="1" fill="hold">
-                                          <p:stCondLst>
-                                            <p:cond delay="0"/>
-                                          </p:stCondLst>
-                                        </p:cTn>
-                                        <p:tgtEl>
-                                          <p:spTgt spid="4">
-                                            <p:txEl>
-                                              <p:pRg st="6" end="6"/>
-                                            </p:txEl>
-                                          </p:spTgt>
-                                        </p:tgtEl>
-                                        <p:attrNameLst>
-                                          <p:attrName>style.visibility</p:attrName>
-                                        </p:attrNameLst>
-                                      </p:cBhvr>
-                                      <p:to>
-                                        <p:strVal val="visible"/>
-                                      </p:to>
-                                    </p:set>
-                                    <p:animEffect transition="in" filter="fade">
-                                      <p:cBhvr>
-                                        <p:cTn id="25" dur="500"/>
-                                        <p:tgtEl>
-                                          <p:spTgt spid="4">
-                                            <p:txEl>
-                                              <p:pRg st="6" end="6"/>
-                                            </p:txEl>
-                                          </p:spTgt>
-                                        </p:tgtEl>
-                                      </p:cBhvr>
-                                    </p:animEffect>
-                                  </p:childTnLst>
-                                </p:cTn>
-                              </p:par>
-                              <p:par>
-                                <p:cTn id="26" presetID="10" presetClass="entr" presetSubtype="0" fill="hold" nodeType="withEffect">
-                                  <p:stCondLst>
-                                    <p:cond delay="0"/>
-                                  </p:stCondLst>
-                                  <p:childTnLst>
-                                    <p:set>
-                                      <p:cBhvr>
-                                        <p:cTn id="27" dur="1" fill="hold">
-                                          <p:stCondLst>
-                                            <p:cond delay="0"/>
-                                          </p:stCondLst>
-                                        </p:cTn>
-                                        <p:tgtEl>
-                                          <p:spTgt spid="4">
-                                            <p:txEl>
-                                              <p:pRg st="7" end="7"/>
-                                            </p:txEl>
-                                          </p:spTgt>
-                                        </p:tgtEl>
-                                        <p:attrNameLst>
-                                          <p:attrName>style.visibility</p:attrName>
-                                        </p:attrNameLst>
-                                      </p:cBhvr>
-                                      <p:to>
-                                        <p:strVal val="visible"/>
-                                      </p:to>
-                                    </p:set>
-                                    <p:animEffect transition="in" filter="fade">
-                                      <p:cBhvr>
-                                        <p:cTn id="28" dur="500"/>
-                                        <p:tgtEl>
-                                          <p:spTgt spid="4">
-                                            <p:txEl>
-                                              <p:pRg st="7" end="7"/>
-                                            </p:txEl>
-                                          </p:spTgt>
-                                        </p:tgtEl>
-                                      </p:cBhvr>
-                                    </p:animEffect>
-                                  </p:childTnLst>
-                                </p:cTn>
-                              </p:par>
-                              <p:par>
-                                <p:cTn id="29" presetID="10" presetClass="entr" presetSubtype="0" fill="hold" nodeType="withEffect">
-                                  <p:stCondLst>
-                                    <p:cond delay="0"/>
-                                  </p:stCondLst>
-                                  <p:childTnLst>
-                                    <p:set>
-                                      <p:cBhvr>
-                                        <p:cTn id="30" dur="1" fill="hold">
-                                          <p:stCondLst>
-                                            <p:cond delay="0"/>
-                                          </p:stCondLst>
-                                        </p:cTn>
-                                        <p:tgtEl>
-                                          <p:spTgt spid="4">
-                                            <p:txEl>
-                                              <p:pRg st="8" end="8"/>
-                                            </p:txEl>
-                                          </p:spTgt>
-                                        </p:tgtEl>
-                                        <p:attrNameLst>
-                                          <p:attrName>style.visibility</p:attrName>
-                                        </p:attrNameLst>
-                                      </p:cBhvr>
-                                      <p:to>
-                                        <p:strVal val="visible"/>
-                                      </p:to>
-                                    </p:set>
-                                    <p:animEffect transition="in" filter="fade">
-                                      <p:cBhvr>
-                                        <p:cTn id="31" dur="500"/>
-                                        <p:tgtEl>
-                                          <p:spTgt spid="4">
-                                            <p:txEl>
-                                              <p:pRg st="8" end="8"/>
-                                            </p:txEl>
-                                          </p:spTgt>
-                                        </p:tgtEl>
-                                      </p:cBhvr>
-                                    </p:animEffect>
-                                  </p:childTnLst>
-                                </p:cTn>
-                              </p:par>
                             </p:childTnLst>
                           </p:cTn>
                         </p:par>
@@ -26053,25 +26154,240 @@
                     </p:cTn>
                   </p:par>
                   <p:par>
-                    <p:cTn id="32" fill="hold">
+                    <p:cTn id="17" fill="hold">
                       <p:stCondLst>
                         <p:cond delay="indefinite"/>
                       </p:stCondLst>
                       <p:childTnLst>
                         <p:par>
-                          <p:cTn id="33" fill="hold">
+                          <p:cTn id="18" fill="hold">
                             <p:stCondLst>
                               <p:cond delay="0"/>
                             </p:stCondLst>
                             <p:childTnLst>
                               <p:par>
-                                <p:cTn id="34" presetID="10" presetClass="entr" presetSubtype="0" fill="hold" nodeType="clickEffect">
+                                <p:cTn id="19" presetID="10" presetClass="entr" presetSubtype="0" fill="hold" nodeType="clickEffect">
                                   <p:stCondLst>
                                     <p:cond delay="0"/>
                                   </p:stCondLst>
                                   <p:childTnLst>
                                     <p:set>
                                       <p:cBhvr>
+                                        <p:cTn id="20" dur="1" fill="hold">
+                                          <p:stCondLst>
+                                            <p:cond delay="0"/>
+                                          </p:stCondLst>
+                                        </p:cTn>
+                                        <p:tgtEl>
+                                          <p:spTgt spid="4">
+                                            <p:txEl>
+                                              <p:pRg st="5" end="5"/>
+                                            </p:txEl>
+                                          </p:spTgt>
+                                        </p:tgtEl>
+                                        <p:attrNameLst>
+                                          <p:attrName>style.visibility</p:attrName>
+                                        </p:attrNameLst>
+                                      </p:cBhvr>
+                                      <p:to>
+                                        <p:strVal val="visible"/>
+                                      </p:to>
+                                    </p:set>
+                                    <p:animEffect transition="in" filter="fade">
+                                      <p:cBhvr>
+                                        <p:cTn id="21" dur="500"/>
+                                        <p:tgtEl>
+                                          <p:spTgt spid="4">
+                                            <p:txEl>
+                                              <p:pRg st="5" end="5"/>
+                                            </p:txEl>
+                                          </p:spTgt>
+                                        </p:tgtEl>
+                                      </p:cBhvr>
+                                    </p:animEffect>
+                                  </p:childTnLst>
+                                </p:cTn>
+                              </p:par>
+                              <p:par>
+                                <p:cTn id="22" presetID="10" presetClass="entr" presetSubtype="0" fill="hold" nodeType="withEffect">
+                                  <p:stCondLst>
+                                    <p:cond delay="0"/>
+                                  </p:stCondLst>
+                                  <p:childTnLst>
+                                    <p:set>
+                                      <p:cBhvr>
+                                        <p:cTn id="23" dur="1" fill="hold">
+                                          <p:stCondLst>
+                                            <p:cond delay="0"/>
+                                          </p:stCondLst>
+                                        </p:cTn>
+                                        <p:tgtEl>
+                                          <p:spTgt spid="4">
+                                            <p:txEl>
+                                              <p:pRg st="6" end="6"/>
+                                            </p:txEl>
+                                          </p:spTgt>
+                                        </p:tgtEl>
+                                        <p:attrNameLst>
+                                          <p:attrName>style.visibility</p:attrName>
+                                        </p:attrNameLst>
+                                      </p:cBhvr>
+                                      <p:to>
+                                        <p:strVal val="visible"/>
+                                      </p:to>
+                                    </p:set>
+                                    <p:animEffect transition="in" filter="fade">
+                                      <p:cBhvr>
+                                        <p:cTn id="24" dur="500"/>
+                                        <p:tgtEl>
+                                          <p:spTgt spid="4">
+                                            <p:txEl>
+                                              <p:pRg st="6" end="6"/>
+                                            </p:txEl>
+                                          </p:spTgt>
+                                        </p:tgtEl>
+                                      </p:cBhvr>
+                                    </p:animEffect>
+                                  </p:childTnLst>
+                                </p:cTn>
+                              </p:par>
+                              <p:par>
+                                <p:cTn id="25" presetID="10" presetClass="entr" presetSubtype="0" fill="hold" nodeType="withEffect">
+                                  <p:stCondLst>
+                                    <p:cond delay="0"/>
+                                  </p:stCondLst>
+                                  <p:childTnLst>
+                                    <p:set>
+                                      <p:cBhvr>
+                                        <p:cTn id="26" dur="1" fill="hold">
+                                          <p:stCondLst>
+                                            <p:cond delay="0"/>
+                                          </p:stCondLst>
+                                        </p:cTn>
+                                        <p:tgtEl>
+                                          <p:spTgt spid="4">
+                                            <p:txEl>
+                                              <p:pRg st="7" end="7"/>
+                                            </p:txEl>
+                                          </p:spTgt>
+                                        </p:tgtEl>
+                                        <p:attrNameLst>
+                                          <p:attrName>style.visibility</p:attrName>
+                                        </p:attrNameLst>
+                                      </p:cBhvr>
+                                      <p:to>
+                                        <p:strVal val="visible"/>
+                                      </p:to>
+                                    </p:set>
+                                    <p:animEffect transition="in" filter="fade">
+                                      <p:cBhvr>
+                                        <p:cTn id="27" dur="500"/>
+                                        <p:tgtEl>
+                                          <p:spTgt spid="4">
+                                            <p:txEl>
+                                              <p:pRg st="7" end="7"/>
+                                            </p:txEl>
+                                          </p:spTgt>
+                                        </p:tgtEl>
+                                      </p:cBhvr>
+                                    </p:animEffect>
+                                  </p:childTnLst>
+                                </p:cTn>
+                              </p:par>
+                              <p:par>
+                                <p:cTn id="28" presetID="10" presetClass="entr" presetSubtype="0" fill="hold" nodeType="withEffect">
+                                  <p:stCondLst>
+                                    <p:cond delay="0"/>
+                                  </p:stCondLst>
+                                  <p:childTnLst>
+                                    <p:set>
+                                      <p:cBhvr>
+                                        <p:cTn id="29" dur="1" fill="hold">
+                                          <p:stCondLst>
+                                            <p:cond delay="0"/>
+                                          </p:stCondLst>
+                                        </p:cTn>
+                                        <p:tgtEl>
+                                          <p:spTgt spid="4">
+                                            <p:txEl>
+                                              <p:pRg st="8" end="8"/>
+                                            </p:txEl>
+                                          </p:spTgt>
+                                        </p:tgtEl>
+                                        <p:attrNameLst>
+                                          <p:attrName>style.visibility</p:attrName>
+                                        </p:attrNameLst>
+                                      </p:cBhvr>
+                                      <p:to>
+                                        <p:strVal val="visible"/>
+                                      </p:to>
+                                    </p:set>
+                                    <p:animEffect transition="in" filter="fade">
+                                      <p:cBhvr>
+                                        <p:cTn id="30" dur="500"/>
+                                        <p:tgtEl>
+                                          <p:spTgt spid="4">
+                                            <p:txEl>
+                                              <p:pRg st="8" end="8"/>
+                                            </p:txEl>
+                                          </p:spTgt>
+                                        </p:tgtEl>
+                                      </p:cBhvr>
+                                    </p:animEffect>
+                                  </p:childTnLst>
+                                </p:cTn>
+                              </p:par>
+                              <p:par>
+                                <p:cTn id="31" presetID="10" presetClass="entr" presetSubtype="0" fill="hold" nodeType="withEffect">
+                                  <p:stCondLst>
+                                    <p:cond delay="0"/>
+                                  </p:stCondLst>
+                                  <p:childTnLst>
+                                    <p:set>
+                                      <p:cBhvr>
+                                        <p:cTn id="32" dur="1" fill="hold">
+                                          <p:stCondLst>
+                                            <p:cond delay="0"/>
+                                          </p:stCondLst>
+                                        </p:cTn>
+                                        <p:tgtEl>
+                                          <p:spTgt spid="4">
+                                            <p:txEl>
+                                              <p:pRg st="9" end="9"/>
+                                            </p:txEl>
+                                          </p:spTgt>
+                                        </p:tgtEl>
+                                        <p:attrNameLst>
+                                          <p:attrName>style.visibility</p:attrName>
+                                        </p:attrNameLst>
+                                      </p:cBhvr>
+                                      <p:to>
+                                        <p:strVal val="visible"/>
+                                      </p:to>
+                                    </p:set>
+                                    <p:animEffect transition="in" filter="fade">
+                                      <p:cBhvr>
+                                        <p:cTn id="33" dur="500"/>
+                                        <p:tgtEl>
+                                          <p:spTgt spid="4">
+                                            <p:txEl>
+                                              <p:pRg st="9" end="9"/>
+                                            </p:txEl>
+                                          </p:spTgt>
+                                        </p:tgtEl>
+                                      </p:cBhvr>
+                                    </p:animEffect>
+                                  </p:childTnLst>
+                                </p:cTn>
+                              </p:par>
+                              <p:par>
+                                <p:cTn id="34" presetID="10" presetClass="entr" presetSubtype="0" fill="hold" nodeType="withEffect">
+                                  <p:stCondLst>
+                                    <p:cond delay="0"/>
+                                  </p:stCondLst>
+                                  <p:childTnLst>
+                                    <p:set>
+                                      <p:cBhvr>
                                         <p:cTn id="35" dur="1" fill="hold">
                                           <p:stCondLst>
                                             <p:cond delay="0"/>
@@ -26099,153 +26415,6 @@
                                           <p:spTgt spid="4">
                                             <p:txEl>
                                               <p:pRg st="10" end="10"/>
-                                            </p:txEl>
-                                          </p:spTgt>
-                                        </p:tgtEl>
-                                      </p:cBhvr>
-                                    </p:animEffect>
-                                  </p:childTnLst>
-                                </p:cTn>
-                              </p:par>
-                              <p:par>
-                                <p:cTn id="37" presetID="10" presetClass="entr" presetSubtype="0" fill="hold" nodeType="withEffect">
-                                  <p:stCondLst>
-                                    <p:cond delay="0"/>
-                                  </p:stCondLst>
-                                  <p:childTnLst>
-                                    <p:set>
-                                      <p:cBhvr>
-                                        <p:cTn id="38" dur="1" fill="hold">
-                                          <p:stCondLst>
-                                            <p:cond delay="0"/>
-                                          </p:stCondLst>
-                                        </p:cTn>
-                                        <p:tgtEl>
-                                          <p:spTgt spid="4">
-                                            <p:txEl>
-                                              <p:pRg st="11" end="11"/>
-                                            </p:txEl>
-                                          </p:spTgt>
-                                        </p:tgtEl>
-                                        <p:attrNameLst>
-                                          <p:attrName>style.visibility</p:attrName>
-                                        </p:attrNameLst>
-                                      </p:cBhvr>
-                                      <p:to>
-                                        <p:strVal val="visible"/>
-                                      </p:to>
-                                    </p:set>
-                                    <p:animEffect transition="in" filter="fade">
-                                      <p:cBhvr>
-                                        <p:cTn id="39" dur="500"/>
-                                        <p:tgtEl>
-                                          <p:spTgt spid="4">
-                                            <p:txEl>
-                                              <p:pRg st="11" end="11"/>
-                                            </p:txEl>
-                                          </p:spTgt>
-                                        </p:tgtEl>
-                                      </p:cBhvr>
-                                    </p:animEffect>
-                                  </p:childTnLst>
-                                </p:cTn>
-                              </p:par>
-                            </p:childTnLst>
-                          </p:cTn>
-                        </p:par>
-                      </p:childTnLst>
-                    </p:cTn>
-                  </p:par>
-                  <p:par>
-                    <p:cTn id="40" fill="hold">
-                      <p:stCondLst>
-                        <p:cond delay="indefinite"/>
-                      </p:stCondLst>
-                      <p:childTnLst>
-                        <p:par>
-                          <p:cTn id="41" fill="hold">
-                            <p:stCondLst>
-                              <p:cond delay="0"/>
-                            </p:stCondLst>
-                            <p:childTnLst>
-                              <p:par>
-                                <p:cTn id="42" presetID="10" presetClass="entr" presetSubtype="0" fill="hold" nodeType="clickEffect">
-                                  <p:stCondLst>
-                                    <p:cond delay="0"/>
-                                  </p:stCondLst>
-                                  <p:childTnLst>
-                                    <p:set>
-                                      <p:cBhvr>
-                                        <p:cTn id="43" dur="1" fill="hold">
-                                          <p:stCondLst>
-                                            <p:cond delay="0"/>
-                                          </p:stCondLst>
-                                        </p:cTn>
-                                        <p:tgtEl>
-                                          <p:spTgt spid="4">
-                                            <p:txEl>
-                                              <p:pRg st="13" end="13"/>
-                                            </p:txEl>
-                                          </p:spTgt>
-                                        </p:tgtEl>
-                                        <p:attrNameLst>
-                                          <p:attrName>style.visibility</p:attrName>
-                                        </p:attrNameLst>
-                                      </p:cBhvr>
-                                      <p:to>
-                                        <p:strVal val="visible"/>
-                                      </p:to>
-                                    </p:set>
-                                    <p:animEffect transition="in" filter="fade">
-                                      <p:cBhvr>
-                                        <p:cTn id="44" dur="500"/>
-                                        <p:tgtEl>
-                                          <p:spTgt spid="4">
-                                            <p:txEl>
-                                              <p:pRg st="13" end="13"/>
-                                            </p:txEl>
-                                          </p:spTgt>
-                                        </p:tgtEl>
-                                      </p:cBhvr>
-                                    </p:animEffect>
-                                  </p:childTnLst>
-                                </p:cTn>
-                              </p:par>
-                              <p:par>
-                                <p:cTn id="45" presetID="10" presetClass="entr" presetSubtype="0" fill="hold" nodeType="withEffect">
-                                  <p:stCondLst>
-                                    <p:cond delay="0"/>
-                                  </p:stCondLst>
-                                  <p:childTnLst>
-                                    <p:set>
-                                      <p:cBhvr>
-                                        <p:cTn id="46" dur="1" fill="hold">
-                                          <p:stCondLst>
-                                            <p:cond delay="0"/>
-                                          </p:stCondLst>
-                                        </p:cTn>
-                                        <p:tgtEl>
-                                          <p:spTgt spid="4">
-                                            <p:txEl>
-                                              <p:pRg st="14" end="14"/>
-                                            </p:txEl>
-                                          </p:spTgt>
-                                        </p:tgtEl>
-                                        <p:attrNameLst>
-                                          <p:attrName>style.visibility</p:attrName>
-                                        </p:attrNameLst>
-                                      </p:cBhvr>
-                                      <p:to>
-                                        <p:strVal val="visible"/>
-                                      </p:to>
-                                    </p:set>
-                                    <p:animEffect transition="in" filter="fade">
-                                      <p:cBhvr>
-                                        <p:cTn id="47" dur="500"/>
-                                        <p:tgtEl>
-                                          <p:spTgt spid="4">
-                                            <p:txEl>
-                                              <p:pRg st="14" end="14"/>
                                             </p:txEl>
                                           </p:spTgt>
                                         </p:tgtEl>
@@ -26293,7 +26462,7 @@
         <p:cNvPr id="1" name="">
           <a:extLst>
             <a:ext uri="{FF2B5EF4-FFF2-40B4-BE49-F238E27FC236}">
-              <a16:creationId xmlns:a16="http://schemas.microsoft.com/office/drawing/2014/main" id="{CBA70B69-5567-9039-B0B5-746347E2E209}"/>
+              <a16:creationId xmlns:a16="http://schemas.microsoft.com/office/drawing/2014/main" id="{DDD80404-08E8-A528-71E4-F05493BC3936}"/>
             </a:ext>
           </a:extLst>
         </p:cNvPr>
@@ -26313,7 +26482,7 @@
           <p:cNvPr id="21" name="Title 20">
             <a:extLst>
               <a:ext uri="{FF2B5EF4-FFF2-40B4-BE49-F238E27FC236}">
-                <a16:creationId xmlns:a16="http://schemas.microsoft.com/office/drawing/2014/main" id="{4655B16C-3600-ECC3-1C80-51E8E68C69B6}"/>
+                <a16:creationId xmlns:a16="http://schemas.microsoft.com/office/drawing/2014/main" id="{0C49B100-BA72-1CA4-26AB-7F28B79B320C}"/>
               </a:ext>
             </a:extLst>
           </p:cNvPr>
@@ -26343,10 +26512,10 @@
       </p:sp>
       <p:sp>
         <p:nvSpPr>
-          <p:cNvPr id="2" name="TextBox 1">
+          <p:cNvPr id="4" name="TextBox 3">
             <a:extLst>
               <a:ext uri="{FF2B5EF4-FFF2-40B4-BE49-F238E27FC236}">
-                <a16:creationId xmlns:a16="http://schemas.microsoft.com/office/drawing/2014/main" id="{76DFBAA6-C951-58A2-AFF1-280CBDF831EC}"/>
+                <a16:creationId xmlns:a16="http://schemas.microsoft.com/office/drawing/2014/main" id="{738746DA-1BD8-0D32-6F7C-64C5DA6EBDD1}"/>
               </a:ext>
             </a:extLst>
           </p:cNvPr>
@@ -26356,7 +26525,7 @@
         <p:spPr>
           <a:xfrm>
             <a:off x="468000" y="1383618"/>
-            <a:ext cx="7560000" cy="2246769"/>
+            <a:ext cx="7560000" cy="3108543"/>
           </a:xfrm>
           <a:prstGeom prst="rect">
             <a:avLst/>
@@ -26379,7 +26548,194 @@
                   <a:schemeClr val="tx2"/>
                 </a:solidFill>
               </a:rPr>
-              <a:t>Dimensions and Themes:</a:t>
+              <a:t>XML Tag:</a:t>
+            </a:r>
+          </a:p>
+          <a:p>
+            <a:pPr lvl="1"/>
+            <a:r>
+              <a:rPr lang="en-US" sz="900" dirty="0">
+                <a:solidFill>
+                  <a:schemeClr val="tx2"/>
+                </a:solidFill>
+              </a:rPr>
+              <a:t>&lt;</a:t>
+            </a:r>
+            <a:r>
+              <a:rPr lang="en-US" sz="900" dirty="0" err="1">
+                <a:solidFill>
+                  <a:schemeClr val="tx2"/>
+                </a:solidFill>
+              </a:rPr>
+              <a:t>how_to_log</a:t>
+            </a:r>
+            <a:r>
+              <a:rPr lang="en-US" sz="900" dirty="0">
+                <a:solidFill>
+                  <a:schemeClr val="tx2"/>
+                </a:solidFill>
+              </a:rPr>
+              <a:t>&gt;3. **Never log sensitive data directly**:</a:t>
+            </a:r>
+          </a:p>
+          <a:p>
+            <a:pPr lvl="1"/>
+            <a:r>
+              <a:rPr lang="en-US" sz="900" dirty="0">
+                <a:solidFill>
+                  <a:schemeClr val="tx2"/>
+                </a:solidFill>
+              </a:rPr>
+              <a:t>   ```</a:t>
+            </a:r>
+            <a:r>
+              <a:rPr lang="en-US" sz="900" dirty="0" err="1">
+                <a:solidFill>
+                  <a:schemeClr val="tx2"/>
+                </a:solidFill>
+              </a:rPr>
+              <a:t>javascript</a:t>
+            </a:r>
+            <a:endParaRPr lang="en-US" sz="900" dirty="0">
+              <a:solidFill>
+                <a:schemeClr val="tx2"/>
+              </a:solidFill>
+            </a:endParaRPr>
+          </a:p>
+          <a:p>
+            <a:pPr lvl="1"/>
+            <a:r>
+              <a:rPr lang="en-US" sz="900" dirty="0">
+                <a:solidFill>
+                  <a:schemeClr val="tx2"/>
+                </a:solidFill>
+              </a:rPr>
+              <a:t>   // Bad</a:t>
+            </a:r>
+          </a:p>
+          <a:p>
+            <a:pPr lvl="1"/>
+            <a:r>
+              <a:rPr lang="en-US" sz="900" dirty="0">
+                <a:solidFill>
+                  <a:schemeClr val="tx2"/>
+                </a:solidFill>
+              </a:rPr>
+              <a:t>   console.log('Token:', </a:t>
+            </a:r>
+            <a:r>
+              <a:rPr lang="en-US" sz="900" dirty="0" err="1">
+                <a:solidFill>
+                  <a:schemeClr val="tx2"/>
+                </a:solidFill>
+              </a:rPr>
+              <a:t>bearerToken</a:t>
+            </a:r>
+            <a:r>
+              <a:rPr lang="en-US" sz="900" dirty="0">
+                <a:solidFill>
+                  <a:schemeClr val="tx2"/>
+                </a:solidFill>
+              </a:rPr>
+              <a:t>);</a:t>
+            </a:r>
+          </a:p>
+          <a:p>
+            <a:pPr lvl="1"/>
+            <a:r>
+              <a:rPr lang="en-US" sz="900" dirty="0">
+                <a:solidFill>
+                  <a:schemeClr val="tx2"/>
+                </a:solidFill>
+              </a:rPr>
+              <a:t>   </a:t>
+            </a:r>
+          </a:p>
+          <a:p>
+            <a:pPr lvl="1"/>
+            <a:r>
+              <a:rPr lang="en-US" sz="900" dirty="0">
+                <a:solidFill>
+                  <a:schemeClr val="tx2"/>
+                </a:solidFill>
+              </a:rPr>
+              <a:t>   // Good</a:t>
+            </a:r>
+          </a:p>
+          <a:p>
+            <a:pPr lvl="1"/>
+            <a:r>
+              <a:rPr lang="en-US" sz="900" dirty="0">
+                <a:solidFill>
+                  <a:schemeClr val="tx2"/>
+                </a:solidFill>
+              </a:rPr>
+              <a:t>   console.log('Headers:', </a:t>
+            </a:r>
+            <a:r>
+              <a:rPr lang="en-US" sz="900" dirty="0" err="1">
+                <a:solidFill>
+                  <a:schemeClr val="tx2"/>
+                </a:solidFill>
+              </a:rPr>
+              <a:t>maskSensitiveHeaders</a:t>
+            </a:r>
+            <a:r>
+              <a:rPr lang="en-US" sz="900" dirty="0">
+                <a:solidFill>
+                  <a:schemeClr val="tx2"/>
+                </a:solidFill>
+              </a:rPr>
+              <a:t>(headers));</a:t>
+            </a:r>
+          </a:p>
+          <a:p>
+            <a:pPr lvl="1"/>
+            <a:r>
+              <a:rPr lang="en-US" sz="900" dirty="0">
+                <a:solidFill>
+                  <a:schemeClr val="tx2"/>
+                </a:solidFill>
+              </a:rPr>
+              <a:t>   ```&lt;/</a:t>
+            </a:r>
+            <a:r>
+              <a:rPr lang="en-US" sz="900" dirty="0" err="1">
+                <a:solidFill>
+                  <a:schemeClr val="tx2"/>
+                </a:solidFill>
+              </a:rPr>
+              <a:t>how_to_log</a:t>
+            </a:r>
+            <a:r>
+              <a:rPr lang="en-US" sz="900" dirty="0">
+                <a:solidFill>
+                  <a:schemeClr val="tx2"/>
+                </a:solidFill>
+              </a:rPr>
+              <a:t>&gt;</a:t>
+            </a:r>
+          </a:p>
+          <a:p>
+            <a:pPr lvl="1"/>
+            <a:endParaRPr lang="en-GB" sz="1600" dirty="0">
+              <a:solidFill>
+                <a:schemeClr val="tx2"/>
+              </a:solidFill>
+            </a:endParaRPr>
+          </a:p>
+          <a:p>
+            <a:pPr marL="285750" indent="-285750">
+              <a:buFont typeface="Arial" panose="020B0604020202020204" pitchFamily="34" charset="0"/>
+              <a:buChar char="•"/>
+            </a:pPr>
+            <a:r>
+              <a:rPr lang="en-GB" sz="1600" b="1" dirty="0">
+                <a:solidFill>
+                  <a:schemeClr val="tx2"/>
+                </a:solidFill>
+              </a:rPr>
+              <a:t>Content Tag:</a:t>
             </a:r>
           </a:p>
           <a:p>
@@ -26388,23 +26744,24 @@
               <a:buChar char="•"/>
             </a:pPr>
             <a:r>
-              <a:rPr lang="en-GB" sz="1400" dirty="0">
+              <a:rPr lang="en-US" sz="1400" dirty="0">
                 <a:solidFill>
                   <a:schemeClr val="tx2"/>
                 </a:solidFill>
               </a:rPr>
-              <a:t>How to log, Sensitive-data protection (Inductive)</a:t>
-            </a:r>
-          </a:p>
-          <a:p>
-            <a:pPr lvl="1"/>
-            <a:br>
-              <a:rPr lang="en-GB" sz="1600" b="1" dirty="0">
-                <a:solidFill>
-                  <a:schemeClr val="tx2"/>
-                </a:solidFill>
-              </a:rPr>
-            </a:br>
+              <a:t>access tokens · sensitive data · console output</a:t>
+            </a:r>
+            <a:endParaRPr lang="en-GB" sz="1400" dirty="0">
+              <a:solidFill>
+                <a:schemeClr val="tx2"/>
+              </a:solidFill>
+            </a:endParaRPr>
+          </a:p>
+          <a:p>
+            <a:pPr marL="285750" indent="-285750">
+              <a:buFont typeface="Arial" panose="020B0604020202020204" pitchFamily="34" charset="0"/>
+              <a:buChar char="•"/>
+            </a:pPr>
             <a:endParaRPr lang="en-GB" sz="1600" b="1" dirty="0">
               <a:solidFill>
                 <a:schemeClr val="tx2"/>
@@ -26422,7 +26779,7 @@
                   <a:schemeClr val="tx2"/>
                 </a:solidFill>
               </a:rPr>
-              <a:t>Final Consolidated Guideline (CG-1779):</a:t>
+              <a:t>Normalised Guideline:</a:t>
             </a:r>
           </a:p>
           <a:p>
@@ -26431,47 +26788,22 @@
               <a:buChar char="•"/>
             </a:pPr>
             <a:r>
-              <a:rPr lang="en-GB" sz="1600" dirty="0">
+              <a:rPr lang="en-GB" sz="1400" dirty="0">
                 <a:solidFill>
                   <a:schemeClr val="tx2"/>
                 </a:solidFill>
               </a:rPr>
               <a:t>Never log sensitive data directly.</a:t>
             </a:r>
-          </a:p>
-          <a:p>
-            <a:pPr marL="971550" lvl="2" indent="-285750">
-              <a:buFont typeface="Arial" panose="020B0604020202020204" pitchFamily="34" charset="0"/>
-              <a:buChar char="•"/>
-            </a:pPr>
-            <a:r>
-              <a:rPr lang="en-GB" sz="1600" dirty="0">
-                <a:solidFill>
-                  <a:schemeClr val="tx2"/>
-                </a:solidFill>
-              </a:rPr>
-              <a:t>Example ER-0207</a:t>
-            </a:r>
-            <a:endParaRPr lang="en-GB" sz="1600" noProof="0" dirty="0">
+            <a:endParaRPr lang="en-GB" sz="1600" b="1" dirty="0">
               <a:solidFill>
                 <a:schemeClr val="tx2"/>
               </a:solidFill>
             </a:endParaRPr>
           </a:p>
           <a:p>
-            <a:pPr marL="628650" lvl="1" indent="-285750">
-              <a:buFont typeface="Arial" panose="020B0604020202020204" pitchFamily="34" charset="0"/>
-              <a:buChar char="•"/>
-            </a:pPr>
-            <a:endParaRPr lang="en-GB" sz="1600" noProof="0" dirty="0">
-              <a:solidFill>
-                <a:schemeClr val="tx2"/>
-              </a:solidFill>
-            </a:endParaRPr>
-          </a:p>
-          <a:p>
             <a:pPr lvl="1"/>
-            <a:endParaRPr lang="en-GB" sz="1400" noProof="0" dirty="0">
+            <a:endParaRPr lang="en-GB" sz="1600" dirty="0">
               <a:solidFill>
                 <a:schemeClr val="tx2"/>
               </a:solidFill>
@@ -26482,7 +26814,7 @@
     </p:spTree>
     <p:extLst>
       <p:ext uri="{BB962C8B-B14F-4D97-AF65-F5344CB8AC3E}">
-        <p14:creationId xmlns:p14="http://schemas.microsoft.com/office/powerpoint/2010/main" val="2117428015"/>
+        <p14:creationId xmlns:p14="http://schemas.microsoft.com/office/powerpoint/2010/main" val="2357853359"/>
       </p:ext>
     </p:extLst>
   </p:cSld>
@@ -26523,7 +26855,7 @@
                                           </p:stCondLst>
                                         </p:cTn>
                                         <p:tgtEl>
-                                          <p:spTgt spid="2">
+                                          <p:spTgt spid="4">
                                             <p:txEl>
                                               <p:pRg st="0" end="0"/>
                                             </p:txEl>
@@ -26541,7 +26873,7 @@
                                       <p:cBhvr>
                                         <p:cTn id="7" dur="500"/>
                                         <p:tgtEl>
-                                          <p:spTgt spid="2">
+                                          <p:spTgt spid="4">
                                             <p:txEl>
                                               <p:pRg st="0" end="0"/>
                                             </p:txEl>
@@ -26566,7 +26898,7 @@
                                           </p:stCondLst>
                                         </p:cTn>
                                         <p:tgtEl>
-                                          <p:spTgt spid="2">
+                                          <p:spTgt spid="4">
                                             <p:txEl>
                                               <p:pRg st="1" end="1"/>
                                             </p:txEl>
@@ -26584,9 +26916,310 @@
                                       <p:cBhvr>
                                         <p:cTn id="10" dur="500"/>
                                         <p:tgtEl>
-                                          <p:spTgt spid="2">
+                                          <p:spTgt spid="4">
                                             <p:txEl>
                                               <p:pRg st="1" end="1"/>
+                                            </p:txEl>
+                                          </p:spTgt>
+                                        </p:tgtEl>
+                                      </p:cBhvr>
+                                    </p:animEffect>
+                                  </p:childTnLst>
+                                </p:cTn>
+                              </p:par>
+                              <p:par>
+                                <p:cTn id="11" presetID="10" presetClass="entr" presetSubtype="0" fill="hold" nodeType="withEffect">
+                                  <p:stCondLst>
+                                    <p:cond delay="0"/>
+                                  </p:stCondLst>
+                                  <p:childTnLst>
+                                    <p:set>
+                                      <p:cBhvr>
+                                        <p:cTn id="12" dur="1" fill="hold">
+                                          <p:stCondLst>
+                                            <p:cond delay="0"/>
+                                          </p:stCondLst>
+                                        </p:cTn>
+                                        <p:tgtEl>
+                                          <p:spTgt spid="4">
+                                            <p:txEl>
+                                              <p:pRg st="2" end="2"/>
+                                            </p:txEl>
+                                          </p:spTgt>
+                                        </p:tgtEl>
+                                        <p:attrNameLst>
+                                          <p:attrName>style.visibility</p:attrName>
+                                        </p:attrNameLst>
+                                      </p:cBhvr>
+                                      <p:to>
+                                        <p:strVal val="visible"/>
+                                      </p:to>
+                                    </p:set>
+                                    <p:animEffect transition="in" filter="fade">
+                                      <p:cBhvr>
+                                        <p:cTn id="13" dur="500"/>
+                                        <p:tgtEl>
+                                          <p:spTgt spid="4">
+                                            <p:txEl>
+                                              <p:pRg st="2" end="2"/>
+                                            </p:txEl>
+                                          </p:spTgt>
+                                        </p:tgtEl>
+                                      </p:cBhvr>
+                                    </p:animEffect>
+                                  </p:childTnLst>
+                                </p:cTn>
+                              </p:par>
+                              <p:par>
+                                <p:cTn id="14" presetID="10" presetClass="entr" presetSubtype="0" fill="hold" nodeType="withEffect">
+                                  <p:stCondLst>
+                                    <p:cond delay="0"/>
+                                  </p:stCondLst>
+                                  <p:childTnLst>
+                                    <p:set>
+                                      <p:cBhvr>
+                                        <p:cTn id="15" dur="1" fill="hold">
+                                          <p:stCondLst>
+                                            <p:cond delay="0"/>
+                                          </p:stCondLst>
+                                        </p:cTn>
+                                        <p:tgtEl>
+                                          <p:spTgt spid="4">
+                                            <p:txEl>
+                                              <p:pRg st="3" end="3"/>
+                                            </p:txEl>
+                                          </p:spTgt>
+                                        </p:tgtEl>
+                                        <p:attrNameLst>
+                                          <p:attrName>style.visibility</p:attrName>
+                                        </p:attrNameLst>
+                                      </p:cBhvr>
+                                      <p:to>
+                                        <p:strVal val="visible"/>
+                                      </p:to>
+                                    </p:set>
+                                    <p:animEffect transition="in" filter="fade">
+                                      <p:cBhvr>
+                                        <p:cTn id="16" dur="500"/>
+                                        <p:tgtEl>
+                                          <p:spTgt spid="4">
+                                            <p:txEl>
+                                              <p:pRg st="3" end="3"/>
+                                            </p:txEl>
+                                          </p:spTgt>
+                                        </p:tgtEl>
+                                      </p:cBhvr>
+                                    </p:animEffect>
+                                  </p:childTnLst>
+                                </p:cTn>
+                              </p:par>
+                              <p:par>
+                                <p:cTn id="17" presetID="10" presetClass="entr" presetSubtype="0" fill="hold" nodeType="withEffect">
+                                  <p:stCondLst>
+                                    <p:cond delay="0"/>
+                                  </p:stCondLst>
+                                  <p:childTnLst>
+                                    <p:set>
+                                      <p:cBhvr>
+                                        <p:cTn id="18" dur="1" fill="hold">
+                                          <p:stCondLst>
+                                            <p:cond delay="0"/>
+                                          </p:stCondLst>
+                                        </p:cTn>
+                                        <p:tgtEl>
+                                          <p:spTgt spid="4">
+                                            <p:txEl>
+                                              <p:pRg st="4" end="4"/>
+                                            </p:txEl>
+                                          </p:spTgt>
+                                        </p:tgtEl>
+                                        <p:attrNameLst>
+                                          <p:attrName>style.visibility</p:attrName>
+                                        </p:attrNameLst>
+                                      </p:cBhvr>
+                                      <p:to>
+                                        <p:strVal val="visible"/>
+                                      </p:to>
+                                    </p:set>
+                                    <p:animEffect transition="in" filter="fade">
+                                      <p:cBhvr>
+                                        <p:cTn id="19" dur="500"/>
+                                        <p:tgtEl>
+                                          <p:spTgt spid="4">
+                                            <p:txEl>
+                                              <p:pRg st="4" end="4"/>
+                                            </p:txEl>
+                                          </p:spTgt>
+                                        </p:tgtEl>
+                                      </p:cBhvr>
+                                    </p:animEffect>
+                                  </p:childTnLst>
+                                </p:cTn>
+                              </p:par>
+                              <p:par>
+                                <p:cTn id="20" presetID="10" presetClass="entr" presetSubtype="0" fill="hold" nodeType="withEffect">
+                                  <p:stCondLst>
+                                    <p:cond delay="0"/>
+                                  </p:stCondLst>
+                                  <p:childTnLst>
+                                    <p:set>
+                                      <p:cBhvr>
+                                        <p:cTn id="21" dur="1" fill="hold">
+                                          <p:stCondLst>
+                                            <p:cond delay="0"/>
+                                          </p:stCondLst>
+                                        </p:cTn>
+                                        <p:tgtEl>
+                                          <p:spTgt spid="4">
+                                            <p:txEl>
+                                              <p:pRg st="5" end="5"/>
+                                            </p:txEl>
+                                          </p:spTgt>
+                                        </p:tgtEl>
+                                        <p:attrNameLst>
+                                          <p:attrName>style.visibility</p:attrName>
+                                        </p:attrNameLst>
+                                      </p:cBhvr>
+                                      <p:to>
+                                        <p:strVal val="visible"/>
+                                      </p:to>
+                                    </p:set>
+                                    <p:animEffect transition="in" filter="fade">
+                                      <p:cBhvr>
+                                        <p:cTn id="22" dur="500"/>
+                                        <p:tgtEl>
+                                          <p:spTgt spid="4">
+                                            <p:txEl>
+                                              <p:pRg st="5" end="5"/>
+                                            </p:txEl>
+                                          </p:spTgt>
+                                        </p:tgtEl>
+                                      </p:cBhvr>
+                                    </p:animEffect>
+                                  </p:childTnLst>
+                                </p:cTn>
+                              </p:par>
+                              <p:par>
+                                <p:cTn id="23" presetID="10" presetClass="entr" presetSubtype="0" fill="hold" nodeType="withEffect">
+                                  <p:stCondLst>
+                                    <p:cond delay="0"/>
+                                  </p:stCondLst>
+                                  <p:childTnLst>
+                                    <p:set>
+                                      <p:cBhvr>
+                                        <p:cTn id="24" dur="1" fill="hold">
+                                          <p:stCondLst>
+                                            <p:cond delay="0"/>
+                                          </p:stCondLst>
+                                        </p:cTn>
+                                        <p:tgtEl>
+                                          <p:spTgt spid="4">
+                                            <p:txEl>
+                                              <p:pRg st="6" end="6"/>
+                                            </p:txEl>
+                                          </p:spTgt>
+                                        </p:tgtEl>
+                                        <p:attrNameLst>
+                                          <p:attrName>style.visibility</p:attrName>
+                                        </p:attrNameLst>
+                                      </p:cBhvr>
+                                      <p:to>
+                                        <p:strVal val="visible"/>
+                                      </p:to>
+                                    </p:set>
+                                    <p:animEffect transition="in" filter="fade">
+                                      <p:cBhvr>
+                                        <p:cTn id="25" dur="500"/>
+                                        <p:tgtEl>
+                                          <p:spTgt spid="4">
+                                            <p:txEl>
+                                              <p:pRg st="6" end="6"/>
+                                            </p:txEl>
+                                          </p:spTgt>
+                                        </p:tgtEl>
+                                      </p:cBhvr>
+                                    </p:animEffect>
+                                  </p:childTnLst>
+                                </p:cTn>
+                              </p:par>
+                              <p:par>
+                                <p:cTn id="26" presetID="10" presetClass="entr" presetSubtype="0" fill="hold" nodeType="withEffect">
+                                  <p:stCondLst>
+                                    <p:cond delay="0"/>
+                                  </p:stCondLst>
+                                  <p:childTnLst>
+                                    <p:set>
+                                      <p:cBhvr>
+                                        <p:cTn id="27" dur="1" fill="hold">
+                                          <p:stCondLst>
+                                            <p:cond delay="0"/>
+                                          </p:stCondLst>
+                                        </p:cTn>
+                                        <p:tgtEl>
+                                          <p:spTgt spid="4">
+                                            <p:txEl>
+                                              <p:pRg st="7" end="7"/>
+                                            </p:txEl>
+                                          </p:spTgt>
+                                        </p:tgtEl>
+                                        <p:attrNameLst>
+                                          <p:attrName>style.visibility</p:attrName>
+                                        </p:attrNameLst>
+                                      </p:cBhvr>
+                                      <p:to>
+                                        <p:strVal val="visible"/>
+                                      </p:to>
+                                    </p:set>
+                                    <p:animEffect transition="in" filter="fade">
+                                      <p:cBhvr>
+                                        <p:cTn id="28" dur="500"/>
+                                        <p:tgtEl>
+                                          <p:spTgt spid="4">
+                                            <p:txEl>
+                                              <p:pRg st="7" end="7"/>
+                                            </p:txEl>
+                                          </p:spTgt>
+                                        </p:tgtEl>
+                                      </p:cBhvr>
+                                    </p:animEffect>
+                                  </p:childTnLst>
+                                </p:cTn>
+                              </p:par>
+                              <p:par>
+                                <p:cTn id="29" presetID="10" presetClass="entr" presetSubtype="0" fill="hold" nodeType="withEffect">
+                                  <p:stCondLst>
+                                    <p:cond delay="0"/>
+                                  </p:stCondLst>
+                                  <p:childTnLst>
+                                    <p:set>
+                                      <p:cBhvr>
+                                        <p:cTn id="30" dur="1" fill="hold">
+                                          <p:stCondLst>
+                                            <p:cond delay="0"/>
+                                          </p:stCondLst>
+                                        </p:cTn>
+                                        <p:tgtEl>
+                                          <p:spTgt spid="4">
+                                            <p:txEl>
+                                              <p:pRg st="8" end="8"/>
+                                            </p:txEl>
+                                          </p:spTgt>
+                                        </p:tgtEl>
+                                        <p:attrNameLst>
+                                          <p:attrName>style.visibility</p:attrName>
+                                        </p:attrNameLst>
+                                      </p:cBhvr>
+                                      <p:to>
+                                        <p:strVal val="visible"/>
+                                      </p:to>
+                                    </p:set>
+                                    <p:animEffect transition="in" filter="fade">
+                                      <p:cBhvr>
+                                        <p:cTn id="31" dur="500"/>
+                                        <p:tgtEl>
+                                          <p:spTgt spid="4">
+                                            <p:txEl>
+                                              <p:pRg st="8" end="8"/>
                                             </p:txEl>
                                           </p:spTgt>
                                         </p:tgtEl>
@@ -26602,34 +27235,34 @@
                     </p:cTn>
                   </p:par>
                   <p:par>
-                    <p:cTn id="11" fill="hold">
+                    <p:cTn id="32" fill="hold">
                       <p:stCondLst>
                         <p:cond delay="indefinite"/>
                       </p:stCondLst>
                       <p:childTnLst>
                         <p:par>
-                          <p:cTn id="12" fill="hold">
+                          <p:cTn id="33" fill="hold">
                             <p:stCondLst>
                               <p:cond delay="0"/>
                             </p:stCondLst>
                             <p:childTnLst>
                               <p:par>
-                                <p:cTn id="13" presetID="10" presetClass="entr" presetSubtype="0" fill="hold" nodeType="clickEffect">
+                                <p:cTn id="34" presetID="10" presetClass="entr" presetSubtype="0" fill="hold" nodeType="clickEffect">
                                   <p:stCondLst>
                                     <p:cond delay="0"/>
                                   </p:stCondLst>
                                   <p:childTnLst>
                                     <p:set>
                                       <p:cBhvr>
-                                        <p:cTn id="14" dur="1" fill="hold">
+                                        <p:cTn id="35" dur="1" fill="hold">
                                           <p:stCondLst>
                                             <p:cond delay="0"/>
                                           </p:stCondLst>
                                         </p:cTn>
                                         <p:tgtEl>
-                                          <p:spTgt spid="2">
-                                            <p:txEl>
-                                              <p:pRg st="3" end="3"/>
+                                          <p:spTgt spid="4">
+                                            <p:txEl>
+                                              <p:pRg st="10" end="10"/>
                                             </p:txEl>
                                           </p:spTgt>
                                         </p:tgtEl>
@@ -26643,11 +27276,11 @@
                                     </p:set>
                                     <p:animEffect transition="in" filter="fade">
                                       <p:cBhvr>
-                                        <p:cTn id="15" dur="500"/>
-                                        <p:tgtEl>
-                                          <p:spTgt spid="2">
-                                            <p:txEl>
-                                              <p:pRg st="3" end="3"/>
+                                        <p:cTn id="36" dur="500"/>
+                                        <p:tgtEl>
+                                          <p:spTgt spid="4">
+                                            <p:txEl>
+                                              <p:pRg st="10" end="10"/>
                                             </p:txEl>
                                           </p:spTgt>
                                         </p:tgtEl>
@@ -26657,22 +27290,22 @@
                                 </p:cTn>
                               </p:par>
                               <p:par>
-                                <p:cTn id="16" presetID="10" presetClass="entr" presetSubtype="0" fill="hold" nodeType="withEffect">
+                                <p:cTn id="37" presetID="10" presetClass="entr" presetSubtype="0" fill="hold" nodeType="withEffect">
                                   <p:stCondLst>
                                     <p:cond delay="0"/>
                                   </p:stCondLst>
                                   <p:childTnLst>
                                     <p:set>
                                       <p:cBhvr>
-                                        <p:cTn id="17" dur="1" fill="hold">
+                                        <p:cTn id="38" dur="1" fill="hold">
                                           <p:stCondLst>
                                             <p:cond delay="0"/>
                                           </p:stCondLst>
                                         </p:cTn>
                                         <p:tgtEl>
-                                          <p:spTgt spid="2">
-                                            <p:txEl>
-                                              <p:pRg st="4" end="4"/>
+                                          <p:spTgt spid="4">
+                                            <p:txEl>
+                                              <p:pRg st="11" end="11"/>
                                             </p:txEl>
                                           </p:spTgt>
                                         </p:tgtEl>
@@ -26686,11 +27319,72 @@
                                     </p:set>
                                     <p:animEffect transition="in" filter="fade">
                                       <p:cBhvr>
-                                        <p:cTn id="18" dur="500"/>
-                                        <p:tgtEl>
-                                          <p:spTgt spid="2">
-                                            <p:txEl>
-                                              <p:pRg st="4" end="4"/>
+                                        <p:cTn id="39" dur="500"/>
+                                        <p:tgtEl>
+                                          <p:spTgt spid="4">
+                                            <p:txEl>
+                                              <p:pRg st="11" end="11"/>
+                                            </p:txEl>
+                                          </p:spTgt>
+                                        </p:tgtEl>
+                                      </p:cBhvr>
+                                    </p:animEffect>
+                                  </p:childTnLst>
+                                </p:cTn>
+                              </p:par>
+                            </p:childTnLst>
+                          </p:cTn>
+                        </p:par>
+                      </p:childTnLst>
+                    </p:cTn>
+                  </p:par>
+                  <p:par>
+                    <p:cTn id="40" fill="hold">
+                      <p:stCondLst>
+                        <p:cond delay="indefinite"/>
+                      </p:stCondLst>
+                      <p:childTnLst>
+                        <p:par>
+                          <p:cTn id="41" fill="hold">
+                            <p:stCondLst>
+                              <p:cond delay="0"/>
+                            </p:stCondLst>
+                            <p:childTnLst>
+                              <p:par>
+                                <p:cTn id="42" presetID="10" presetClass="entr" presetSubtype="0" fill="hold" nodeType="clickEffect">
+                                  <p:stCondLst>
+                                    <p:cond delay="0"/>
+                                  </p:stCondLst>
+                                  <p:childTnLst>
+                                    <p:set>
+                                      <p:cBhvr>
+                                        <p:cTn id="43" dur="1" fill="hold">
+                                          <p:stCondLst>
+                                            <p:cond delay="0"/>
+                                          </p:stCondLst>
+                                        </p:cTn>
+                                        <p:tgtEl>
+                                          <p:spTgt spid="4">
+                                            <p:txEl>
+                                              <p:pRg st="13" end="13"/>
+                                            </p:txEl>
+                                          </p:spTgt>
+                                        </p:tgtEl>
+                                        <p:attrNameLst>
+                                          <p:attrName>style.visibility</p:attrName>
+                                        </p:attrNameLst>
+                                      </p:cBhvr>
+                                      <p:to>
+                                        <p:strVal val="visible"/>
+                                      </p:to>
+                                    </p:set>
+                                    <p:animEffect transition="in" filter="fade">
+                                      <p:cBhvr>
+                                        <p:cTn id="44" dur="500"/>
+                                        <p:tgtEl>
+                                          <p:spTgt spid="4">
+                                            <p:txEl>
+                                              <p:pRg st="13" end="13"/>
                                             </p:txEl>
                                           </p:spTgt>
                                         </p:tgtEl>
@@ -26700,22 +27394,22 @@
                                 </p:cTn>
                               </p:par>
                               <p:par>
-                                <p:cTn id="19" presetID="10" presetClass="entr" presetSubtype="0" fill="hold" nodeType="withEffect">
+                                <p:cTn id="45" presetID="10" presetClass="entr" presetSubtype="0" fill="hold" nodeType="withEffect">
                                   <p:stCondLst>
                                     <p:cond delay="0"/>
                                   </p:stCondLst>
                                   <p:childTnLst>
                                     <p:set>
                                       <p:cBhvr>
-                                        <p:cTn id="20" dur="1" fill="hold">
+                                        <p:cTn id="46" dur="1" fill="hold">
                                           <p:stCondLst>
                                             <p:cond delay="0"/>
                                           </p:stCondLst>
                                         </p:cTn>
                                         <p:tgtEl>
-                                          <p:spTgt spid="2">
-                                            <p:txEl>
-                                              <p:pRg st="5" end="5"/>
+                                          <p:spTgt spid="4">
+                                            <p:txEl>
+                                              <p:pRg st="14" end="14"/>
                                             </p:txEl>
                                           </p:spTgt>
                                         </p:tgtEl>
@@ -26729,11 +27423,11 @@
                                     </p:set>
                                     <p:animEffect transition="in" filter="fade">
                                       <p:cBhvr>
-                                        <p:cTn id="21" dur="500"/>
-                                        <p:tgtEl>
-                                          <p:spTgt spid="2">
-                                            <p:txEl>
-                                              <p:pRg st="5" end="5"/>
+                                        <p:cTn id="47" dur="500"/>
+                                        <p:tgtEl>
+                                          <p:spTgt spid="4">
+                                            <p:txEl>
+                                              <p:pRg st="14" end="14"/>
                                             </p:txEl>
                                           </p:spTgt>
                                         </p:tgtEl>
@@ -26781,7 +27475,7 @@
         <p:cNvPr id="1" name="">
           <a:extLst>
             <a:ext uri="{FF2B5EF4-FFF2-40B4-BE49-F238E27FC236}">
-              <a16:creationId xmlns:a16="http://schemas.microsoft.com/office/drawing/2014/main" id="{69DE8081-B879-E9A4-ED5E-FAB62A98A98D}"/>
+              <a16:creationId xmlns:a16="http://schemas.microsoft.com/office/drawing/2014/main" id="{CBA70B69-5567-9039-B0B5-746347E2E209}"/>
             </a:ext>
           </a:extLst>
         </p:cNvPr>
@@ -26798,10 +27492,10 @@
       </p:grpSpPr>
       <p:sp>
         <p:nvSpPr>
-          <p:cNvPr id="2" name="Title 1">
+          <p:cNvPr id="21" name="Title 20">
             <a:extLst>
               <a:ext uri="{FF2B5EF4-FFF2-40B4-BE49-F238E27FC236}">
-                <a16:creationId xmlns:a16="http://schemas.microsoft.com/office/drawing/2014/main" id="{583EFA73-C3E5-61F2-E8C0-2AFFA1C6B243}"/>
+                <a16:creationId xmlns:a16="http://schemas.microsoft.com/office/drawing/2014/main" id="{4655B16C-3600-ECC3-1C80-51E8E68C69B6}"/>
               </a:ext>
             </a:extLst>
           </p:cNvPr>
@@ -26818,23 +27512,23 @@
           <a:lstStyle/>
           <a:p>
             <a:r>
-              <a:rPr lang="en-GB" sz="2600" noProof="0" dirty="0">
+              <a:rPr lang="en-GB" sz="2800" dirty="0">
                 <a:solidFill>
                   <a:srgbClr val="0B365B"/>
                 </a:solidFill>
-                <a:latin typeface="Arial"/>
-              </a:rPr>
-              <a:t>Discussion: Interpretation of Findings</a:t>
-            </a:r>
+              </a:rPr>
+              <a:t>Example</a:t>
+            </a:r>
+            <a:endParaRPr lang="en-US" dirty="0"/>
           </a:p>
         </p:txBody>
       </p:sp>
       <p:sp>
         <p:nvSpPr>
-          <p:cNvPr id="9" name="TextBox 8">
+          <p:cNvPr id="2" name="TextBox 1">
             <a:extLst>
               <a:ext uri="{FF2B5EF4-FFF2-40B4-BE49-F238E27FC236}">
-                <a16:creationId xmlns:a16="http://schemas.microsoft.com/office/drawing/2014/main" id="{D4098378-6CB8-E741-E925-973D8A6B0C1A}"/>
+                <a16:creationId xmlns:a16="http://schemas.microsoft.com/office/drawing/2014/main" id="{76DFBAA6-C951-58A2-AFF1-280CBDF831EC}"/>
               </a:ext>
             </a:extLst>
           </p:cNvPr>
@@ -26844,7 +27538,7 @@
         <p:spPr>
           <a:xfrm>
             <a:off x="468000" y="1383618"/>
-            <a:ext cx="7560000" cy="3185487"/>
+            <a:ext cx="7560000" cy="2246769"/>
           </a:xfrm>
           <a:prstGeom prst="rect">
             <a:avLst/>
@@ -26858,171 +27552,110 @@
           <a:lstStyle/>
           <a:p>
             <a:pPr marL="285750" indent="-285750">
-              <a:spcAft>
-                <a:spcPts val="300"/>
-              </a:spcAft>
               <a:buFont typeface="Arial" panose="020B0604020202020204" pitchFamily="34" charset="0"/>
               <a:buChar char="•"/>
             </a:pPr>
             <a:r>
-              <a:rPr lang="en-GB" sz="1600" dirty="0">
-                <a:solidFill>
-                  <a:srgbClr val="0B365B"/>
-                </a:solidFill>
-              </a:rPr>
-              <a:t>Developer logging decisions &amp; challenges</a:t>
-            </a:r>
-          </a:p>
-          <a:p>
-            <a:pPr marL="285750" indent="-285750">
-              <a:spcAft>
-                <a:spcPts val="300"/>
-              </a:spcAft>
+              <a:rPr lang="en-GB" sz="1600" b="1" dirty="0">
+                <a:solidFill>
+                  <a:schemeClr val="tx2"/>
+                </a:solidFill>
+              </a:rPr>
+              <a:t>Dimensions and Themes:</a:t>
+            </a:r>
+          </a:p>
+          <a:p>
+            <a:pPr marL="628650" lvl="1" indent="-285750">
               <a:buFont typeface="Arial" panose="020B0604020202020204" pitchFamily="34" charset="0"/>
               <a:buChar char="•"/>
             </a:pPr>
-            <a:endParaRPr lang="en-GB" sz="1600" dirty="0">
+            <a:r>
+              <a:rPr lang="en-GB" sz="1400" dirty="0">
+                <a:solidFill>
+                  <a:schemeClr val="tx2"/>
+                </a:solidFill>
+              </a:rPr>
+              <a:t>How to log, Sensitive-data protection (Inductive)</a:t>
+            </a:r>
+          </a:p>
+          <a:p>
+            <a:pPr lvl="1"/>
+            <a:br>
+              <a:rPr lang="en-GB" sz="1600" b="1" dirty="0">
+                <a:solidFill>
+                  <a:schemeClr val="tx2"/>
+                </a:solidFill>
+              </a:rPr>
+            </a:br>
+            <a:endParaRPr lang="en-GB" sz="1600" b="1" dirty="0">
               <a:solidFill>
-                <a:srgbClr val="0B365B"/>
+                <a:schemeClr val="tx2"/>
               </a:solidFill>
             </a:endParaRPr>
           </a:p>
           <a:p>
             <a:pPr marL="285750" indent="-285750">
-              <a:spcAft>
-                <a:spcPts val="300"/>
-              </a:spcAft>
               <a:buFont typeface="Arial" panose="020B0604020202020204" pitchFamily="34" charset="0"/>
               <a:buChar char="•"/>
             </a:pPr>
             <a:r>
-              <a:rPr lang="en-GB" sz="1600" dirty="0">
-                <a:solidFill>
-                  <a:srgbClr val="0B365B"/>
-                </a:solidFill>
-              </a:rPr>
-              <a:t>Academic recommendations in collected guidance</a:t>
-            </a:r>
-          </a:p>
-          <a:p>
-            <a:pPr marL="285750" indent="-285750">
-              <a:spcAft>
-                <a:spcPts val="300"/>
-              </a:spcAft>
+              <a:rPr lang="en-GB" sz="1600" b="1" dirty="0">
+                <a:solidFill>
+                  <a:schemeClr val="tx2"/>
+                </a:solidFill>
+              </a:rPr>
+              <a:t>Final Consolidated Guideline (CG-1779):</a:t>
+            </a:r>
+          </a:p>
+          <a:p>
+            <a:pPr marL="628650" lvl="1" indent="-285750">
               <a:buFont typeface="Arial" panose="020B0604020202020204" pitchFamily="34" charset="0"/>
               <a:buChar char="•"/>
             </a:pPr>
-            <a:endParaRPr lang="en-GB" sz="1600" dirty="0">
-              <a:solidFill>
-                <a:srgbClr val="0B365B"/>
-              </a:solidFill>
-            </a:endParaRPr>
-          </a:p>
-          <a:p>
-            <a:pPr marL="285750" indent="-285750">
-              <a:spcAft>
-                <a:spcPts val="300"/>
-              </a:spcAft>
+            <a:r>
+              <a:rPr lang="en-GB" sz="1600" dirty="0">
+                <a:solidFill>
+                  <a:schemeClr val="tx2"/>
+                </a:solidFill>
+              </a:rPr>
+              <a:t>Never log sensitive data directly.</a:t>
+            </a:r>
+          </a:p>
+          <a:p>
+            <a:pPr marL="971550" lvl="2" indent="-285750">
               <a:buFont typeface="Arial" panose="020B0604020202020204" pitchFamily="34" charset="0"/>
               <a:buChar char="•"/>
             </a:pPr>
             <a:r>
               <a:rPr lang="en-GB" sz="1600" dirty="0">
                 <a:solidFill>
-                  <a:srgbClr val="0B365B"/>
-                </a:solidFill>
-              </a:rPr>
-              <a:t>Initial deductive codebook not complete</a:t>
-            </a:r>
-          </a:p>
-          <a:p>
-            <a:pPr marL="285750" indent="-285750">
-              <a:spcAft>
-                <a:spcPts val="300"/>
-              </a:spcAft>
+                  <a:schemeClr val="tx2"/>
+                </a:solidFill>
+              </a:rPr>
+              <a:t>Example ER-0207</a:t>
+            </a:r>
+            <a:endParaRPr lang="en-GB" sz="1600" noProof="0" dirty="0">
+              <a:solidFill>
+                <a:schemeClr val="tx2"/>
+              </a:solidFill>
+            </a:endParaRPr>
+          </a:p>
+          <a:p>
+            <a:pPr marL="628650" lvl="1" indent="-285750">
               <a:buFont typeface="Arial" panose="020B0604020202020204" pitchFamily="34" charset="0"/>
               <a:buChar char="•"/>
             </a:pPr>
-            <a:endParaRPr lang="en-GB" sz="1600" dirty="0">
+            <a:endParaRPr lang="en-GB" sz="1600" noProof="0" dirty="0">
               <a:solidFill>
-                <a:srgbClr val="0B365B"/>
+                <a:schemeClr val="tx2"/>
               </a:solidFill>
             </a:endParaRPr>
           </a:p>
           <a:p>
-            <a:pPr marL="285750" indent="-285750">
-              <a:spcAft>
-                <a:spcPts val="300"/>
-              </a:spcAft>
-              <a:buFont typeface="Arial" panose="020B0604020202020204" pitchFamily="34" charset="0"/>
-              <a:buChar char="•"/>
-            </a:pPr>
-            <a:r>
-              <a:rPr lang="en-GB" sz="1600" dirty="0">
-                <a:solidFill>
-                  <a:srgbClr val="0B365B"/>
-                </a:solidFill>
-              </a:rPr>
-              <a:t>Frequency indicates occurrence not guideline quality</a:t>
-            </a:r>
-          </a:p>
-          <a:p>
-            <a:pPr marL="285750" indent="-285750">
-              <a:spcAft>
-                <a:spcPts val="300"/>
-              </a:spcAft>
-              <a:buFont typeface="Arial" panose="020B0604020202020204" pitchFamily="34" charset="0"/>
-              <a:buChar char="•"/>
-            </a:pPr>
-            <a:endParaRPr lang="en-GB" sz="1600" dirty="0">
+            <a:pPr lvl="1"/>
+            <a:endParaRPr lang="en-GB" sz="1400" noProof="0" dirty="0">
               <a:solidFill>
-                <a:srgbClr val="0B365B"/>
-              </a:solidFill>
-            </a:endParaRPr>
-          </a:p>
-          <a:p>
-            <a:pPr marL="285750" indent="-285750">
-              <a:spcAft>
-                <a:spcPts val="300"/>
-              </a:spcAft>
-              <a:buFont typeface="Arial" panose="020B0604020202020204" pitchFamily="34" charset="0"/>
-              <a:buChar char="•"/>
-            </a:pPr>
-            <a:r>
-              <a:rPr lang="en-US" sz="1600" dirty="0">
-                <a:solidFill>
-                  <a:srgbClr val="0B365B"/>
-                </a:solidFill>
-              </a:rPr>
-              <a:t>Specific guideline meaning preserved beyond themes</a:t>
-            </a:r>
-            <a:endParaRPr lang="en-GB" sz="1600" dirty="0">
-              <a:solidFill>
-                <a:srgbClr val="0B365B"/>
-              </a:solidFill>
-            </a:endParaRPr>
-          </a:p>
-          <a:p>
-            <a:pPr>
-              <a:spcAft>
-                <a:spcPts val="300"/>
-              </a:spcAft>
-            </a:pPr>
-            <a:endParaRPr lang="en-GB" sz="1600" dirty="0">
-              <a:solidFill>
-                <a:srgbClr val="0B365B"/>
-              </a:solidFill>
-            </a:endParaRPr>
-          </a:p>
-          <a:p>
-            <a:pPr>
-              <a:spcAft>
-                <a:spcPts val="300"/>
-              </a:spcAft>
-            </a:pPr>
-            <a:endParaRPr lang="en-GB" sz="1600" dirty="0">
-              <a:solidFill>
-                <a:srgbClr val="0B365B"/>
+                <a:schemeClr val="tx2"/>
               </a:solidFill>
             </a:endParaRPr>
           </a:p>
@@ -27031,7 +27664,7 @@
     </p:spTree>
     <p:extLst>
       <p:ext uri="{BB962C8B-B14F-4D97-AF65-F5344CB8AC3E}">
-        <p14:creationId xmlns:p14="http://schemas.microsoft.com/office/powerpoint/2010/main" val="2240041382"/>
+        <p14:creationId xmlns:p14="http://schemas.microsoft.com/office/powerpoint/2010/main" val="2117428015"/>
       </p:ext>
     </p:extLst>
   </p:cSld>
@@ -27072,7 +27705,7 @@
                                           </p:stCondLst>
                                         </p:cTn>
                                         <p:tgtEl>
-                                          <p:spTgt spid="9">
+                                          <p:spTgt spid="2">
                                             <p:txEl>
                                               <p:pRg st="0" end="0"/>
                                             </p:txEl>
@@ -27090,9 +27723,52 @@
                                       <p:cBhvr>
                                         <p:cTn id="7" dur="500"/>
                                         <p:tgtEl>
-                                          <p:spTgt spid="9">
+                                          <p:spTgt spid="2">
                                             <p:txEl>
                                               <p:pRg st="0" end="0"/>
+                                            </p:txEl>
+                                          </p:spTgt>
+                                        </p:tgtEl>
+                                      </p:cBhvr>
+                                    </p:animEffect>
+                                  </p:childTnLst>
+                                </p:cTn>
+                              </p:par>
+                              <p:par>
+                                <p:cTn id="8" presetID="10" presetClass="entr" presetSubtype="0" fill="hold" nodeType="withEffect">
+                                  <p:stCondLst>
+                                    <p:cond delay="0"/>
+                                  </p:stCondLst>
+                                  <p:childTnLst>
+                                    <p:set>
+                                      <p:cBhvr>
+                                        <p:cTn id="9" dur="1" fill="hold">
+                                          <p:stCondLst>
+                                            <p:cond delay="0"/>
+                                          </p:stCondLst>
+                                        </p:cTn>
+                                        <p:tgtEl>
+                                          <p:spTgt spid="2">
+                                            <p:txEl>
+                                              <p:pRg st="1" end="1"/>
+                                            </p:txEl>
+                                          </p:spTgt>
+                                        </p:tgtEl>
+                                        <p:attrNameLst>
+                                          <p:attrName>style.visibility</p:attrName>
+                                        </p:attrNameLst>
+                                      </p:cBhvr>
+                                      <p:to>
+                                        <p:strVal val="visible"/>
+                                      </p:to>
+                                    </p:set>
+                                    <p:animEffect transition="in" filter="fade">
+                                      <p:cBhvr>
+                                        <p:cTn id="10" dur="500"/>
+                                        <p:tgtEl>
+                                          <p:spTgt spid="2">
+                                            <p:txEl>
+                                              <p:pRg st="1" end="1"/>
                                             </p:txEl>
                                           </p:spTgt>
                                         </p:tgtEl>
@@ -27108,34 +27784,34 @@
                     </p:cTn>
                   </p:par>
                   <p:par>
-                    <p:cTn id="8" fill="hold">
+                    <p:cTn id="11" fill="hold">
                       <p:stCondLst>
                         <p:cond delay="indefinite"/>
                       </p:stCondLst>
                       <p:childTnLst>
                         <p:par>
-                          <p:cTn id="9" fill="hold">
+                          <p:cTn id="12" fill="hold">
                             <p:stCondLst>
                               <p:cond delay="0"/>
                             </p:stCondLst>
                             <p:childTnLst>
                               <p:par>
-                                <p:cTn id="10" presetID="10" presetClass="entr" presetSubtype="0" fill="hold" nodeType="clickEffect">
+                                <p:cTn id="13" presetID="10" presetClass="entr" presetSubtype="0" fill="hold" nodeType="clickEffect">
                                   <p:stCondLst>
                                     <p:cond delay="0"/>
                                   </p:stCondLst>
                                   <p:childTnLst>
                                     <p:set>
                                       <p:cBhvr>
-                                        <p:cTn id="11" dur="1" fill="hold">
+                                        <p:cTn id="14" dur="1" fill="hold">
                                           <p:stCondLst>
                                             <p:cond delay="0"/>
                                           </p:stCondLst>
                                         </p:cTn>
                                         <p:tgtEl>
-                                          <p:spTgt spid="9">
-                                            <p:txEl>
-                                              <p:pRg st="2" end="2"/>
+                                          <p:spTgt spid="2">
+                                            <p:txEl>
+                                              <p:pRg st="3" end="3"/>
                                             </p:txEl>
                                           </p:spTgt>
                                         </p:tgtEl>
@@ -27149,11 +27825,11 @@
                                     </p:set>
                                     <p:animEffect transition="in" filter="fade">
                                       <p:cBhvr>
-                                        <p:cTn id="12" dur="500"/>
-                                        <p:tgtEl>
-                                          <p:spTgt spid="9">
-                                            <p:txEl>
-                                              <p:pRg st="2" end="2"/>
+                                        <p:cTn id="15" dur="500"/>
+                                        <p:tgtEl>
+                                          <p:spTgt spid="2">
+                                            <p:txEl>
+                                              <p:pRg st="3" end="3"/>
                                             </p:txEl>
                                           </p:spTgt>
                                         </p:tgtEl>
@@ -27162,39 +27838,21 @@
                                   </p:childTnLst>
                                 </p:cTn>
                               </p:par>
-                            </p:childTnLst>
-                          </p:cTn>
-                        </p:par>
-                      </p:childTnLst>
-                    </p:cTn>
-                  </p:par>
-                  <p:par>
-                    <p:cTn id="13" fill="hold">
-                      <p:stCondLst>
-                        <p:cond delay="indefinite"/>
-                      </p:stCondLst>
-                      <p:childTnLst>
-                        <p:par>
-                          <p:cTn id="14" fill="hold">
-                            <p:stCondLst>
-                              <p:cond delay="0"/>
-                            </p:stCondLst>
-                            <p:childTnLst>
                               <p:par>
-                                <p:cTn id="15" presetID="10" presetClass="entr" presetSubtype="0" fill="hold" nodeType="clickEffect">
+                                <p:cTn id="16" presetID="10" presetClass="entr" presetSubtype="0" fill="hold" nodeType="withEffect">
                                   <p:stCondLst>
                                     <p:cond delay="0"/>
                                   </p:stCondLst>
                                   <p:childTnLst>
                                     <p:set>
                                       <p:cBhvr>
-                                        <p:cTn id="16" dur="1" fill="hold">
+                                        <p:cTn id="17" dur="1" fill="hold">
                                           <p:stCondLst>
                                             <p:cond delay="0"/>
                                           </p:stCondLst>
                                         </p:cTn>
                                         <p:tgtEl>
-                                          <p:spTgt spid="9">
+                                          <p:spTgt spid="2">
                                             <p:txEl>
                                               <p:pRg st="4" end="4"/>
                                             </p:txEl>
@@ -27210,9 +27868,9 @@
                                     </p:set>
                                     <p:animEffect transition="in" filter="fade">
                                       <p:cBhvr>
-                                        <p:cTn id="17" dur="500"/>
-                                        <p:tgtEl>
-                                          <p:spTgt spid="9">
+                                        <p:cTn id="18" dur="500"/>
+                                        <p:tgtEl>
+                                          <p:spTgt spid="2">
                                             <p:txEl>
                                               <p:pRg st="4" end="4"/>
                                             </p:txEl>
@@ -27223,41 +27881,23 @@
                                   </p:childTnLst>
                                 </p:cTn>
                               </p:par>
-                            </p:childTnLst>
-                          </p:cTn>
-                        </p:par>
-                      </p:childTnLst>
-                    </p:cTn>
-                  </p:par>
-                  <p:par>
-                    <p:cTn id="18" fill="hold">
-                      <p:stCondLst>
-                        <p:cond delay="indefinite"/>
-                      </p:stCondLst>
-                      <p:childTnLst>
-                        <p:par>
-                          <p:cTn id="19" fill="hold">
-                            <p:stCondLst>
-                              <p:cond delay="0"/>
-                            </p:stCondLst>
-                            <p:childTnLst>
                               <p:par>
-                                <p:cTn id="20" presetID="10" presetClass="entr" presetSubtype="0" fill="hold" nodeType="clickEffect">
+                                <p:cTn id="19" presetID="10" presetClass="entr" presetSubtype="0" fill="hold" nodeType="withEffect">
                                   <p:stCondLst>
                                     <p:cond delay="0"/>
                                   </p:stCondLst>
                                   <p:childTnLst>
                                     <p:set>
                                       <p:cBhvr>
-                                        <p:cTn id="21" dur="1" fill="hold">
+                                        <p:cTn id="20" dur="1" fill="hold">
                                           <p:stCondLst>
                                             <p:cond delay="0"/>
                                           </p:stCondLst>
                                         </p:cTn>
                                         <p:tgtEl>
-                                          <p:spTgt spid="9">
-                                            <p:txEl>
-                                              <p:pRg st="6" end="6"/>
+                                          <p:spTgt spid="2">
+                                            <p:txEl>
+                                              <p:pRg st="5" end="5"/>
                                             </p:txEl>
                                           </p:spTgt>
                                         </p:tgtEl>
@@ -27271,72 +27911,11 @@
                                     </p:set>
                                     <p:animEffect transition="in" filter="fade">
                                       <p:cBhvr>
-                                        <p:cTn id="22" dur="500"/>
-                                        <p:tgtEl>
-                                          <p:spTgt spid="9">
-                                            <p:txEl>
-                                              <p:pRg st="6" end="6"/>
-                                            </p:txEl>
-                                          </p:spTgt>
-                                        </p:tgtEl>
-                                      </p:cBhvr>
-                                    </p:animEffect>
-                                  </p:childTnLst>
-                                </p:cTn>
-                              </p:par>
-                            </p:childTnLst>
-                          </p:cTn>
-                        </p:par>
-                      </p:childTnLst>
-                    </p:cTn>
-                  </p:par>
-                  <p:par>
-                    <p:cTn id="23" fill="hold">
-                      <p:stCondLst>
-                        <p:cond delay="indefinite"/>
-                      </p:stCondLst>
-                      <p:childTnLst>
-                        <p:par>
-                          <p:cTn id="24" fill="hold">
-                            <p:stCondLst>
-                              <p:cond delay="0"/>
-                            </p:stCondLst>
-                            <p:childTnLst>
-                              <p:par>
-                                <p:cTn id="25" presetID="10" presetClass="entr" presetSubtype="0" fill="hold" nodeType="clickEffect">
-                                  <p:stCondLst>
-                                    <p:cond delay="0"/>
-                                  </p:stCondLst>
-                                  <p:childTnLst>
-                                    <p:set>
-                                      <p:cBhvr>
-                                        <p:cTn id="26" dur="1" fill="hold">
-                                          <p:stCondLst>
-                                            <p:cond delay="0"/>
-                                          </p:stCondLst>
-                                        </p:cTn>
-                                        <p:tgtEl>
-                                          <p:spTgt spid="9">
-                                            <p:txEl>
-                                              <p:pRg st="8" end="8"/>
-                                            </p:txEl>
-                                          </p:spTgt>
-                                        </p:tgtEl>
-                                        <p:attrNameLst>
-                                          <p:attrName>style.visibility</p:attrName>
-                                        </p:attrNameLst>
-                                      </p:cBhvr>
-                                      <p:to>
-                                        <p:strVal val="visible"/>
-                                      </p:to>
-                                    </p:set>
-                                    <p:animEffect transition="in" filter="fade">
-                                      <p:cBhvr>
-                                        <p:cTn id="27" dur="500"/>
-                                        <p:tgtEl>
-                                          <p:spTgt spid="9">
-                                            <p:txEl>
-                                              <p:pRg st="8" end="8"/>
+                                        <p:cTn id="21" dur="500"/>
+                                        <p:tgtEl>
+                                          <p:spTgt spid="2">
+                                            <p:txEl>
+                                              <p:pRg st="5" end="5"/>
                                             </p:txEl>
                                           </p:spTgt>
                                         </p:tgtEl>
@@ -27384,6 +27963,609 @@
         <p:cNvPr id="1" name="">
           <a:extLst>
             <a:ext uri="{FF2B5EF4-FFF2-40B4-BE49-F238E27FC236}">
+              <a16:creationId xmlns:a16="http://schemas.microsoft.com/office/drawing/2014/main" id="{69DE8081-B879-E9A4-ED5E-FAB62A98A98D}"/>
+            </a:ext>
+          </a:extLst>
+        </p:cNvPr>
+        <p:cNvGrpSpPr/>
+        <p:nvPr/>
+      </p:nvGrpSpPr>
+      <p:grpSpPr>
+        <a:xfrm>
+          <a:off x="0" y="0"/>
+          <a:ext cx="0" cy="0"/>
+          <a:chOff x="0" y="0"/>
+          <a:chExt cx="0" cy="0"/>
+        </a:xfrm>
+      </p:grpSpPr>
+      <p:sp>
+        <p:nvSpPr>
+          <p:cNvPr id="2" name="Title 1">
+            <a:extLst>
+              <a:ext uri="{FF2B5EF4-FFF2-40B4-BE49-F238E27FC236}">
+                <a16:creationId xmlns:a16="http://schemas.microsoft.com/office/drawing/2014/main" id="{583EFA73-C3E5-61F2-E8C0-2AFFA1C6B243}"/>
+              </a:ext>
+            </a:extLst>
+          </p:cNvPr>
+          <p:cNvSpPr>
+            <a:spLocks noGrp="1"/>
+          </p:cNvSpPr>
+          <p:nvPr>
+            <p:ph type="title"/>
+          </p:nvPr>
+        </p:nvSpPr>
+        <p:spPr/>
+        <p:txBody>
+          <a:bodyPr/>
+          <a:lstStyle/>
+          <a:p>
+            <a:r>
+              <a:rPr lang="en-GB" sz="2600" noProof="0" dirty="0">
+                <a:solidFill>
+                  <a:srgbClr val="0B365B"/>
+                </a:solidFill>
+                <a:latin typeface="Arial"/>
+              </a:rPr>
+              <a:t>Discussion: Interpretation of Findings</a:t>
+            </a:r>
+          </a:p>
+        </p:txBody>
+      </p:sp>
+      <p:sp>
+        <p:nvSpPr>
+          <p:cNvPr id="9" name="TextBox 8">
+            <a:extLst>
+              <a:ext uri="{FF2B5EF4-FFF2-40B4-BE49-F238E27FC236}">
+                <a16:creationId xmlns:a16="http://schemas.microsoft.com/office/drawing/2014/main" id="{D4098378-6CB8-E741-E925-973D8A6B0C1A}"/>
+              </a:ext>
+            </a:extLst>
+          </p:cNvPr>
+          <p:cNvSpPr txBox="1"/>
+          <p:nvPr/>
+        </p:nvSpPr>
+        <p:spPr>
+          <a:xfrm>
+            <a:off x="468000" y="1383618"/>
+            <a:ext cx="7560000" cy="3185487"/>
+          </a:xfrm>
+          <a:prstGeom prst="rect">
+            <a:avLst/>
+          </a:prstGeom>
+          <a:noFill/>
+        </p:spPr>
+        <p:txBody>
+          <a:bodyPr wrap="square" rtlCol="0">
+            <a:spAutoFit/>
+          </a:bodyPr>
+          <a:lstStyle/>
+          <a:p>
+            <a:pPr marL="285750" indent="-285750">
+              <a:spcAft>
+                <a:spcPts val="300"/>
+              </a:spcAft>
+              <a:buFont typeface="Arial" panose="020B0604020202020204" pitchFamily="34" charset="0"/>
+              <a:buChar char="•"/>
+            </a:pPr>
+            <a:r>
+              <a:rPr lang="en-GB" sz="1600" dirty="0">
+                <a:solidFill>
+                  <a:srgbClr val="0B365B"/>
+                </a:solidFill>
+              </a:rPr>
+              <a:t>Developer logging decisions &amp; challenges</a:t>
+            </a:r>
+          </a:p>
+          <a:p>
+            <a:pPr marL="285750" indent="-285750">
+              <a:spcAft>
+                <a:spcPts val="300"/>
+              </a:spcAft>
+              <a:buFont typeface="Arial" panose="020B0604020202020204" pitchFamily="34" charset="0"/>
+              <a:buChar char="•"/>
+            </a:pPr>
+            <a:endParaRPr lang="en-GB" sz="1600" dirty="0">
+              <a:solidFill>
+                <a:srgbClr val="0B365B"/>
+              </a:solidFill>
+            </a:endParaRPr>
+          </a:p>
+          <a:p>
+            <a:pPr marL="285750" indent="-285750">
+              <a:spcAft>
+                <a:spcPts val="300"/>
+              </a:spcAft>
+              <a:buFont typeface="Arial" panose="020B0604020202020204" pitchFamily="34" charset="0"/>
+              <a:buChar char="•"/>
+            </a:pPr>
+            <a:r>
+              <a:rPr lang="en-GB" sz="1600" dirty="0">
+                <a:solidFill>
+                  <a:srgbClr val="0B365B"/>
+                </a:solidFill>
+              </a:rPr>
+              <a:t>Academic recommendations in collected guidance</a:t>
+            </a:r>
+          </a:p>
+          <a:p>
+            <a:pPr marL="285750" indent="-285750">
+              <a:spcAft>
+                <a:spcPts val="300"/>
+              </a:spcAft>
+              <a:buFont typeface="Arial" panose="020B0604020202020204" pitchFamily="34" charset="0"/>
+              <a:buChar char="•"/>
+            </a:pPr>
+            <a:endParaRPr lang="en-GB" sz="1600" dirty="0">
+              <a:solidFill>
+                <a:srgbClr val="0B365B"/>
+              </a:solidFill>
+            </a:endParaRPr>
+          </a:p>
+          <a:p>
+            <a:pPr marL="285750" indent="-285750">
+              <a:spcAft>
+                <a:spcPts val="300"/>
+              </a:spcAft>
+              <a:buFont typeface="Arial" panose="020B0604020202020204" pitchFamily="34" charset="0"/>
+              <a:buChar char="•"/>
+            </a:pPr>
+            <a:r>
+              <a:rPr lang="en-GB" sz="1600" dirty="0">
+                <a:solidFill>
+                  <a:srgbClr val="0B365B"/>
+                </a:solidFill>
+              </a:rPr>
+              <a:t>Initial deductive codebook not complete</a:t>
+            </a:r>
+          </a:p>
+          <a:p>
+            <a:pPr marL="285750" indent="-285750">
+              <a:spcAft>
+                <a:spcPts val="300"/>
+              </a:spcAft>
+              <a:buFont typeface="Arial" panose="020B0604020202020204" pitchFamily="34" charset="0"/>
+              <a:buChar char="•"/>
+            </a:pPr>
+            <a:endParaRPr lang="en-GB" sz="1600" dirty="0">
+              <a:solidFill>
+                <a:srgbClr val="0B365B"/>
+              </a:solidFill>
+            </a:endParaRPr>
+          </a:p>
+          <a:p>
+            <a:pPr marL="285750" indent="-285750">
+              <a:spcAft>
+                <a:spcPts val="300"/>
+              </a:spcAft>
+              <a:buFont typeface="Arial" panose="020B0604020202020204" pitchFamily="34" charset="0"/>
+              <a:buChar char="•"/>
+            </a:pPr>
+            <a:r>
+              <a:rPr lang="en-GB" sz="1600" dirty="0">
+                <a:solidFill>
+                  <a:srgbClr val="0B365B"/>
+                </a:solidFill>
+              </a:rPr>
+              <a:t>Frequency indicates occurrence not guideline quality</a:t>
+            </a:r>
+          </a:p>
+          <a:p>
+            <a:pPr marL="285750" indent="-285750">
+              <a:spcAft>
+                <a:spcPts val="300"/>
+              </a:spcAft>
+              <a:buFont typeface="Arial" panose="020B0604020202020204" pitchFamily="34" charset="0"/>
+              <a:buChar char="•"/>
+            </a:pPr>
+            <a:endParaRPr lang="en-GB" sz="1600" dirty="0">
+              <a:solidFill>
+                <a:srgbClr val="0B365B"/>
+              </a:solidFill>
+            </a:endParaRPr>
+          </a:p>
+          <a:p>
+            <a:pPr marL="285750" indent="-285750">
+              <a:spcAft>
+                <a:spcPts val="300"/>
+              </a:spcAft>
+              <a:buFont typeface="Arial" panose="020B0604020202020204" pitchFamily="34" charset="0"/>
+              <a:buChar char="•"/>
+            </a:pPr>
+            <a:r>
+              <a:rPr lang="en-US" sz="1600" dirty="0">
+                <a:solidFill>
+                  <a:srgbClr val="0B365B"/>
+                </a:solidFill>
+              </a:rPr>
+              <a:t>Specific guideline meaning preserved beyond themes</a:t>
+            </a:r>
+            <a:endParaRPr lang="en-GB" sz="1600" dirty="0">
+              <a:solidFill>
+                <a:srgbClr val="0B365B"/>
+              </a:solidFill>
+            </a:endParaRPr>
+          </a:p>
+          <a:p>
+            <a:pPr>
+              <a:spcAft>
+                <a:spcPts val="300"/>
+              </a:spcAft>
+            </a:pPr>
+            <a:endParaRPr lang="en-GB" sz="1600" dirty="0">
+              <a:solidFill>
+                <a:srgbClr val="0B365B"/>
+              </a:solidFill>
+            </a:endParaRPr>
+          </a:p>
+          <a:p>
+            <a:pPr>
+              <a:spcAft>
+                <a:spcPts val="300"/>
+              </a:spcAft>
+            </a:pPr>
+            <a:endParaRPr lang="en-GB" sz="1600" dirty="0">
+              <a:solidFill>
+                <a:srgbClr val="0B365B"/>
+              </a:solidFill>
+            </a:endParaRPr>
+          </a:p>
+        </p:txBody>
+      </p:sp>
+    </p:spTree>
+    <p:extLst>
+      <p:ext uri="{BB962C8B-B14F-4D97-AF65-F5344CB8AC3E}">
+        <p14:creationId xmlns:p14="http://schemas.microsoft.com/office/powerpoint/2010/main" val="2240041382"/>
+      </p:ext>
+    </p:extLst>
+  </p:cSld>
+  <p:clrMapOvr>
+    <a:masterClrMapping/>
+  </p:clrMapOvr>
+  <p:timing>
+    <p:tnLst>
+      <p:par>
+        <p:cTn id="1" dur="indefinite" restart="never" nodeType="tmRoot">
+          <p:childTnLst>
+            <p:seq concurrent="1" nextAc="seek">
+              <p:cTn id="2" dur="indefinite" nodeType="mainSeq">
+                <p:childTnLst>
+                  <p:par>
+                    <p:cTn id="3" fill="hold">
+                      <p:stCondLst>
+                        <p:cond delay="indefinite"/>
+                      </p:stCondLst>
+                      <p:childTnLst>
+                        <p:par>
+                          <p:cTn id="4" fill="hold">
+                            <p:stCondLst>
+                              <p:cond delay="0"/>
+                            </p:stCondLst>
+                            <p:childTnLst>
+                              <p:par>
+                                <p:cTn id="5" presetID="10" presetClass="entr" presetSubtype="0" fill="hold" nodeType="clickEffect">
+                                  <p:stCondLst>
+                                    <p:cond delay="0"/>
+                                  </p:stCondLst>
+                                  <p:childTnLst>
+                                    <p:set>
+                                      <p:cBhvr>
+                                        <p:cTn id="6" dur="1" fill="hold">
+                                          <p:stCondLst>
+                                            <p:cond delay="0"/>
+                                          </p:stCondLst>
+                                        </p:cTn>
+                                        <p:tgtEl>
+                                          <p:spTgt spid="9">
+                                            <p:txEl>
+                                              <p:pRg st="0" end="0"/>
+                                            </p:txEl>
+                                          </p:spTgt>
+                                        </p:tgtEl>
+                                        <p:attrNameLst>
+                                          <p:attrName>style.visibility</p:attrName>
+                                        </p:attrNameLst>
+                                      </p:cBhvr>
+                                      <p:to>
+                                        <p:strVal val="visible"/>
+                                      </p:to>
+                                    </p:set>
+                                    <p:animEffect transition="in" filter="fade">
+                                      <p:cBhvr>
+                                        <p:cTn id="7" dur="500"/>
+                                        <p:tgtEl>
+                                          <p:spTgt spid="9">
+                                            <p:txEl>
+                                              <p:pRg st="0" end="0"/>
+                                            </p:txEl>
+                                          </p:spTgt>
+                                        </p:tgtEl>
+                                      </p:cBhvr>
+                                    </p:animEffect>
+                                  </p:childTnLst>
+                                </p:cTn>
+                              </p:par>
+                            </p:childTnLst>
+                          </p:cTn>
+                        </p:par>
+                      </p:childTnLst>
+                    </p:cTn>
+                  </p:par>
+                  <p:par>
+                    <p:cTn id="8" fill="hold">
+                      <p:stCondLst>
+                        <p:cond delay="indefinite"/>
+                      </p:stCondLst>
+                      <p:childTnLst>
+                        <p:par>
+                          <p:cTn id="9" fill="hold">
+                            <p:stCondLst>
+                              <p:cond delay="0"/>
+                            </p:stCondLst>
+                            <p:childTnLst>
+                              <p:par>
+                                <p:cTn id="10" presetID="10" presetClass="entr" presetSubtype="0" fill="hold" nodeType="clickEffect">
+                                  <p:stCondLst>
+                                    <p:cond delay="0"/>
+                                  </p:stCondLst>
+                                  <p:childTnLst>
+                                    <p:set>
+                                      <p:cBhvr>
+                                        <p:cTn id="11" dur="1" fill="hold">
+                                          <p:stCondLst>
+                                            <p:cond delay="0"/>
+                                          </p:stCondLst>
+                                        </p:cTn>
+                                        <p:tgtEl>
+                                          <p:spTgt spid="9">
+                                            <p:txEl>
+                                              <p:pRg st="2" end="2"/>
+                                            </p:txEl>
+                                          </p:spTgt>
+                                        </p:tgtEl>
+                                        <p:attrNameLst>
+                                          <p:attrName>style.visibility</p:attrName>
+                                        </p:attrNameLst>
+                                      </p:cBhvr>
+                                      <p:to>
+                                        <p:strVal val="visible"/>
+                                      </p:to>
+                                    </p:set>
+                                    <p:animEffect transition="in" filter="fade">
+                                      <p:cBhvr>
+                                        <p:cTn id="12" dur="500"/>
+                                        <p:tgtEl>
+                                          <p:spTgt spid="9">
+                                            <p:txEl>
+                                              <p:pRg st="2" end="2"/>
+                                            </p:txEl>
+                                          </p:spTgt>
+                                        </p:tgtEl>
+                                      </p:cBhvr>
+                                    </p:animEffect>
+                                  </p:childTnLst>
+                                </p:cTn>
+                              </p:par>
+                            </p:childTnLst>
+                          </p:cTn>
+                        </p:par>
+                      </p:childTnLst>
+                    </p:cTn>
+                  </p:par>
+                  <p:par>
+                    <p:cTn id="13" fill="hold">
+                      <p:stCondLst>
+                        <p:cond delay="indefinite"/>
+                      </p:stCondLst>
+                      <p:childTnLst>
+                        <p:par>
+                          <p:cTn id="14" fill="hold">
+                            <p:stCondLst>
+                              <p:cond delay="0"/>
+                            </p:stCondLst>
+                            <p:childTnLst>
+                              <p:par>
+                                <p:cTn id="15" presetID="10" presetClass="entr" presetSubtype="0" fill="hold" nodeType="clickEffect">
+                                  <p:stCondLst>
+                                    <p:cond delay="0"/>
+                                  </p:stCondLst>
+                                  <p:childTnLst>
+                                    <p:set>
+                                      <p:cBhvr>
+                                        <p:cTn id="16" dur="1" fill="hold">
+                                          <p:stCondLst>
+                                            <p:cond delay="0"/>
+                                          </p:stCondLst>
+                                        </p:cTn>
+                                        <p:tgtEl>
+                                          <p:spTgt spid="9">
+                                            <p:txEl>
+                                              <p:pRg st="4" end="4"/>
+                                            </p:txEl>
+                                          </p:spTgt>
+                                        </p:tgtEl>
+                                        <p:attrNameLst>
+                                          <p:attrName>style.visibility</p:attrName>
+                                        </p:attrNameLst>
+                                      </p:cBhvr>
+                                      <p:to>
+                                        <p:strVal val="visible"/>
+                                      </p:to>
+                                    </p:set>
+                                    <p:animEffect transition="in" filter="fade">
+                                      <p:cBhvr>
+                                        <p:cTn id="17" dur="500"/>
+                                        <p:tgtEl>
+                                          <p:spTgt spid="9">
+                                            <p:txEl>
+                                              <p:pRg st="4" end="4"/>
+                                            </p:txEl>
+                                          </p:spTgt>
+                                        </p:tgtEl>
+                                      </p:cBhvr>
+                                    </p:animEffect>
+                                  </p:childTnLst>
+                                </p:cTn>
+                              </p:par>
+                            </p:childTnLst>
+                          </p:cTn>
+                        </p:par>
+                      </p:childTnLst>
+                    </p:cTn>
+                  </p:par>
+                  <p:par>
+                    <p:cTn id="18" fill="hold">
+                      <p:stCondLst>
+                        <p:cond delay="indefinite"/>
+                      </p:stCondLst>
+                      <p:childTnLst>
+                        <p:par>
+                          <p:cTn id="19" fill="hold">
+                            <p:stCondLst>
+                              <p:cond delay="0"/>
+                            </p:stCondLst>
+                            <p:childTnLst>
+                              <p:par>
+                                <p:cTn id="20" presetID="10" presetClass="entr" presetSubtype="0" fill="hold" nodeType="clickEffect">
+                                  <p:stCondLst>
+                                    <p:cond delay="0"/>
+                                  </p:stCondLst>
+                                  <p:childTnLst>
+                                    <p:set>
+                                      <p:cBhvr>
+                                        <p:cTn id="21" dur="1" fill="hold">
+                                          <p:stCondLst>
+                                            <p:cond delay="0"/>
+                                          </p:stCondLst>
+                                        </p:cTn>
+                                        <p:tgtEl>
+                                          <p:spTgt spid="9">
+                                            <p:txEl>
+                                              <p:pRg st="6" end="6"/>
+                                            </p:txEl>
+                                          </p:spTgt>
+                                        </p:tgtEl>
+                                        <p:attrNameLst>
+                                          <p:attrName>style.visibility</p:attrName>
+                                        </p:attrNameLst>
+                                      </p:cBhvr>
+                                      <p:to>
+                                        <p:strVal val="visible"/>
+                                      </p:to>
+                                    </p:set>
+                                    <p:animEffect transition="in" filter="fade">
+                                      <p:cBhvr>
+                                        <p:cTn id="22" dur="500"/>
+                                        <p:tgtEl>
+                                          <p:spTgt spid="9">
+                                            <p:txEl>
+                                              <p:pRg st="6" end="6"/>
+                                            </p:txEl>
+                                          </p:spTgt>
+                                        </p:tgtEl>
+                                      </p:cBhvr>
+                                    </p:animEffect>
+                                  </p:childTnLst>
+                                </p:cTn>
+                              </p:par>
+                            </p:childTnLst>
+                          </p:cTn>
+                        </p:par>
+                      </p:childTnLst>
+                    </p:cTn>
+                  </p:par>
+                  <p:par>
+                    <p:cTn id="23" fill="hold">
+                      <p:stCondLst>
+                        <p:cond delay="indefinite"/>
+                      </p:stCondLst>
+                      <p:childTnLst>
+                        <p:par>
+                          <p:cTn id="24" fill="hold">
+                            <p:stCondLst>
+                              <p:cond delay="0"/>
+                            </p:stCondLst>
+                            <p:childTnLst>
+                              <p:par>
+                                <p:cTn id="25" presetID="10" presetClass="entr" presetSubtype="0" fill="hold" nodeType="clickEffect">
+                                  <p:stCondLst>
+                                    <p:cond delay="0"/>
+                                  </p:stCondLst>
+                                  <p:childTnLst>
+                                    <p:set>
+                                      <p:cBhvr>
+                                        <p:cTn id="26" dur="1" fill="hold">
+                                          <p:stCondLst>
+                                            <p:cond delay="0"/>
+                                          </p:stCondLst>
+                                        </p:cTn>
+                                        <p:tgtEl>
+                                          <p:spTgt spid="9">
+                                            <p:txEl>
+                                              <p:pRg st="8" end="8"/>
+                                            </p:txEl>
+                                          </p:spTgt>
+                                        </p:tgtEl>
+                                        <p:attrNameLst>
+                                          <p:attrName>style.visibility</p:attrName>
+                                        </p:attrNameLst>
+                                      </p:cBhvr>
+                                      <p:to>
+                                        <p:strVal val="visible"/>
+                                      </p:to>
+                                    </p:set>
+                                    <p:animEffect transition="in" filter="fade">
+                                      <p:cBhvr>
+                                        <p:cTn id="27" dur="500"/>
+                                        <p:tgtEl>
+                                          <p:spTgt spid="9">
+                                            <p:txEl>
+                                              <p:pRg st="8" end="8"/>
+                                            </p:txEl>
+                                          </p:spTgt>
+                                        </p:tgtEl>
+                                      </p:cBhvr>
+                                    </p:animEffect>
+                                  </p:childTnLst>
+                                </p:cTn>
+                              </p:par>
+                            </p:childTnLst>
+                          </p:cTn>
+                        </p:par>
+                      </p:childTnLst>
+                    </p:cTn>
+                  </p:par>
+                </p:childTnLst>
+              </p:cTn>
+              <p:prevCondLst>
+                <p:cond evt="onPrev" delay="0">
+                  <p:tgtEl>
+                    <p:sldTgt/>
+                  </p:tgtEl>
+                </p:cond>
+              </p:prevCondLst>
+              <p:nextCondLst>
+                <p:cond evt="onNext" delay="0">
+                  <p:tgtEl>
+                    <p:sldTgt/>
+                  </p:tgtEl>
+                </p:cond>
+              </p:nextCondLst>
+            </p:seq>
+          </p:childTnLst>
+        </p:cTn>
+      </p:par>
+    </p:tnLst>
+  </p:timing>
+</p:sld>
+</file>
+
+<file path=ppt/slides/slide36.xml><?xml version="1.0" encoding="utf-8"?>
+<p:sld xmlns:a="http://schemas.openxmlformats.org/drawingml/2006/main" xmlns:r="http://schemas.openxmlformats.org/officeDocument/2006/relationships" xmlns:p="http://schemas.openxmlformats.org/presentationml/2006/main">
+  <p:cSld>
+    <p:spTree>
+      <p:nvGrpSpPr>
+        <p:cNvPr id="1" name="">
+          <a:extLst>
+            <a:ext uri="{FF2B5EF4-FFF2-40B4-BE49-F238E27FC236}">
               <a16:creationId xmlns:a16="http://schemas.microsoft.com/office/drawing/2014/main" id="{BBFEB7AA-FD2F-56D2-DE63-802533B6B0DB}"/>
             </a:ext>
           </a:extLst>
@@ -28070,7 +29252,7 @@
 </p:sld>
 </file>
 
-<file path=ppt/slides/slide36.xml><?xml version="1.0" encoding="utf-8"?>
+<file path=ppt/slides/slide37.xml><?xml version="1.0" encoding="utf-8"?>
 <p:sld xmlns:a="http://schemas.openxmlformats.org/drawingml/2006/main" xmlns:r="http://schemas.openxmlformats.org/officeDocument/2006/relationships" xmlns:p="http://schemas.openxmlformats.org/presentationml/2006/main">
   <p:cSld>
     <p:spTree>
@@ -28186,7 +29368,7 @@
                   <a:spcPts val="600"/>
                 </a:spcAft>
               </a:pPr>
-              <a:t>36</a:t>
+              <a:t>37</a:t>
             </a:fld>
             <a:r>
               <a:rPr lang="en-GB" sz="700" noProof="0" dirty="0"/>
@@ -29434,7 +30616,7 @@
 </p:sld>
 </file>
 
-<file path=ppt/slides/slide37.xml><?xml version="1.0" encoding="utf-8"?>
+<file path=ppt/slides/slide38.xml><?xml version="1.0" encoding="utf-8"?>
 <p:sld xmlns:a="http://schemas.openxmlformats.org/drawingml/2006/main" xmlns:r="http://schemas.openxmlformats.org/officeDocument/2006/relationships" xmlns:p="http://schemas.openxmlformats.org/presentationml/2006/main">
   <p:cSld>
     <p:spTree>
@@ -29536,7 +30718,7 @@
                   <a:spcPts val="600"/>
                 </a:spcAft>
               </a:pPr>
-              <a:t>37</a:t>
+              <a:t>38</a:t>
             </a:fld>
             <a:r>
               <a:rPr lang="en-GB" sz="700" noProof="0" dirty="0"/>
@@ -30250,7 +31432,7 @@
                                         <p:tgtEl>
                                           <p:spTgt spid="3">
                                             <p:txEl>
-                                              <p:charRg st="262" end="307"/>
+                                              <p:pRg st="9" end="9"/>
                                             </p:txEl>
                                           </p:spTgt>
                                         </p:tgtEl>
@@ -30268,7 +31450,7 @@
                                         <p:tgtEl>
                                           <p:spTgt spid="3">
                                             <p:txEl>
-                                              <p:charRg st="262" end="307"/>
+                                              <p:pRg st="9" end="9"/>
                                             </p:txEl>
                                           </p:spTgt>
                                         </p:tgtEl>
@@ -30308,7 +31490,7 @@
 </p:sld>
 </file>
 
-<file path=ppt/slides/slide38.xml><?xml version="1.0" encoding="utf-8"?>
+<file path=ppt/slides/slide39.xml><?xml version="1.0" encoding="utf-8"?>
 <p:sld xmlns:a="http://schemas.openxmlformats.org/drawingml/2006/main" xmlns:r="http://schemas.openxmlformats.org/officeDocument/2006/relationships" xmlns:p="http://schemas.openxmlformats.org/presentationml/2006/main">
   <p:cSld>
     <p:spTree>
@@ -30410,7 +31592,7 @@
                   <a:spcPts val="600"/>
                 </a:spcAft>
               </a:pPr>
-              <a:t>38</a:t>
+              <a:t>39</a:t>
             </a:fld>
             <a:r>
               <a:rPr lang="en-GB" sz="700" noProof="0" dirty="0"/>
@@ -30535,146 +31717,6 @@
     <p:extLst>
       <p:ext uri="{BB962C8B-B14F-4D97-AF65-F5344CB8AC3E}">
         <p14:creationId xmlns:p14="http://schemas.microsoft.com/office/powerpoint/2010/main" val="244857875"/>
-      </p:ext>
-    </p:extLst>
-  </p:cSld>
-  <p:clrMapOvr>
-    <a:masterClrMapping/>
-  </p:clrMapOvr>
-</p:sld>
-</file>
-
-<file path=ppt/slides/slide39.xml><?xml version="1.0" encoding="utf-8"?>
-<p:sld xmlns:a="http://schemas.openxmlformats.org/drawingml/2006/main" xmlns:r="http://schemas.openxmlformats.org/officeDocument/2006/relationships" xmlns:p="http://schemas.openxmlformats.org/presentationml/2006/main">
-  <p:cSld>
-    <p:spTree>
-      <p:nvGrpSpPr>
-        <p:cNvPr id="1" name="">
-          <a:extLst>
-            <a:ext uri="{FF2B5EF4-FFF2-40B4-BE49-F238E27FC236}">
-              <a16:creationId xmlns:a16="http://schemas.microsoft.com/office/drawing/2014/main" id="{B050559D-56DF-CD48-9EA4-E6BB94E14FD1}"/>
-            </a:ext>
-          </a:extLst>
-        </p:cNvPr>
-        <p:cNvGrpSpPr/>
-        <p:nvPr/>
-      </p:nvGrpSpPr>
-      <p:grpSpPr>
-        <a:xfrm>
-          <a:off x="0" y="0"/>
-          <a:ext cx="0" cy="0"/>
-          <a:chOff x="0" y="0"/>
-          <a:chExt cx="0" cy="0"/>
-        </a:xfrm>
-      </p:grpSpPr>
-      <p:sp>
-        <p:nvSpPr>
-          <p:cNvPr id="3" name="Titel 2" hidden="1">
-            <a:extLst>
-              <a:ext uri="{FF2B5EF4-FFF2-40B4-BE49-F238E27FC236}">
-                <a16:creationId xmlns:a16="http://schemas.microsoft.com/office/drawing/2014/main" id="{5A60E015-CEBA-314A-0F7E-61973D5225F1}"/>
-              </a:ext>
-            </a:extLst>
-          </p:cNvPr>
-          <p:cNvSpPr>
-            <a:spLocks noGrp="1"/>
-          </p:cNvSpPr>
-          <p:nvPr>
-            <p:ph type="title"/>
-          </p:nvPr>
-        </p:nvSpPr>
-        <p:spPr>
-          <a:xfrm>
-            <a:off x="485999" y="-956642"/>
-            <a:ext cx="8172000" cy="720000"/>
-          </a:xfrm>
-        </p:spPr>
-        <p:txBody>
-          <a:bodyPr/>
-          <a:lstStyle/>
-          <a:p>
-            <a:r>
-              <a:rPr lang="en-GB" noProof="0" dirty="0" err="1"/>
-              <a:t>Endfolie</a:t>
-            </a:r>
-            <a:endParaRPr lang="en-GB" noProof="0" dirty="0"/>
-          </a:p>
-        </p:txBody>
-      </p:sp>
-      <p:sp>
-        <p:nvSpPr>
-          <p:cNvPr id="2" name="TextBox 1">
-            <a:extLst>
-              <a:ext uri="{FF2B5EF4-FFF2-40B4-BE49-F238E27FC236}">
-                <a16:creationId xmlns:a16="http://schemas.microsoft.com/office/drawing/2014/main" id="{A1793275-069A-E182-AC00-C319E6BA5589}"/>
-              </a:ext>
-            </a:extLst>
-          </p:cNvPr>
-          <p:cNvSpPr txBox="1"/>
-          <p:nvPr/>
-        </p:nvSpPr>
-        <p:spPr>
-          <a:xfrm>
-            <a:off x="0" y="1602254"/>
-            <a:ext cx="9144000" cy="1938992"/>
-          </a:xfrm>
-          <a:prstGeom prst="rect">
-            <a:avLst/>
-          </a:prstGeom>
-          <a:noFill/>
-        </p:spPr>
-        <p:txBody>
-          <a:bodyPr wrap="square" rtlCol="0">
-            <a:spAutoFit/>
-          </a:bodyPr>
-          <a:lstStyle/>
-          <a:p>
-            <a:pPr algn="ctr"/>
-            <a:r>
-              <a:rPr lang="en-GB" sz="4000" noProof="0" dirty="0">
-                <a:solidFill>
-                  <a:schemeClr val="bg1"/>
-                </a:solidFill>
-              </a:rPr>
-              <a:t>Thank you </a:t>
-            </a:r>
-            <a:br>
-              <a:rPr lang="en-GB" sz="4000" noProof="0" dirty="0">
-                <a:solidFill>
-                  <a:schemeClr val="bg1"/>
-                </a:solidFill>
-              </a:rPr>
-            </a:br>
-            <a:r>
-              <a:rPr lang="en-GB" sz="4000" noProof="0" dirty="0">
-                <a:solidFill>
-                  <a:schemeClr val="bg1"/>
-                </a:solidFill>
-              </a:rPr>
-              <a:t>for your </a:t>
-            </a:r>
-            <a:br>
-              <a:rPr lang="en-GB" sz="4000" noProof="0" dirty="0">
-                <a:solidFill>
-                  <a:schemeClr val="bg1"/>
-                </a:solidFill>
-              </a:rPr>
-            </a:br>
-            <a:r>
-              <a:rPr lang="en-GB" sz="4000" noProof="0" dirty="0">
-                <a:solidFill>
-                  <a:schemeClr val="bg1"/>
-                </a:solidFill>
-              </a:rPr>
-              <a:t>attention</a:t>
-            </a:r>
-          </a:p>
-        </p:txBody>
-      </p:sp>
-    </p:spTree>
-    <p:extLst>
-      <p:ext uri="{BB962C8B-B14F-4D97-AF65-F5344CB8AC3E}">
-        <p14:creationId xmlns:p14="http://schemas.microsoft.com/office/powerpoint/2010/main" val="2027820574"/>
       </p:ext>
     </p:extLst>
   </p:cSld>
@@ -31130,6 +32172,146 @@
         <p:cNvPr id="1" name="">
           <a:extLst>
             <a:ext uri="{FF2B5EF4-FFF2-40B4-BE49-F238E27FC236}">
+              <a16:creationId xmlns:a16="http://schemas.microsoft.com/office/drawing/2014/main" id="{B050559D-56DF-CD48-9EA4-E6BB94E14FD1}"/>
+            </a:ext>
+          </a:extLst>
+        </p:cNvPr>
+        <p:cNvGrpSpPr/>
+        <p:nvPr/>
+      </p:nvGrpSpPr>
+      <p:grpSpPr>
+        <a:xfrm>
+          <a:off x="0" y="0"/>
+          <a:ext cx="0" cy="0"/>
+          <a:chOff x="0" y="0"/>
+          <a:chExt cx="0" cy="0"/>
+        </a:xfrm>
+      </p:grpSpPr>
+      <p:sp>
+        <p:nvSpPr>
+          <p:cNvPr id="3" name="Titel 2" hidden="1">
+            <a:extLst>
+              <a:ext uri="{FF2B5EF4-FFF2-40B4-BE49-F238E27FC236}">
+                <a16:creationId xmlns:a16="http://schemas.microsoft.com/office/drawing/2014/main" id="{5A60E015-CEBA-314A-0F7E-61973D5225F1}"/>
+              </a:ext>
+            </a:extLst>
+          </p:cNvPr>
+          <p:cNvSpPr>
+            <a:spLocks noGrp="1"/>
+          </p:cNvSpPr>
+          <p:nvPr>
+            <p:ph type="title"/>
+          </p:nvPr>
+        </p:nvSpPr>
+        <p:spPr>
+          <a:xfrm>
+            <a:off x="485999" y="-956642"/>
+            <a:ext cx="8172000" cy="720000"/>
+          </a:xfrm>
+        </p:spPr>
+        <p:txBody>
+          <a:bodyPr/>
+          <a:lstStyle/>
+          <a:p>
+            <a:r>
+              <a:rPr lang="en-GB" noProof="0" dirty="0" err="1"/>
+              <a:t>Endfolie</a:t>
+            </a:r>
+            <a:endParaRPr lang="en-GB" noProof="0" dirty="0"/>
+          </a:p>
+        </p:txBody>
+      </p:sp>
+      <p:sp>
+        <p:nvSpPr>
+          <p:cNvPr id="2" name="TextBox 1">
+            <a:extLst>
+              <a:ext uri="{FF2B5EF4-FFF2-40B4-BE49-F238E27FC236}">
+                <a16:creationId xmlns:a16="http://schemas.microsoft.com/office/drawing/2014/main" id="{A1793275-069A-E182-AC00-C319E6BA5589}"/>
+              </a:ext>
+            </a:extLst>
+          </p:cNvPr>
+          <p:cNvSpPr txBox="1"/>
+          <p:nvPr/>
+        </p:nvSpPr>
+        <p:spPr>
+          <a:xfrm>
+            <a:off x="0" y="1602254"/>
+            <a:ext cx="9144000" cy="1938992"/>
+          </a:xfrm>
+          <a:prstGeom prst="rect">
+            <a:avLst/>
+          </a:prstGeom>
+          <a:noFill/>
+        </p:spPr>
+        <p:txBody>
+          <a:bodyPr wrap="square" rtlCol="0">
+            <a:spAutoFit/>
+          </a:bodyPr>
+          <a:lstStyle/>
+          <a:p>
+            <a:pPr algn="ctr"/>
+            <a:r>
+              <a:rPr lang="en-GB" sz="4000" noProof="0" dirty="0">
+                <a:solidFill>
+                  <a:schemeClr val="bg1"/>
+                </a:solidFill>
+              </a:rPr>
+              <a:t>Thank you </a:t>
+            </a:r>
+            <a:br>
+              <a:rPr lang="en-GB" sz="4000" noProof="0" dirty="0">
+                <a:solidFill>
+                  <a:schemeClr val="bg1"/>
+                </a:solidFill>
+              </a:rPr>
+            </a:br>
+            <a:r>
+              <a:rPr lang="en-GB" sz="4000" noProof="0" dirty="0">
+                <a:solidFill>
+                  <a:schemeClr val="bg1"/>
+                </a:solidFill>
+              </a:rPr>
+              <a:t>for your </a:t>
+            </a:r>
+            <a:br>
+              <a:rPr lang="en-GB" sz="4000" noProof="0" dirty="0">
+                <a:solidFill>
+                  <a:schemeClr val="bg1"/>
+                </a:solidFill>
+              </a:rPr>
+            </a:br>
+            <a:r>
+              <a:rPr lang="en-GB" sz="4000" noProof="0" dirty="0">
+                <a:solidFill>
+                  <a:schemeClr val="bg1"/>
+                </a:solidFill>
+              </a:rPr>
+              <a:t>attention</a:t>
+            </a:r>
+          </a:p>
+        </p:txBody>
+      </p:sp>
+    </p:spTree>
+    <p:extLst>
+      <p:ext uri="{BB962C8B-B14F-4D97-AF65-F5344CB8AC3E}">
+        <p14:creationId xmlns:p14="http://schemas.microsoft.com/office/powerpoint/2010/main" val="2027820574"/>
+      </p:ext>
+    </p:extLst>
+  </p:cSld>
+  <p:clrMapOvr>
+    <a:masterClrMapping/>
+  </p:clrMapOvr>
+</p:sld>
+</file>
+
+<file path=ppt/slides/slide41.xml><?xml version="1.0" encoding="utf-8"?>
+<p:sld xmlns:a="http://schemas.openxmlformats.org/drawingml/2006/main" xmlns:r="http://schemas.openxmlformats.org/officeDocument/2006/relationships" xmlns:p="http://schemas.openxmlformats.org/presentationml/2006/main">
+  <p:cSld>
+    <p:spTree>
+      <p:nvGrpSpPr>
+        <p:cNvPr id="1" name="">
+          <a:extLst>
+            <a:ext uri="{FF2B5EF4-FFF2-40B4-BE49-F238E27FC236}">
               <a16:creationId xmlns:a16="http://schemas.microsoft.com/office/drawing/2014/main" id="{67A79F84-5D7B-4A76-3D7E-938CBC93DB1D}"/>
             </a:ext>
           </a:extLst>
@@ -31232,7 +32414,7 @@
 </p:sld>
 </file>
 
-<file path=ppt/slides/slide41.xml><?xml version="1.0" encoding="utf-8"?>
+<file path=ppt/slides/slide42.xml><?xml version="1.0" encoding="utf-8"?>
 <p:sld xmlns:a="http://schemas.openxmlformats.org/drawingml/2006/main" xmlns:r="http://schemas.openxmlformats.org/officeDocument/2006/relationships" xmlns:p="http://schemas.openxmlformats.org/presentationml/2006/main">
   <p:cSld>
     <p:spTree>
@@ -31342,7 +32524,7 @@
 </p:sld>
 </file>
 
-<file path=ppt/slides/slide42.xml><?xml version="1.0" encoding="utf-8"?>
+<file path=ppt/slides/slide43.xml><?xml version="1.0" encoding="utf-8"?>
 <p:sld xmlns:a="http://schemas.openxmlformats.org/drawingml/2006/main" xmlns:r="http://schemas.openxmlformats.org/officeDocument/2006/relationships" xmlns:p="http://schemas.openxmlformats.org/presentationml/2006/main">
   <p:cSld>
     <p:spTree>
